--- a/docs-michael/usability/slides/personas-deck.pptx
+++ b/docs-michael/usability/slides/personas-deck.pptx
@@ -15,6 +15,8 @@
     <p:sldId id="263" r:id="rId15"/>
     <p:sldId id="264" r:id="rId16"/>
     <p:sldId id="265" r:id="rId17"/>
+    <p:sldId id="266" r:id="rId18"/>
+    <p:sldId id="267" r:id="rId19"/>
   </p:sldIdLst>
   <p:sldSz cx="12191695" cy="6858000" type="screen4x3"/>
   <p:notesSz cx="6858000" cy="9144000"/>
@@ -511,7 +513,147 @@
           <a:lstStyle/>
           <a:p>
             <a:r>
-              <a:t>Git-clones jiuwenswarm and contributes to the engine.</a:t>
+              <a:t>The developer who changes jiuwenswarm itself.</a:t>
+            </a:r>
+          </a:p>
+        </p:txBody>
+      </p:sp>
+      <p:sp>
+        <p:nvSpPr>
+          <p:cNvPr id="4" name="Slide Number Placeholder 3"/>
+          <p:cNvSpPr>
+            <a:spLocks noGrp="1"/>
+          </p:cNvSpPr>
+          <p:nvPr>
+            <p:ph type="sldNum" idx="5" sz="quarter"/>
+          </p:nvPr>
+        </p:nvSpPr>
+        <p:spPr/>
+      </p:sp>
+    </p:spTree>
+  </p:cSld>
+  <p:clrMapOvr>
+    <a:masterClrMapping/>
+  </p:clrMapOvr>
+</p:notes>
+</file>
+
+<file path=ppt/notesSlides/notesSlide10.xml><?xml version="1.0" encoding="utf-8"?>
+<p:notes xmlns:a="http://schemas.openxmlformats.org/drawingml/2006/main" xmlns:p="http://schemas.openxmlformats.org/presentationml/2006/main" xmlns:r="http://schemas.openxmlformats.org/officeDocument/2006/relationships">
+  <p:cSld>
+    <p:spTree>
+      <p:nvGrpSpPr>
+        <p:cNvPr id="1" name=""/>
+        <p:cNvGrpSpPr/>
+        <p:nvPr/>
+      </p:nvGrpSpPr>
+      <p:grpSpPr>
+        <a:xfrm>
+          <a:off x="0" y="0"/>
+          <a:ext cx="0" cy="0"/>
+          <a:chOff x="0" y="0"/>
+          <a:chExt cx="0" cy="0"/>
+        </a:xfrm>
+      </p:grpSpPr>
+      <p:sp>
+        <p:nvSpPr>
+          <p:cNvPr id="2" name="Slide Image Placeholder 1"/>
+          <p:cNvSpPr>
+            <a:spLocks noGrp="1"/>
+          </p:cNvSpPr>
+          <p:nvPr>
+            <p:ph type="sldImg" idx="2"/>
+          </p:nvPr>
+        </p:nvSpPr>
+        <p:spPr/>
+      </p:sp>
+      <p:sp>
+        <p:nvSpPr>
+          <p:cNvPr id="3" name="Notes Placeholder 2"/>
+          <p:cNvSpPr>
+            <a:spLocks noGrp="1"/>
+          </p:cNvSpPr>
+          <p:nvPr>
+            <p:ph type="body" idx="3" sz="quarter"/>
+          </p:nvPr>
+        </p:nvSpPr>
+        <p:spPr/>
+        <p:txBody>
+          <a:bodyPr/>
+          <a:lstStyle/>
+          <a:p>
+            <a:r>
+              <a:t>Builds their own product using jiuwenswarm as its backend.</a:t>
+            </a:r>
+          </a:p>
+        </p:txBody>
+      </p:sp>
+      <p:sp>
+        <p:nvSpPr>
+          <p:cNvPr id="4" name="Slide Number Placeholder 3"/>
+          <p:cNvSpPr>
+            <a:spLocks noGrp="1"/>
+          </p:cNvSpPr>
+          <p:nvPr>
+            <p:ph type="sldNum" idx="5" sz="quarter"/>
+          </p:nvPr>
+        </p:nvSpPr>
+        <p:spPr/>
+      </p:sp>
+    </p:spTree>
+  </p:cSld>
+  <p:clrMapOvr>
+    <a:masterClrMapping/>
+  </p:clrMapOvr>
+</p:notes>
+</file>
+
+<file path=ppt/notesSlides/notesSlide11.xml><?xml version="1.0" encoding="utf-8"?>
+<p:notes xmlns:a="http://schemas.openxmlformats.org/drawingml/2006/main" xmlns:p="http://schemas.openxmlformats.org/presentationml/2006/main" xmlns:r="http://schemas.openxmlformats.org/officeDocument/2006/relationships">
+  <p:cSld>
+    <p:spTree>
+      <p:nvGrpSpPr>
+        <p:cNvPr id="1" name=""/>
+        <p:cNvGrpSpPr/>
+        <p:nvPr/>
+      </p:nvGrpSpPr>
+      <p:grpSpPr>
+        <a:xfrm>
+          <a:off x="0" y="0"/>
+          <a:ext cx="0" cy="0"/>
+          <a:chOff x="0" y="0"/>
+          <a:chExt cx="0" cy="0"/>
+        </a:xfrm>
+      </p:grpSpPr>
+      <p:sp>
+        <p:nvSpPr>
+          <p:cNvPr id="2" name="Slide Image Placeholder 1"/>
+          <p:cNvSpPr>
+            <a:spLocks noGrp="1"/>
+          </p:cNvSpPr>
+          <p:nvPr>
+            <p:ph type="sldImg" idx="2"/>
+          </p:nvPr>
+        </p:nvSpPr>
+        <p:spPr/>
+      </p:sp>
+      <p:sp>
+        <p:nvSpPr>
+          <p:cNvPr id="3" name="Notes Placeholder 2"/>
+          <p:cNvSpPr>
+            <a:spLocks noGrp="1"/>
+          </p:cNvSpPr>
+          <p:nvPr>
+            <p:ph type="body" idx="3" sz="quarter"/>
+          </p:nvPr>
+        </p:nvSpPr>
+        <p:spPr/>
+        <p:txBody>
+          <a:bodyPr/>
+          <a:lstStyle/>
+          <a:p>
+            <a:r>
+              <a:t>Writes, packages, and distributes skills.</a:t>
             </a:r>
           </a:p>
         </p:txBody>
@@ -581,7 +723,7 @@
           <a:lstStyle/>
           <a:p>
             <a:r>
-              <a:t>Installs, runs and keeps one instance healthy; also its user.</a:t>
+              <a:t>Runs their own instance - and is also a user of it.</a:t>
             </a:r>
           </a:p>
         </p:txBody>
@@ -651,7 +793,7 @@
           <a:lstStyle/>
           <a:p>
             <a:r>
-              <a:t>Maintains a bot a group uses; no multi-tenancy means all share one identity.</a:t>
+              <a:t>Runs one instance as a shared bot a group talks to.</a:t>
             </a:r>
           </a:p>
         </p:txBody>
@@ -721,7 +863,7 @@
           <a:lstStyle/>
           <a:p>
             <a:r>
-              <a:t>Base consumer; other consumers build on this.</a:t>
+              <a:t>Uses the agent directly - the base everyone builds on.</a:t>
             </a:r>
           </a:p>
         </p:txBody>
@@ -791,7 +933,7 @@
           <a:lstStyle/>
           <a:p>
             <a:r>
-              <a:t>Web UI surface shared by chat and code.</a:t>
+              <a:t>Uses the agent in the rich Web UI (chat + code).</a:t>
             </a:r>
           </a:p>
         </p:txBody>
@@ -861,7 +1003,7 @@
           <a:lstStyle/>
           <a:p>
             <a:r>
-              <a:t>Chatter; inherits Consumer + Web User.</a:t>
+              <a:t>Uses the Web UI mostly to ask questions and get answers.</a:t>
             </a:r>
           </a:p>
         </p:txBody>
@@ -931,7 +1073,7 @@
           <a:lstStyle/>
           <a:p>
             <a:r>
-              <a:t>Coder; inherits Consumer + Web User.</a:t>
+              <a:t>Uses the Web UI to get real code work done.</a:t>
             </a:r>
           </a:p>
         </p:txBody>
@@ -1001,7 +1143,7 @@
           <a:lstStyle/>
           <a:p>
             <a:r>
-              <a:t>Builds on a ready jiuwenswarm over E2A/WebSocket/ACP.</a:t>
+              <a:t>TBD - findings not yet collected</a:t>
             </a:r>
           </a:p>
         </p:txBody>
@@ -1071,7 +1213,7 @@
           <a:lstStyle/>
           <a:p>
             <a:r>
-              <a:t>Adds capability content (skills) users enable on an instance.</a:t>
+              <a:t>TBD - findings not yet collected</a:t>
             </a:r>
           </a:p>
         </p:txBody>
@@ -4087,7 +4229,7 @@
       <p:grpSpPr/>
       <p:sp>
         <p:nvSpPr>
-          <p:cNvPr id="2" name="Rectangle 1"/>
+          <p:cNvPr id="2" name="Rounded Rectangle 1"/>
           <p:cNvSpPr/>
           <p:nvPr/>
         </p:nvSpPr>
@@ -4096,7 +4238,7 @@
             <a:off x="0" y="0"/>
             <a:ext cx="12191695" cy="6858000"/>
           </a:xfrm>
-          <a:prstGeom prst="rect">
+          <a:prstGeom prst="roundRect">
             <a:avLst/>
           </a:prstGeom>
           <a:solidFill>
@@ -4130,16 +4272,16 @@
       </p:sp>
       <p:sp>
         <p:nvSpPr>
-          <p:cNvPr id="3" name="Rectangle 2"/>
+          <p:cNvPr id="3" name="Rounded Rectangle 2"/>
           <p:cNvSpPr/>
           <p:nvPr/>
         </p:nvSpPr>
         <p:spPr>
           <a:xfrm>
-            <a:off x="457200" y="658368"/>
-            <a:ext cx="146304" cy="914400"/>
-          </a:xfrm>
-          <a:prstGeom prst="rect">
+            <a:off x="822960" y="457200"/>
+            <a:ext cx="3291840" cy="384048"/>
+          </a:xfrm>
+          <a:prstGeom prst="roundRect">
             <a:avLst/>
           </a:prstGeom>
           <a:solidFill>
@@ -4164,10 +4306,18 @@
           </a:fontRef>
         </p:style>
         <p:txBody>
-          <a:bodyPr rtlCol="0" anchor="ctr"/>
+          <a:bodyPr rtlCol="0" anchor="ctr" tIns="27432" lIns="109728"/>
           <a:lstStyle/>
           <a:p>
             <a:pPr algn="ctr"/>
+            <a:r>
+              <a:rPr sz="1300" b="1">
+                <a:solidFill>
+                  <a:srgbClr val="0F1420"/>
+                </a:solidFill>
+              </a:rPr>
+              <a:t>PERSONAS</a:t>
+            </a:r>
           </a:p>
         </p:txBody>
       </p:sp>
@@ -4179,8 +4329,8 @@
         </p:nvSpPr>
         <p:spPr>
           <a:xfrm>
-            <a:off x="822960" y="457200"/>
-            <a:ext cx="10515600" cy="1463040"/>
+            <a:off x="822960" y="1051560"/>
+            <a:ext cx="10789920" cy="914400"/>
           </a:xfrm>
           <a:prstGeom prst="rect">
             <a:avLst/>
@@ -4193,9 +4343,8 @@
           </a:bodyPr>
           <a:lstStyle/>
           <a:p>
-            <a:pPr algn="l"/>
-            <a:r>
-              <a:rPr sz="5400" b="1">
+            <a:r>
+              <a:rPr sz="4600" b="1">
                 <a:solidFill>
                   <a:srgbClr val="E8EDF4"/>
                 </a:solidFill>
@@ -4203,10 +4352,32 @@
               <a:t>The 4 pillars around jiuwenswarm</a:t>
             </a:r>
           </a:p>
-          <a:p>
-            <a:pPr algn="l"/>
-            <a:r>
-              <a:rPr sz="2000">
+        </p:txBody>
+      </p:sp>
+      <p:sp>
+        <p:nvSpPr>
+          <p:cNvPr id="5" name="TextBox 4"/>
+          <p:cNvSpPr txBox="1"/>
+          <p:nvPr/>
+        </p:nvSpPr>
+        <p:spPr>
+          <a:xfrm>
+            <a:off x="841248" y="1965960"/>
+            <a:ext cx="10789920" cy="411480"/>
+          </a:xfrm>
+          <a:prstGeom prst="rect">
+            <a:avLst/>
+          </a:prstGeom>
+          <a:noFill/>
+        </p:spPr>
+        <p:txBody>
+          <a:bodyPr wrap="square">
+            <a:spAutoFit/>
+          </a:bodyPr>
+          <a:lstStyle/>
+          <a:p>
+            <a:r>
+              <a:rPr sz="1800" b="0">
                 <a:solidFill>
                   <a:srgbClr val="9AA6B8"/>
                 </a:solidFill>
@@ -4218,14 +4389,14 @@
       </p:sp>
       <p:sp>
         <p:nvSpPr>
-          <p:cNvPr id="5" name="Rounded Rectangle 4"/>
+          <p:cNvPr id="6" name="Rounded Rectangle 5"/>
           <p:cNvSpPr/>
           <p:nvPr/>
         </p:nvSpPr>
         <p:spPr>
           <a:xfrm>
-            <a:off x="502920" y="2194560"/>
-            <a:ext cx="2468880" cy="4023360"/>
+            <a:off x="502920" y="2377440"/>
+            <a:ext cx="2468880" cy="3931920"/>
           </a:xfrm>
           <a:prstGeom prst="roundRect">
             <a:avLst/>
@@ -4279,14 +4450,14 @@
       </p:sp>
       <p:sp>
         <p:nvSpPr>
-          <p:cNvPr id="6" name="Rounded Rectangle 5"/>
+          <p:cNvPr id="7" name="Rounded Rectangle 6"/>
           <p:cNvSpPr/>
           <p:nvPr/>
         </p:nvSpPr>
         <p:spPr>
           <a:xfrm>
-            <a:off x="3246120" y="2194560"/>
-            <a:ext cx="2468880" cy="4023360"/>
+            <a:off x="3246120" y="2377440"/>
+            <a:ext cx="2468880" cy="3931920"/>
           </a:xfrm>
           <a:prstGeom prst="roundRect">
             <a:avLst/>
@@ -4350,14 +4521,14 @@
       </p:sp>
       <p:sp>
         <p:nvSpPr>
-          <p:cNvPr id="7" name="Rounded Rectangle 6"/>
+          <p:cNvPr id="8" name="Rounded Rectangle 7"/>
           <p:cNvSpPr/>
           <p:nvPr/>
         </p:nvSpPr>
         <p:spPr>
           <a:xfrm>
-            <a:off x="5989320" y="2194560"/>
-            <a:ext cx="2468880" cy="4023360"/>
+            <a:off x="5989320" y="2377440"/>
+            <a:ext cx="2468880" cy="3931920"/>
           </a:xfrm>
           <a:prstGeom prst="roundRect">
             <a:avLst/>
@@ -4471,14 +4642,14 @@
       </p:sp>
       <p:sp>
         <p:nvSpPr>
-          <p:cNvPr id="8" name="Rounded Rectangle 7"/>
+          <p:cNvPr id="9" name="Rounded Rectangle 8"/>
           <p:cNvSpPr/>
           <p:nvPr/>
         </p:nvSpPr>
         <p:spPr>
           <a:xfrm>
-            <a:off x="8732520" y="2194560"/>
-            <a:ext cx="2468880" cy="4023360"/>
+            <a:off x="8732520" y="2377440"/>
+            <a:ext cx="2468880" cy="3931920"/>
           </a:xfrm>
           <a:prstGeom prst="roundRect">
             <a:avLst/>
@@ -4568,7 +4739,7 @@
       <p:grpSpPr/>
       <p:sp>
         <p:nvSpPr>
-          <p:cNvPr id="2" name="Rectangle 1"/>
+          <p:cNvPr id="2" name="Rounded Rectangle 1"/>
           <p:cNvSpPr/>
           <p:nvPr/>
         </p:nvSpPr>
@@ -4577,7 +4748,7 @@
             <a:off x="0" y="0"/>
             <a:ext cx="12191695" cy="6858000"/>
           </a:xfrm>
-          <a:prstGeom prst="rect">
+          <a:prstGeom prst="roundRect">
             <a:avLst/>
           </a:prstGeom>
           <a:solidFill>
@@ -4611,20 +4782,20 @@
       </p:sp>
       <p:sp>
         <p:nvSpPr>
-          <p:cNvPr id="3" name="Rectangle 2"/>
+          <p:cNvPr id="3" name="Rounded Rectangle 2"/>
           <p:cNvSpPr/>
           <p:nvPr/>
         </p:nvSpPr>
         <p:spPr>
           <a:xfrm>
-            <a:off x="457200" y="658368"/>
-            <a:ext cx="146304" cy="914400"/>
-          </a:xfrm>
-          <a:prstGeom prst="rect">
+            <a:off x="822960" y="457200"/>
+            <a:ext cx="3291840" cy="384048"/>
+          </a:xfrm>
+          <a:prstGeom prst="roundRect">
             <a:avLst/>
           </a:prstGeom>
           <a:solidFill>
-            <a:srgbClr val="4E9EFF"/>
+            <a:srgbClr val="FFB74D"/>
           </a:solidFill>
           <a:ln>
             <a:noFill/>
@@ -4645,10 +4816,18 @@
           </a:fontRef>
         </p:style>
         <p:txBody>
-          <a:bodyPr rtlCol="0" anchor="ctr"/>
+          <a:bodyPr rtlCol="0" anchor="ctr" tIns="27432" lIns="109728"/>
           <a:lstStyle/>
           <a:p>
             <a:pPr algn="ctr"/>
+            <a:r>
+              <a:rPr sz="1300" b="1">
+                <a:solidFill>
+                  <a:srgbClr val="0F1420"/>
+                </a:solidFill>
+              </a:rPr>
+              <a:t>CONSUMERS -&gt; CHANNEL USER</a:t>
+            </a:r>
           </a:p>
         </p:txBody>
       </p:sp>
@@ -4660,8 +4839,8 @@
         </p:nvSpPr>
         <p:spPr>
           <a:xfrm>
-            <a:off x="822960" y="457200"/>
-            <a:ext cx="10515600" cy="1463040"/>
+            <a:off x="822960" y="1051560"/>
+            <a:ext cx="10789920" cy="914400"/>
           </a:xfrm>
           <a:prstGeom prst="rect">
             <a:avLst/>
@@ -4674,39 +4853,93 @@
           </a:bodyPr>
           <a:lstStyle/>
           <a:p>
-            <a:pPr algn="l"/>
-            <a:r>
-              <a:rPr sz="5400" b="1">
+            <a:r>
+              <a:rPr sz="4600" b="1">
                 <a:solidFill>
                   <a:srgbClr val="E8EDF4"/>
                 </a:solidFill>
               </a:rPr>
-              <a:t>Skill Author</a:t>
-            </a:r>
-          </a:p>
-          <a:p>
-            <a:pPr algn="l"/>
-            <a:r>
-              <a:rPr sz="2000">
+              <a:t>Channel Users (Browser · IDE)</a:t>
+            </a:r>
+          </a:p>
+        </p:txBody>
+      </p:sp>
+      <p:sp>
+        <p:nvSpPr>
+          <p:cNvPr id="5" name="TextBox 4"/>
+          <p:cNvSpPr txBox="1"/>
+          <p:nvPr/>
+        </p:nvSpPr>
+        <p:spPr>
+          <a:xfrm>
+            <a:off x="841248" y="1965960"/>
+            <a:ext cx="10789920" cy="411480"/>
+          </a:xfrm>
+          <a:prstGeom prst="rect">
+            <a:avLst/>
+          </a:prstGeom>
+          <a:noFill/>
+        </p:spPr>
+        <p:txBody>
+          <a:bodyPr wrap="square">
+            <a:spAutoFit/>
+          </a:bodyPr>
+          <a:lstStyle/>
+          <a:p>
+            <a:r>
+              <a:rPr sz="1800" b="0">
                 <a:solidFill>
                   <a:srgbClr val="9AA6B8"/>
                 </a:solidFill>
               </a:rPr>
-              <a:t>Writes, packages, and distributes skills.</a:t>
-            </a:r>
-          </a:p>
-        </p:txBody>
-      </p:sp>
-      <p:sp>
-        <p:nvSpPr>
-          <p:cNvPr id="5" name="Rounded Rectangle 4"/>
+              <a:t>Reach the agent through a code/editor channel.</a:t>
+            </a:r>
+          </a:p>
+        </p:txBody>
+      </p:sp>
+      <p:sp>
+        <p:nvSpPr>
+          <p:cNvPr id="6" name="TextBox 5"/>
+          <p:cNvSpPr txBox="1"/>
+          <p:nvPr/>
+        </p:nvSpPr>
+        <p:spPr>
+          <a:xfrm>
+            <a:off x="841248" y="2377440"/>
+            <a:ext cx="10789920" cy="365760"/>
+          </a:xfrm>
+          <a:prstGeom prst="rect">
+            <a:avLst/>
+          </a:prstGeom>
+          <a:noFill/>
+        </p:spPr>
+        <p:txBody>
+          <a:bodyPr wrap="square">
+            <a:spAutoFit/>
+          </a:bodyPr>
+          <a:lstStyle/>
+          <a:p>
+            <a:r>
+              <a:rPr sz="1500" b="0">
+                <a:solidFill>
+                  <a:srgbClr val="FFB74D"/>
+                </a:solidFill>
+              </a:rPr>
+              <a:t>Built on: a Consumer -&gt; Channel User</a:t>
+            </a:r>
+          </a:p>
+        </p:txBody>
+      </p:sp>
+      <p:sp>
+        <p:nvSpPr>
+          <p:cNvPr id="7" name="Rounded Rectangle 6"/>
           <p:cNvSpPr/>
           <p:nvPr/>
         </p:nvSpPr>
         <p:spPr>
           <a:xfrm>
-            <a:off x="822960" y="2286000"/>
-            <a:ext cx="3322320" cy="3657600"/>
+            <a:off x="822960" y="2880360"/>
+            <a:ext cx="3322320" cy="3474720"/>
           </a:xfrm>
           <a:prstGeom prst="roundRect">
             <a:avLst/>
@@ -4738,36 +4971,36 @@
           <a:p>
             <a:pPr algn="ctr"/>
             <a:r>
-              <a:rPr sz="1800" b="1">
-                <a:solidFill>
-                  <a:srgbClr val="4E9EFF"/>
-                </a:solidFill>
-              </a:rPr>
-              <a:t>Authoring &amp; Testing</a:t>
-            </a:r>
-          </a:p>
-          <a:p>
-            <a:r>
-              <a:rPr sz="1400">
+              <a:rPr sz="1700" b="1">
+                <a:solidFill>
+                  <a:srgbClr val="E07B7B"/>
+                </a:solidFill>
+              </a:rPr>
+              <a:t>IDE  (TBD)</a:t>
+            </a:r>
+          </a:p>
+          <a:p>
+            <a:r>
+              <a:rPr sz="1350">
                 <a:solidFill>
                   <a:srgbClr val="9AA6B8"/>
                 </a:solidFill>
               </a:rPr>
-              <a:t>no clear entry point; only live-chat testing</a:t>
-            </a:r>
-          </a:p>
-        </p:txBody>
-      </p:sp>
-      <p:sp>
-        <p:nvSpPr>
-          <p:cNvPr id="6" name="Rounded Rectangle 5"/>
+              <a:t>TBD - not built yet</a:t>
+            </a:r>
+          </a:p>
+        </p:txBody>
+      </p:sp>
+      <p:sp>
+        <p:nvSpPr>
+          <p:cNvPr id="8" name="Rounded Rectangle 7"/>
           <p:cNvSpPr/>
           <p:nvPr/>
         </p:nvSpPr>
         <p:spPr>
           <a:xfrm>
-            <a:off x="4419600" y="2286000"/>
-            <a:ext cx="3322320" cy="3657600"/>
+            <a:off x="4419600" y="2880360"/>
+            <a:ext cx="3322320" cy="3474720"/>
           </a:xfrm>
           <a:prstGeom prst="roundRect">
             <a:avLst/>
@@ -4799,36 +5032,222 @@
           <a:p>
             <a:pPr algn="ctr"/>
             <a:r>
-              <a:rPr sz="1800" b="1">
-                <a:solidFill>
-                  <a:srgbClr val="4E9EFF"/>
-                </a:solidFill>
-              </a:rPr>
-              <a:t>Marketplace</a:t>
-            </a:r>
-          </a:p>
-          <a:p>
-            <a:r>
-              <a:rPr sz="1400">
+              <a:rPr sz="1700" b="1">
+                <a:solidFill>
+                  <a:srgbClr val="E07B7B"/>
+                </a:solidFill>
+              </a:rPr>
+              <a:t>Browser  (TBD)</a:t>
+            </a:r>
+          </a:p>
+          <a:p>
+            <a:r>
+              <a:rPr sz="1350">
                 <a:solidFill>
                   <a:srgbClr val="9AA6B8"/>
                 </a:solidFill>
               </a:rPr>
-              <a:t>no ratings, usage or freshness</a:t>
-            </a:r>
-          </a:p>
-        </p:txBody>
-      </p:sp>
-      <p:sp>
-        <p:nvSpPr>
-          <p:cNvPr id="7" name="Rounded Rectangle 6"/>
+              <a:t>TBD - not built yet</a:t>
+            </a:r>
+          </a:p>
+        </p:txBody>
+      </p:sp>
+    </p:spTree>
+  </p:cSld>
+  <p:clrMapOvr>
+    <a:masterClrMapping/>
+  </p:clrMapOvr>
+</p:sld>
+</file>
+
+<file path=ppt/slides/slide11.xml><?xml version="1.0" encoding="utf-8"?>
+<p:sld xmlns:a="http://schemas.openxmlformats.org/drawingml/2006/main" xmlns:p="http://schemas.openxmlformats.org/presentationml/2006/main" xmlns:r="http://schemas.openxmlformats.org/officeDocument/2006/relationships">
+  <p:cSld>
+    <p:bg>
+      <p:bgPr>
+        <a:solidFill>
+          <a:srgbClr val="0F1420"/>
+        </a:solidFill>
+        <a:effectLst/>
+      </p:bgPr>
+    </p:bg>
+    <p:spTree>
+      <p:nvGrpSpPr>
+        <p:cNvPr id="1" name=""/>
+        <p:cNvGrpSpPr/>
+        <p:nvPr/>
+      </p:nvGrpSpPr>
+      <p:grpSpPr/>
+      <p:sp>
+        <p:nvSpPr>
+          <p:cNvPr id="2" name="Rounded Rectangle 1"/>
           <p:cNvSpPr/>
           <p:nvPr/>
         </p:nvSpPr>
         <p:spPr>
           <a:xfrm>
-            <a:off x="8016239" y="2286000"/>
-            <a:ext cx="3322320" cy="3657600"/>
+            <a:off x="0" y="0"/>
+            <a:ext cx="12191695" cy="6858000"/>
+          </a:xfrm>
+          <a:prstGeom prst="roundRect">
+            <a:avLst/>
+          </a:prstGeom>
+          <a:solidFill>
+            <a:srgbClr val="0F1420"/>
+          </a:solidFill>
+          <a:ln>
+            <a:noFill/>
+          </a:ln>
+        </p:spPr>
+        <p:style>
+          <a:lnRef idx="1">
+            <a:schemeClr val="accent1"/>
+          </a:lnRef>
+          <a:fillRef idx="3">
+            <a:schemeClr val="accent1"/>
+          </a:fillRef>
+          <a:effectRef idx="2">
+            <a:schemeClr val="accent1"/>
+          </a:effectRef>
+          <a:fontRef idx="minor">
+            <a:schemeClr val="lt1"/>
+          </a:fontRef>
+        </p:style>
+        <p:txBody>
+          <a:bodyPr rtlCol="0" anchor="ctr"/>
+          <a:lstStyle/>
+          <a:p>
+            <a:pPr algn="ctr"/>
+          </a:p>
+        </p:txBody>
+      </p:sp>
+      <p:sp>
+        <p:nvSpPr>
+          <p:cNvPr id="3" name="Rounded Rectangle 2"/>
+          <p:cNvSpPr/>
+          <p:nvPr/>
+        </p:nvSpPr>
+        <p:spPr>
+          <a:xfrm>
+            <a:off x="822960" y="457200"/>
+            <a:ext cx="3291840" cy="384048"/>
+          </a:xfrm>
+          <a:prstGeom prst="roundRect">
+            <a:avLst/>
+          </a:prstGeom>
+          <a:solidFill>
+            <a:srgbClr val="F46D9B"/>
+          </a:solidFill>
+          <a:ln>
+            <a:noFill/>
+          </a:ln>
+        </p:spPr>
+        <p:style>
+          <a:lnRef idx="1">
+            <a:schemeClr val="accent1"/>
+          </a:lnRef>
+          <a:fillRef idx="3">
+            <a:schemeClr val="accent1"/>
+          </a:fillRef>
+          <a:effectRef idx="2">
+            <a:schemeClr val="accent1"/>
+          </a:effectRef>
+          <a:fontRef idx="minor">
+            <a:schemeClr val="lt1"/>
+          </a:fontRef>
+        </p:style>
+        <p:txBody>
+          <a:bodyPr rtlCol="0" anchor="ctr" tIns="27432" lIns="109728"/>
+          <a:lstStyle/>
+          <a:p>
+            <a:pPr algn="ctr"/>
+            <a:r>
+              <a:rPr sz="1300" b="1">
+                <a:solidFill>
+                  <a:srgbClr val="0F1420"/>
+                </a:solidFill>
+              </a:rPr>
+              <a:t>BUILDERS</a:t>
+            </a:r>
+          </a:p>
+        </p:txBody>
+      </p:sp>
+      <p:sp>
+        <p:nvSpPr>
+          <p:cNvPr id="4" name="TextBox 3"/>
+          <p:cNvSpPr txBox="1"/>
+          <p:nvPr/>
+        </p:nvSpPr>
+        <p:spPr>
+          <a:xfrm>
+            <a:off x="822960" y="1051560"/>
+            <a:ext cx="10789920" cy="914400"/>
+          </a:xfrm>
+          <a:prstGeom prst="rect">
+            <a:avLst/>
+          </a:prstGeom>
+          <a:noFill/>
+        </p:spPr>
+        <p:txBody>
+          <a:bodyPr wrap="square">
+            <a:spAutoFit/>
+          </a:bodyPr>
+          <a:lstStyle/>
+          <a:p>
+            <a:r>
+              <a:rPr sz="4600" b="1">
+                <a:solidFill>
+                  <a:srgbClr val="E8EDF4"/>
+                </a:solidFill>
+              </a:rPr>
+              <a:t>Product Builder</a:t>
+            </a:r>
+          </a:p>
+        </p:txBody>
+      </p:sp>
+      <p:sp>
+        <p:nvSpPr>
+          <p:cNvPr id="5" name="TextBox 4"/>
+          <p:cNvSpPr txBox="1"/>
+          <p:nvPr/>
+        </p:nvSpPr>
+        <p:spPr>
+          <a:xfrm>
+            <a:off x="841248" y="1965960"/>
+            <a:ext cx="10789920" cy="411480"/>
+          </a:xfrm>
+          <a:prstGeom prst="rect">
+            <a:avLst/>
+          </a:prstGeom>
+          <a:noFill/>
+        </p:spPr>
+        <p:txBody>
+          <a:bodyPr wrap="square">
+            <a:spAutoFit/>
+          </a:bodyPr>
+          <a:lstStyle/>
+          <a:p>
+            <a:r>
+              <a:rPr sz="1800" b="0">
+                <a:solidFill>
+                  <a:srgbClr val="9AA6B8"/>
+                </a:solidFill>
+              </a:rPr>
+              <a:t>Builds their own product using jiuwenswarm as its backend.</a:t>
+            </a:r>
+          </a:p>
+        </p:txBody>
+      </p:sp>
+      <p:sp>
+        <p:nvSpPr>
+          <p:cNvPr id="6" name="Rounded Rectangle 5"/>
+          <p:cNvSpPr/>
+          <p:nvPr/>
+        </p:nvSpPr>
+        <p:spPr>
+          <a:xfrm>
+            <a:off x="822960" y="2880360"/>
+            <a:ext cx="3322320" cy="3474720"/>
           </a:xfrm>
           <a:prstGeom prst="roundRect">
             <a:avLst/>
@@ -4860,17 +5279,508 @@
           <a:p>
             <a:pPr algn="ctr"/>
             <a:r>
-              <a:rPr sz="1800" b="1">
+              <a:rPr sz="1700" b="1">
                 <a:solidFill>
                   <a:srgbClr val="4E9EFF"/>
                 </a:solidFill>
               </a:rPr>
+              <a:t>Connection &amp; Security</a:t>
+            </a:r>
+          </a:p>
+          <a:p>
+            <a:r>
+              <a:rPr sz="1350">
+                <a:solidFill>
+                  <a:srgbClr val="9AA6B8"/>
+                </a:solidFill>
+              </a:rPr>
+              <a:t>no API auth; weak origin checks</a:t>
+            </a:r>
+          </a:p>
+        </p:txBody>
+      </p:sp>
+      <p:sp>
+        <p:nvSpPr>
+          <p:cNvPr id="7" name="Rounded Rectangle 6"/>
+          <p:cNvSpPr/>
+          <p:nvPr/>
+        </p:nvSpPr>
+        <p:spPr>
+          <a:xfrm>
+            <a:off x="4419600" y="2880360"/>
+            <a:ext cx="3322320" cy="3474720"/>
+          </a:xfrm>
+          <a:prstGeom prst="roundRect">
+            <a:avLst/>
+          </a:prstGeom>
+          <a:solidFill>
+            <a:srgbClr val="1E2A3A"/>
+          </a:solidFill>
+          <a:ln>
+            <a:noFill/>
+          </a:ln>
+        </p:spPr>
+        <p:style>
+          <a:lnRef idx="1">
+            <a:schemeClr val="accent1"/>
+          </a:lnRef>
+          <a:fillRef idx="3">
+            <a:schemeClr val="accent1"/>
+          </a:fillRef>
+          <a:effectRef idx="2">
+            <a:schemeClr val="accent1"/>
+          </a:effectRef>
+          <a:fontRef idx="minor">
+            <a:schemeClr val="lt1"/>
+          </a:fontRef>
+        </p:style>
+        <p:txBody>
+          <a:bodyPr rtlCol="0" anchor="ctr" lIns="137160" rIns="137160" tIns="109728" wrap="square"/>
+          <a:lstStyle/>
+          <a:p>
+            <a:pPr algn="ctr"/>
+            <a:r>
+              <a:rPr sz="1700" b="1">
+                <a:solidFill>
+                  <a:srgbClr val="4E9EFF"/>
+                </a:solidFill>
+              </a:rPr>
+              <a:t>Transport &amp; Protocol</a:t>
+            </a:r>
+          </a:p>
+          <a:p>
+            <a:r>
+              <a:rPr sz="1350">
+                <a:solidFill>
+                  <a:srgbClr val="9AA6B8"/>
+                </a:solidFill>
+              </a:rPr>
+              <a:t>WebSocket-only; prose spec, no SDK</a:t>
+            </a:r>
+          </a:p>
+        </p:txBody>
+      </p:sp>
+      <p:sp>
+        <p:nvSpPr>
+          <p:cNvPr id="8" name="Rounded Rectangle 7"/>
+          <p:cNvSpPr/>
+          <p:nvPr/>
+        </p:nvSpPr>
+        <p:spPr>
+          <a:xfrm>
+            <a:off x="8016239" y="2880360"/>
+            <a:ext cx="3322320" cy="3474720"/>
+          </a:xfrm>
+          <a:prstGeom prst="roundRect">
+            <a:avLst/>
+          </a:prstGeom>
+          <a:solidFill>
+            <a:srgbClr val="1E2A3A"/>
+          </a:solidFill>
+          <a:ln>
+            <a:noFill/>
+          </a:ln>
+        </p:spPr>
+        <p:style>
+          <a:lnRef idx="1">
+            <a:schemeClr val="accent1"/>
+          </a:lnRef>
+          <a:fillRef idx="3">
+            <a:schemeClr val="accent1"/>
+          </a:fillRef>
+          <a:effectRef idx="2">
+            <a:schemeClr val="accent1"/>
+          </a:effectRef>
+          <a:fontRef idx="minor">
+            <a:schemeClr val="lt1"/>
+          </a:fontRef>
+        </p:style>
+        <p:txBody>
+          <a:bodyPr rtlCol="0" anchor="ctr" lIns="137160" rIns="137160" tIns="109728" wrap="square"/>
+          <a:lstStyle/>
+          <a:p>
+            <a:pPr algn="ctr"/>
+            <a:r>
+              <a:rPr sz="1700" b="1">
+                <a:solidFill>
+                  <a:srgbClr val="4E9EFF"/>
+                </a:solidFill>
+              </a:rPr>
+              <a:t>Integration &amp; Tooling</a:t>
+            </a:r>
+          </a:p>
+          <a:p>
+            <a:r>
+              <a:rPr sz="1350">
+                <a:solidFill>
+                  <a:srgbClr val="9AA6B8"/>
+                </a:solidFill>
+              </a:rPr>
+              <a:t>no dev stubs; only shell hooks</a:t>
+            </a:r>
+          </a:p>
+        </p:txBody>
+      </p:sp>
+    </p:spTree>
+  </p:cSld>
+  <p:clrMapOvr>
+    <a:masterClrMapping/>
+  </p:clrMapOvr>
+</p:sld>
+</file>
+
+<file path=ppt/slides/slide12.xml><?xml version="1.0" encoding="utf-8"?>
+<p:sld xmlns:a="http://schemas.openxmlformats.org/drawingml/2006/main" xmlns:p="http://schemas.openxmlformats.org/presentationml/2006/main" xmlns:r="http://schemas.openxmlformats.org/officeDocument/2006/relationships">
+  <p:cSld>
+    <p:bg>
+      <p:bgPr>
+        <a:solidFill>
+          <a:srgbClr val="0F1420"/>
+        </a:solidFill>
+        <a:effectLst/>
+      </p:bgPr>
+    </p:bg>
+    <p:spTree>
+      <p:nvGrpSpPr>
+        <p:cNvPr id="1" name=""/>
+        <p:cNvGrpSpPr/>
+        <p:nvPr/>
+      </p:nvGrpSpPr>
+      <p:grpSpPr/>
+      <p:sp>
+        <p:nvSpPr>
+          <p:cNvPr id="2" name="Rounded Rectangle 1"/>
+          <p:cNvSpPr/>
+          <p:nvPr/>
+        </p:nvSpPr>
+        <p:spPr>
+          <a:xfrm>
+            <a:off x="0" y="0"/>
+            <a:ext cx="12191695" cy="6858000"/>
+          </a:xfrm>
+          <a:prstGeom prst="roundRect">
+            <a:avLst/>
+          </a:prstGeom>
+          <a:solidFill>
+            <a:srgbClr val="0F1420"/>
+          </a:solidFill>
+          <a:ln>
+            <a:noFill/>
+          </a:ln>
+        </p:spPr>
+        <p:style>
+          <a:lnRef idx="1">
+            <a:schemeClr val="accent1"/>
+          </a:lnRef>
+          <a:fillRef idx="3">
+            <a:schemeClr val="accent1"/>
+          </a:fillRef>
+          <a:effectRef idx="2">
+            <a:schemeClr val="accent1"/>
+          </a:effectRef>
+          <a:fontRef idx="minor">
+            <a:schemeClr val="lt1"/>
+          </a:fontRef>
+        </p:style>
+        <p:txBody>
+          <a:bodyPr rtlCol="0" anchor="ctr"/>
+          <a:lstStyle/>
+          <a:p>
+            <a:pPr algn="ctr"/>
+          </a:p>
+        </p:txBody>
+      </p:sp>
+      <p:sp>
+        <p:nvSpPr>
+          <p:cNvPr id="3" name="Rounded Rectangle 2"/>
+          <p:cNvSpPr/>
+          <p:nvPr/>
+        </p:nvSpPr>
+        <p:spPr>
+          <a:xfrm>
+            <a:off x="822960" y="457200"/>
+            <a:ext cx="3291840" cy="384048"/>
+          </a:xfrm>
+          <a:prstGeom prst="roundRect">
+            <a:avLst/>
+          </a:prstGeom>
+          <a:solidFill>
+            <a:srgbClr val="F46D9B"/>
+          </a:solidFill>
+          <a:ln>
+            <a:noFill/>
+          </a:ln>
+        </p:spPr>
+        <p:style>
+          <a:lnRef idx="1">
+            <a:schemeClr val="accent1"/>
+          </a:lnRef>
+          <a:fillRef idx="3">
+            <a:schemeClr val="accent1"/>
+          </a:fillRef>
+          <a:effectRef idx="2">
+            <a:schemeClr val="accent1"/>
+          </a:effectRef>
+          <a:fontRef idx="minor">
+            <a:schemeClr val="lt1"/>
+          </a:fontRef>
+        </p:style>
+        <p:txBody>
+          <a:bodyPr rtlCol="0" anchor="ctr" tIns="27432" lIns="109728"/>
+          <a:lstStyle/>
+          <a:p>
+            <a:pPr algn="ctr"/>
+            <a:r>
+              <a:rPr sz="1300" b="1">
+                <a:solidFill>
+                  <a:srgbClr val="0F1420"/>
+                </a:solidFill>
+              </a:rPr>
+              <a:t>BUILDERS</a:t>
+            </a:r>
+          </a:p>
+        </p:txBody>
+      </p:sp>
+      <p:sp>
+        <p:nvSpPr>
+          <p:cNvPr id="4" name="TextBox 3"/>
+          <p:cNvSpPr txBox="1"/>
+          <p:nvPr/>
+        </p:nvSpPr>
+        <p:spPr>
+          <a:xfrm>
+            <a:off x="822960" y="1051560"/>
+            <a:ext cx="10789920" cy="914400"/>
+          </a:xfrm>
+          <a:prstGeom prst="rect">
+            <a:avLst/>
+          </a:prstGeom>
+          <a:noFill/>
+        </p:spPr>
+        <p:txBody>
+          <a:bodyPr wrap="square">
+            <a:spAutoFit/>
+          </a:bodyPr>
+          <a:lstStyle/>
+          <a:p>
+            <a:r>
+              <a:rPr sz="4600" b="1">
+                <a:solidFill>
+                  <a:srgbClr val="E8EDF4"/>
+                </a:solidFill>
+              </a:rPr>
+              <a:t>Skill Author</a:t>
+            </a:r>
+          </a:p>
+        </p:txBody>
+      </p:sp>
+      <p:sp>
+        <p:nvSpPr>
+          <p:cNvPr id="5" name="TextBox 4"/>
+          <p:cNvSpPr txBox="1"/>
+          <p:nvPr/>
+        </p:nvSpPr>
+        <p:spPr>
+          <a:xfrm>
+            <a:off x="841248" y="1965960"/>
+            <a:ext cx="10789920" cy="411480"/>
+          </a:xfrm>
+          <a:prstGeom prst="rect">
+            <a:avLst/>
+          </a:prstGeom>
+          <a:noFill/>
+        </p:spPr>
+        <p:txBody>
+          <a:bodyPr wrap="square">
+            <a:spAutoFit/>
+          </a:bodyPr>
+          <a:lstStyle/>
+          <a:p>
+            <a:r>
+              <a:rPr sz="1800" b="0">
+                <a:solidFill>
+                  <a:srgbClr val="9AA6B8"/>
+                </a:solidFill>
+              </a:rPr>
+              <a:t>Writes, packages, and distributes skills.</a:t>
+            </a:r>
+          </a:p>
+        </p:txBody>
+      </p:sp>
+      <p:sp>
+        <p:nvSpPr>
+          <p:cNvPr id="6" name="Rounded Rectangle 5"/>
+          <p:cNvSpPr/>
+          <p:nvPr/>
+        </p:nvSpPr>
+        <p:spPr>
+          <a:xfrm>
+            <a:off x="822960" y="2880360"/>
+            <a:ext cx="3322320" cy="3474720"/>
+          </a:xfrm>
+          <a:prstGeom prst="roundRect">
+            <a:avLst/>
+          </a:prstGeom>
+          <a:solidFill>
+            <a:srgbClr val="1E2A3A"/>
+          </a:solidFill>
+          <a:ln>
+            <a:noFill/>
+          </a:ln>
+        </p:spPr>
+        <p:style>
+          <a:lnRef idx="1">
+            <a:schemeClr val="accent1"/>
+          </a:lnRef>
+          <a:fillRef idx="3">
+            <a:schemeClr val="accent1"/>
+          </a:fillRef>
+          <a:effectRef idx="2">
+            <a:schemeClr val="accent1"/>
+          </a:effectRef>
+          <a:fontRef idx="minor">
+            <a:schemeClr val="lt1"/>
+          </a:fontRef>
+        </p:style>
+        <p:txBody>
+          <a:bodyPr rtlCol="0" anchor="ctr" lIns="137160" rIns="137160" tIns="109728" wrap="square"/>
+          <a:lstStyle/>
+          <a:p>
+            <a:pPr algn="ctr"/>
+            <a:r>
+              <a:rPr sz="1700" b="1">
+                <a:solidFill>
+                  <a:srgbClr val="4E9EFF"/>
+                </a:solidFill>
+              </a:rPr>
+              <a:t>Authoring &amp; Testing</a:t>
+            </a:r>
+          </a:p>
+          <a:p>
+            <a:r>
+              <a:rPr sz="1350">
+                <a:solidFill>
+                  <a:srgbClr val="9AA6B8"/>
+                </a:solidFill>
+              </a:rPr>
+              <a:t>no clear entry point; only live-chat testing</a:t>
+            </a:r>
+          </a:p>
+        </p:txBody>
+      </p:sp>
+      <p:sp>
+        <p:nvSpPr>
+          <p:cNvPr id="7" name="Rounded Rectangle 6"/>
+          <p:cNvSpPr/>
+          <p:nvPr/>
+        </p:nvSpPr>
+        <p:spPr>
+          <a:xfrm>
+            <a:off x="4419600" y="2880360"/>
+            <a:ext cx="3322320" cy="3474720"/>
+          </a:xfrm>
+          <a:prstGeom prst="roundRect">
+            <a:avLst/>
+          </a:prstGeom>
+          <a:solidFill>
+            <a:srgbClr val="1E2A3A"/>
+          </a:solidFill>
+          <a:ln>
+            <a:noFill/>
+          </a:ln>
+        </p:spPr>
+        <p:style>
+          <a:lnRef idx="1">
+            <a:schemeClr val="accent1"/>
+          </a:lnRef>
+          <a:fillRef idx="3">
+            <a:schemeClr val="accent1"/>
+          </a:fillRef>
+          <a:effectRef idx="2">
+            <a:schemeClr val="accent1"/>
+          </a:effectRef>
+          <a:fontRef idx="minor">
+            <a:schemeClr val="lt1"/>
+          </a:fontRef>
+        </p:style>
+        <p:txBody>
+          <a:bodyPr rtlCol="0" anchor="ctr" lIns="137160" rIns="137160" tIns="109728" wrap="square"/>
+          <a:lstStyle/>
+          <a:p>
+            <a:pPr algn="ctr"/>
+            <a:r>
+              <a:rPr sz="1700" b="1">
+                <a:solidFill>
+                  <a:srgbClr val="4E9EFF"/>
+                </a:solidFill>
+              </a:rPr>
+              <a:t>Marketplace</a:t>
+            </a:r>
+          </a:p>
+          <a:p>
+            <a:r>
+              <a:rPr sz="1350">
+                <a:solidFill>
+                  <a:srgbClr val="9AA6B8"/>
+                </a:solidFill>
+              </a:rPr>
+              <a:t>no ratings, usage or freshness</a:t>
+            </a:r>
+          </a:p>
+        </p:txBody>
+      </p:sp>
+      <p:sp>
+        <p:nvSpPr>
+          <p:cNvPr id="8" name="Rounded Rectangle 7"/>
+          <p:cNvSpPr/>
+          <p:nvPr/>
+        </p:nvSpPr>
+        <p:spPr>
+          <a:xfrm>
+            <a:off x="8016239" y="2880360"/>
+            <a:ext cx="3322320" cy="3474720"/>
+          </a:xfrm>
+          <a:prstGeom prst="roundRect">
+            <a:avLst/>
+          </a:prstGeom>
+          <a:solidFill>
+            <a:srgbClr val="1E2A3A"/>
+          </a:solidFill>
+          <a:ln>
+            <a:noFill/>
+          </a:ln>
+        </p:spPr>
+        <p:style>
+          <a:lnRef idx="1">
+            <a:schemeClr val="accent1"/>
+          </a:lnRef>
+          <a:fillRef idx="3">
+            <a:schemeClr val="accent1"/>
+          </a:fillRef>
+          <a:effectRef idx="2">
+            <a:schemeClr val="accent1"/>
+          </a:effectRef>
+          <a:fontRef idx="minor">
+            <a:schemeClr val="lt1"/>
+          </a:fontRef>
+        </p:style>
+        <p:txBody>
+          <a:bodyPr rtlCol="0" anchor="ctr" lIns="137160" rIns="137160" tIns="109728" wrap="square"/>
+          <a:lstStyle/>
+          <a:p>
+            <a:pPr algn="ctr"/>
+            <a:r>
+              <a:rPr sz="1700" b="1">
+                <a:solidFill>
+                  <a:srgbClr val="4E9EFF"/>
+                </a:solidFill>
+              </a:rPr>
               <a:t>Versioning</a:t>
             </a:r>
           </a:p>
           <a:p>
             <a:r>
-              <a:rPr sz="1400">
+              <a:rPr sz="1350">
                 <a:solidFill>
                   <a:srgbClr val="9AA6B8"/>
                 </a:solidFill>
@@ -4908,7 +5818,7 @@
       <p:grpSpPr/>
       <p:sp>
         <p:nvSpPr>
-          <p:cNvPr id="2" name="Rectangle 1"/>
+          <p:cNvPr id="2" name="Rounded Rectangle 1"/>
           <p:cNvSpPr/>
           <p:nvPr/>
         </p:nvSpPr>
@@ -4917,7 +5827,7 @@
             <a:off x="0" y="0"/>
             <a:ext cx="12191695" cy="6858000"/>
           </a:xfrm>
-          <a:prstGeom prst="rect">
+          <a:prstGeom prst="roundRect">
             <a:avLst/>
           </a:prstGeom>
           <a:solidFill>
@@ -4951,16 +5861,16 @@
       </p:sp>
       <p:sp>
         <p:nvSpPr>
-          <p:cNvPr id="3" name="Rectangle 2"/>
+          <p:cNvPr id="3" name="Rounded Rectangle 2"/>
           <p:cNvSpPr/>
           <p:nvPr/>
         </p:nvSpPr>
         <p:spPr>
           <a:xfrm>
-            <a:off x="457200" y="658368"/>
-            <a:ext cx="146304" cy="914400"/>
-          </a:xfrm>
-          <a:prstGeom prst="rect">
+            <a:off x="822960" y="457200"/>
+            <a:ext cx="3291840" cy="384048"/>
+          </a:xfrm>
+          <a:prstGeom prst="roundRect">
             <a:avLst/>
           </a:prstGeom>
           <a:solidFill>
@@ -4985,10 +5895,18 @@
           </a:fontRef>
         </p:style>
         <p:txBody>
-          <a:bodyPr rtlCol="0" anchor="ctr"/>
+          <a:bodyPr rtlCol="0" anchor="ctr" tIns="27432" lIns="109728"/>
           <a:lstStyle/>
           <a:p>
             <a:pPr algn="ctr"/>
+            <a:r>
+              <a:rPr sz="1300" b="1">
+                <a:solidFill>
+                  <a:srgbClr val="0F1420"/>
+                </a:solidFill>
+              </a:rPr>
+              <a:t>MAKERS</a:t>
+            </a:r>
           </a:p>
         </p:txBody>
       </p:sp>
@@ -5000,8 +5918,8 @@
         </p:nvSpPr>
         <p:spPr>
           <a:xfrm>
-            <a:off x="822960" y="457200"/>
-            <a:ext cx="10515600" cy="1463040"/>
+            <a:off x="822960" y="1051560"/>
+            <a:ext cx="10789920" cy="914400"/>
           </a:xfrm>
           <a:prstGeom prst="rect">
             <a:avLst/>
@@ -5014,9 +5932,8 @@
           </a:bodyPr>
           <a:lstStyle/>
           <a:p>
-            <a:pPr algn="l"/>
-            <a:r>
-              <a:rPr sz="5400" b="1">
+            <a:r>
+              <a:rPr sz="4600" b="1">
                 <a:solidFill>
                   <a:srgbClr val="E8EDF4"/>
                 </a:solidFill>
@@ -5024,10 +5941,32 @@
               <a:t>Engine Contributor</a:t>
             </a:r>
           </a:p>
-          <a:p>
-            <a:pPr algn="l"/>
-            <a:r>
-              <a:rPr sz="2000">
+        </p:txBody>
+      </p:sp>
+      <p:sp>
+        <p:nvSpPr>
+          <p:cNvPr id="5" name="TextBox 4"/>
+          <p:cNvSpPr txBox="1"/>
+          <p:nvPr/>
+        </p:nvSpPr>
+        <p:spPr>
+          <a:xfrm>
+            <a:off x="841248" y="1965960"/>
+            <a:ext cx="10789920" cy="411480"/>
+          </a:xfrm>
+          <a:prstGeom prst="rect">
+            <a:avLst/>
+          </a:prstGeom>
+          <a:noFill/>
+        </p:spPr>
+        <p:txBody>
+          <a:bodyPr wrap="square">
+            <a:spAutoFit/>
+          </a:bodyPr>
+          <a:lstStyle/>
+          <a:p>
+            <a:r>
+              <a:rPr sz="1800" b="0">
                 <a:solidFill>
                   <a:srgbClr val="9AA6B8"/>
                 </a:solidFill>
@@ -5039,14 +5978,14 @@
       </p:sp>
       <p:sp>
         <p:nvSpPr>
-          <p:cNvPr id="5" name="Rounded Rectangle 4"/>
+          <p:cNvPr id="6" name="Rounded Rectangle 5"/>
           <p:cNvSpPr/>
           <p:nvPr/>
         </p:nvSpPr>
         <p:spPr>
           <a:xfrm>
-            <a:off x="822960" y="2286000"/>
-            <a:ext cx="3322320" cy="1828800"/>
+            <a:off x="822960" y="2880360"/>
+            <a:ext cx="3322320" cy="1737360"/>
           </a:xfrm>
           <a:prstGeom prst="roundRect">
             <a:avLst/>
@@ -5078,7 +6017,7 @@
           <a:p>
             <a:pPr algn="ctr"/>
             <a:r>
-              <a:rPr sz="1800" b="1">
+              <a:rPr sz="1700" b="1">
                 <a:solidFill>
                   <a:srgbClr val="4E9EFF"/>
                 </a:solidFill>
@@ -5088,7 +6027,7 @@
           </a:p>
           <a:p>
             <a:r>
-              <a:rPr sz="1400">
+              <a:rPr sz="1350">
                 <a:solidFill>
                   <a:srgbClr val="9AA6B8"/>
                 </a:solidFill>
@@ -5100,14 +6039,14 @@
       </p:sp>
       <p:sp>
         <p:nvSpPr>
-          <p:cNvPr id="6" name="Rounded Rectangle 5"/>
+          <p:cNvPr id="7" name="Rounded Rectangle 6"/>
           <p:cNvSpPr/>
           <p:nvPr/>
         </p:nvSpPr>
         <p:spPr>
           <a:xfrm>
-            <a:off x="4419600" y="2286000"/>
-            <a:ext cx="3322320" cy="1828800"/>
+            <a:off x="4419600" y="2880360"/>
+            <a:ext cx="3322320" cy="1737360"/>
           </a:xfrm>
           <a:prstGeom prst="roundRect">
             <a:avLst/>
@@ -5139,7 +6078,7 @@
           <a:p>
             <a:pPr algn="ctr"/>
             <a:r>
-              <a:rPr sz="1800" b="1">
+              <a:rPr sz="1700" b="1">
                 <a:solidFill>
                   <a:srgbClr val="4E9EFF"/>
                 </a:solidFill>
@@ -5149,7 +6088,7 @@
           </a:p>
           <a:p>
             <a:r>
-              <a:rPr sz="1400">
+              <a:rPr sz="1350">
                 <a:solidFill>
                   <a:srgbClr val="9AA6B8"/>
                 </a:solidFill>
@@ -5161,14 +6100,14 @@
       </p:sp>
       <p:sp>
         <p:nvSpPr>
-          <p:cNvPr id="7" name="Rounded Rectangle 6"/>
+          <p:cNvPr id="8" name="Rounded Rectangle 7"/>
           <p:cNvSpPr/>
           <p:nvPr/>
         </p:nvSpPr>
         <p:spPr>
           <a:xfrm>
-            <a:off x="8016239" y="2286000"/>
-            <a:ext cx="3322320" cy="1828800"/>
+            <a:off x="8016239" y="2880360"/>
+            <a:ext cx="3322320" cy="1737360"/>
           </a:xfrm>
           <a:prstGeom prst="roundRect">
             <a:avLst/>
@@ -5200,7 +6139,7 @@
           <a:p>
             <a:pPr algn="ctr"/>
             <a:r>
-              <a:rPr sz="1800" b="1">
+              <a:rPr sz="1700" b="1">
                 <a:solidFill>
                   <a:srgbClr val="4E9EFF"/>
                 </a:solidFill>
@@ -5210,7 +6149,7 @@
           </a:p>
           <a:p>
             <a:r>
-              <a:rPr sz="1400">
+              <a:rPr sz="1350">
                 <a:solidFill>
                   <a:srgbClr val="9AA6B8"/>
                 </a:solidFill>
@@ -5222,14 +6161,14 @@
       </p:sp>
       <p:sp>
         <p:nvSpPr>
-          <p:cNvPr id="8" name="Rounded Rectangle 7"/>
+          <p:cNvPr id="9" name="Rounded Rectangle 8"/>
           <p:cNvSpPr/>
           <p:nvPr/>
         </p:nvSpPr>
         <p:spPr>
           <a:xfrm>
-            <a:off x="822960" y="4343400"/>
-            <a:ext cx="3322320" cy="1828800"/>
+            <a:off x="822960" y="4846320"/>
+            <a:ext cx="3322320" cy="1737360"/>
           </a:xfrm>
           <a:prstGeom prst="roundRect">
             <a:avLst/>
@@ -5261,7 +6200,7 @@
           <a:p>
             <a:pPr algn="ctr"/>
             <a:r>
-              <a:rPr sz="1800" b="1">
+              <a:rPr sz="1700" b="1">
                 <a:solidFill>
                   <a:srgbClr val="4E9EFF"/>
                 </a:solidFill>
@@ -5271,7 +6210,7 @@
           </a:p>
           <a:p>
             <a:r>
-              <a:rPr sz="1400">
+              <a:rPr sz="1350">
                 <a:solidFill>
                   <a:srgbClr val="9AA6B8"/>
                 </a:solidFill>
@@ -5283,14 +6222,14 @@
       </p:sp>
       <p:sp>
         <p:nvSpPr>
-          <p:cNvPr id="9" name="Rounded Rectangle 8"/>
+          <p:cNvPr id="10" name="Rounded Rectangle 9"/>
           <p:cNvSpPr/>
           <p:nvPr/>
         </p:nvSpPr>
         <p:spPr>
           <a:xfrm>
-            <a:off x="4419600" y="4343400"/>
-            <a:ext cx="3322320" cy="1828800"/>
+            <a:off x="4419600" y="4846320"/>
+            <a:ext cx="3322320" cy="1737360"/>
           </a:xfrm>
           <a:prstGeom prst="roundRect">
             <a:avLst/>
@@ -5322,7 +6261,7 @@
           <a:p>
             <a:pPr algn="ctr"/>
             <a:r>
-              <a:rPr sz="1800" b="1">
+              <a:rPr sz="1700" b="1">
                 <a:solidFill>
                   <a:srgbClr val="4E9EFF"/>
                 </a:solidFill>
@@ -5332,7 +6271,7 @@
           </a:p>
           <a:p>
             <a:r>
-              <a:rPr sz="1400">
+              <a:rPr sz="1350">
                 <a:solidFill>
                   <a:srgbClr val="9AA6B8"/>
                 </a:solidFill>
@@ -5370,7 +6309,7 @@
       <p:grpSpPr/>
       <p:sp>
         <p:nvSpPr>
-          <p:cNvPr id="2" name="Rectangle 1"/>
+          <p:cNvPr id="2" name="Rounded Rectangle 1"/>
           <p:cNvSpPr/>
           <p:nvPr/>
         </p:nvSpPr>
@@ -5379,7 +6318,7 @@
             <a:off x="0" y="0"/>
             <a:ext cx="12191695" cy="6858000"/>
           </a:xfrm>
-          <a:prstGeom prst="rect">
+          <a:prstGeom prst="roundRect">
             <a:avLst/>
           </a:prstGeom>
           <a:solidFill>
@@ -5413,20 +6352,20 @@
       </p:sp>
       <p:sp>
         <p:nvSpPr>
-          <p:cNvPr id="3" name="Rectangle 2"/>
+          <p:cNvPr id="3" name="Rounded Rectangle 2"/>
           <p:cNvSpPr/>
           <p:nvPr/>
         </p:nvSpPr>
         <p:spPr>
           <a:xfrm>
-            <a:off x="457200" y="658368"/>
-            <a:ext cx="146304" cy="914400"/>
-          </a:xfrm>
-          <a:prstGeom prst="rect">
+            <a:off x="822960" y="457200"/>
+            <a:ext cx="3291840" cy="384048"/>
+          </a:xfrm>
+          <a:prstGeom prst="roundRect">
             <a:avLst/>
           </a:prstGeom>
           <a:solidFill>
-            <a:srgbClr val="4E9EFF"/>
+            <a:srgbClr val="66BB6A"/>
           </a:solidFill>
           <a:ln>
             <a:noFill/>
@@ -5447,10 +6386,18 @@
           </a:fontRef>
         </p:style>
         <p:txBody>
-          <a:bodyPr rtlCol="0" anchor="ctr"/>
+          <a:bodyPr rtlCol="0" anchor="ctr" tIns="27432" lIns="109728"/>
           <a:lstStyle/>
           <a:p>
             <a:pPr algn="ctr"/>
+            <a:r>
+              <a:rPr sz="1300" b="1">
+                <a:solidFill>
+                  <a:srgbClr val="0F1420"/>
+                </a:solidFill>
+              </a:rPr>
+              <a:t>RUNNERS</a:t>
+            </a:r>
           </a:p>
         </p:txBody>
       </p:sp>
@@ -5462,8 +6409,8 @@
         </p:nvSpPr>
         <p:spPr>
           <a:xfrm>
-            <a:off x="822960" y="457200"/>
-            <a:ext cx="10515600" cy="1463040"/>
+            <a:off x="822960" y="1051560"/>
+            <a:ext cx="10789920" cy="914400"/>
           </a:xfrm>
           <a:prstGeom prst="rect">
             <a:avLst/>
@@ -5476,9 +6423,8 @@
           </a:bodyPr>
           <a:lstStyle/>
           <a:p>
-            <a:pPr algn="l"/>
-            <a:r>
-              <a:rPr sz="5400" b="1">
+            <a:r>
+              <a:rPr sz="4600" b="1">
                 <a:solidFill>
                   <a:srgbClr val="E8EDF4"/>
                 </a:solidFill>
@@ -5486,29 +6432,84 @@
               <a:t>Self-hoster</a:t>
             </a:r>
           </a:p>
-          <a:p>
-            <a:pPr algn="l"/>
-            <a:r>
-              <a:rPr sz="2000">
+        </p:txBody>
+      </p:sp>
+      <p:sp>
+        <p:nvSpPr>
+          <p:cNvPr id="5" name="TextBox 4"/>
+          <p:cNvSpPr txBox="1"/>
+          <p:nvPr/>
+        </p:nvSpPr>
+        <p:spPr>
+          <a:xfrm>
+            <a:off x="841248" y="1965960"/>
+            <a:ext cx="10789920" cy="411480"/>
+          </a:xfrm>
+          <a:prstGeom prst="rect">
+            <a:avLst/>
+          </a:prstGeom>
+          <a:noFill/>
+        </p:spPr>
+        <p:txBody>
+          <a:bodyPr wrap="square">
+            <a:spAutoFit/>
+          </a:bodyPr>
+          <a:lstStyle/>
+          <a:p>
+            <a:r>
+              <a:rPr sz="1800" b="0">
                 <a:solidFill>
                   <a:srgbClr val="9AA6B8"/>
                 </a:solidFill>
               </a:rPr>
-              <a:t>Runs their own instance, usually to use it themselves.</a:t>
-            </a:r>
-          </a:p>
-        </p:txBody>
-      </p:sp>
-      <p:sp>
-        <p:nvSpPr>
-          <p:cNvPr id="5" name="Rounded Rectangle 4"/>
+              <a:t>Runs their own instance - and is also a user of it.</a:t>
+            </a:r>
+          </a:p>
+        </p:txBody>
+      </p:sp>
+      <p:sp>
+        <p:nvSpPr>
+          <p:cNvPr id="6" name="TextBox 5"/>
+          <p:cNvSpPr txBox="1"/>
+          <p:nvPr/>
+        </p:nvSpPr>
+        <p:spPr>
+          <a:xfrm>
+            <a:off x="841248" y="2377440"/>
+            <a:ext cx="10789920" cy="365760"/>
+          </a:xfrm>
+          <a:prstGeom prst="rect">
+            <a:avLst/>
+          </a:prstGeom>
+          <a:noFill/>
+        </p:spPr>
+        <p:txBody>
+          <a:bodyPr wrap="square">
+            <a:spAutoFit/>
+          </a:bodyPr>
+          <a:lstStyle/>
+          <a:p>
+            <a:r>
+              <a:rPr sz="1500" b="0">
+                <a:solidFill>
+                  <a:srgbClr val="FFB74D"/>
+                </a:solidFill>
+              </a:rPr>
+              <a:t>Built on: also a Consumer (of their own instance)</a:t>
+            </a:r>
+          </a:p>
+        </p:txBody>
+      </p:sp>
+      <p:sp>
+        <p:nvSpPr>
+          <p:cNvPr id="7" name="Rounded Rectangle 6"/>
           <p:cNvSpPr/>
           <p:nvPr/>
         </p:nvSpPr>
         <p:spPr>
           <a:xfrm>
-            <a:off x="822960" y="2286000"/>
-            <a:ext cx="3322320" cy="1828800"/>
+            <a:off x="822960" y="2880360"/>
+            <a:ext cx="3322320" cy="1737360"/>
           </a:xfrm>
           <a:prstGeom prst="roundRect">
             <a:avLst/>
@@ -5540,7 +6541,7 @@
           <a:p>
             <a:pPr algn="ctr"/>
             <a:r>
-              <a:rPr sz="1800" b="1">
+              <a:rPr sz="1700" b="1">
                 <a:solidFill>
                   <a:srgbClr val="4E9EFF"/>
                 </a:solidFill>
@@ -5550,7 +6551,7 @@
           </a:p>
           <a:p>
             <a:r>
-              <a:rPr sz="1400">
+              <a:rPr sz="1350">
                 <a:solidFill>
                   <a:srgbClr val="9AA6B8"/>
                 </a:solidFill>
@@ -5562,14 +6563,14 @@
       </p:sp>
       <p:sp>
         <p:nvSpPr>
-          <p:cNvPr id="6" name="Rounded Rectangle 5"/>
+          <p:cNvPr id="8" name="Rounded Rectangle 7"/>
           <p:cNvSpPr/>
           <p:nvPr/>
         </p:nvSpPr>
         <p:spPr>
           <a:xfrm>
-            <a:off x="4419600" y="2286000"/>
-            <a:ext cx="3322320" cy="1828800"/>
+            <a:off x="4419600" y="2880360"/>
+            <a:ext cx="3322320" cy="1737360"/>
           </a:xfrm>
           <a:prstGeom prst="roundRect">
             <a:avLst/>
@@ -5601,7 +6602,7 @@
           <a:p>
             <a:pPr algn="ctr"/>
             <a:r>
-              <a:rPr sz="1800" b="1">
+              <a:rPr sz="1700" b="1">
                 <a:solidFill>
                   <a:srgbClr val="4E9EFF"/>
                 </a:solidFill>
@@ -5611,7 +6612,7 @@
           </a:p>
           <a:p>
             <a:r>
-              <a:rPr sz="1400">
+              <a:rPr sz="1350">
                 <a:solidFill>
                   <a:srgbClr val="9AA6B8"/>
                 </a:solidFill>
@@ -5623,14 +6624,14 @@
       </p:sp>
       <p:sp>
         <p:nvSpPr>
-          <p:cNvPr id="7" name="Rounded Rectangle 6"/>
+          <p:cNvPr id="9" name="Rounded Rectangle 8"/>
           <p:cNvSpPr/>
           <p:nvPr/>
         </p:nvSpPr>
         <p:spPr>
           <a:xfrm>
-            <a:off x="8016239" y="2286000"/>
-            <a:ext cx="3322320" cy="1828800"/>
+            <a:off x="8016239" y="2880360"/>
+            <a:ext cx="3322320" cy="1737360"/>
           </a:xfrm>
           <a:prstGeom prst="roundRect">
             <a:avLst/>
@@ -5662,7 +6663,7 @@
           <a:p>
             <a:pPr algn="ctr"/>
             <a:r>
-              <a:rPr sz="1800" b="1">
+              <a:rPr sz="1700" b="1">
                 <a:solidFill>
                   <a:srgbClr val="4E9EFF"/>
                 </a:solidFill>
@@ -5672,7 +6673,7 @@
           </a:p>
           <a:p>
             <a:r>
-              <a:rPr sz="1400">
+              <a:rPr sz="1350">
                 <a:solidFill>
                   <a:srgbClr val="9AA6B8"/>
                 </a:solidFill>
@@ -5684,14 +6685,14 @@
       </p:sp>
       <p:sp>
         <p:nvSpPr>
-          <p:cNvPr id="8" name="Rounded Rectangle 7"/>
+          <p:cNvPr id="10" name="Rounded Rectangle 9"/>
           <p:cNvSpPr/>
           <p:nvPr/>
         </p:nvSpPr>
         <p:spPr>
           <a:xfrm>
-            <a:off x="822960" y="4343400"/>
-            <a:ext cx="3322320" cy="1828800"/>
+            <a:off x="822960" y="4846320"/>
+            <a:ext cx="3322320" cy="1737360"/>
           </a:xfrm>
           <a:prstGeom prst="roundRect">
             <a:avLst/>
@@ -5723,7 +6724,7 @@
           <a:p>
             <a:pPr algn="ctr"/>
             <a:r>
-              <a:rPr sz="1800" b="1">
+              <a:rPr sz="1700" b="1">
                 <a:solidFill>
                   <a:srgbClr val="4E9EFF"/>
                 </a:solidFill>
@@ -5733,7 +6734,7 @@
           </a:p>
           <a:p>
             <a:r>
-              <a:rPr sz="1400">
+              <a:rPr sz="1350">
                 <a:solidFill>
                   <a:srgbClr val="9AA6B8"/>
                 </a:solidFill>
@@ -5745,14 +6746,14 @@
       </p:sp>
       <p:sp>
         <p:nvSpPr>
-          <p:cNvPr id="9" name="Rounded Rectangle 8"/>
+          <p:cNvPr id="11" name="Rounded Rectangle 10"/>
           <p:cNvSpPr/>
           <p:nvPr/>
         </p:nvSpPr>
         <p:spPr>
           <a:xfrm>
-            <a:off x="4419600" y="4343400"/>
-            <a:ext cx="3322320" cy="1828800"/>
+            <a:off x="4419600" y="4846320"/>
+            <a:ext cx="3322320" cy="1737360"/>
           </a:xfrm>
           <a:prstGeom prst="roundRect">
             <a:avLst/>
@@ -5784,7 +6785,7 @@
           <a:p>
             <a:pPr algn="ctr"/>
             <a:r>
-              <a:rPr sz="1800" b="1">
+              <a:rPr sz="1700" b="1">
                 <a:solidFill>
                   <a:srgbClr val="4E9EFF"/>
                 </a:solidFill>
@@ -5794,7 +6795,7 @@
           </a:p>
           <a:p>
             <a:r>
-              <a:rPr sz="1400">
+              <a:rPr sz="1350">
                 <a:solidFill>
                   <a:srgbClr val="9AA6B8"/>
                 </a:solidFill>
@@ -5832,7 +6833,7 @@
       <p:grpSpPr/>
       <p:sp>
         <p:nvSpPr>
-          <p:cNvPr id="2" name="Rectangle 1"/>
+          <p:cNvPr id="2" name="Rounded Rectangle 1"/>
           <p:cNvSpPr/>
           <p:nvPr/>
         </p:nvSpPr>
@@ -5841,7 +6842,7 @@
             <a:off x="0" y="0"/>
             <a:ext cx="12191695" cy="6858000"/>
           </a:xfrm>
-          <a:prstGeom prst="rect">
+          <a:prstGeom prst="roundRect">
             <a:avLst/>
           </a:prstGeom>
           <a:solidFill>
@@ -5875,20 +6876,20 @@
       </p:sp>
       <p:sp>
         <p:nvSpPr>
-          <p:cNvPr id="3" name="Rectangle 2"/>
+          <p:cNvPr id="3" name="Rounded Rectangle 2"/>
           <p:cNvSpPr/>
           <p:nvPr/>
         </p:nvSpPr>
         <p:spPr>
           <a:xfrm>
-            <a:off x="457200" y="658368"/>
-            <a:ext cx="146304" cy="914400"/>
-          </a:xfrm>
-          <a:prstGeom prst="rect">
+            <a:off x="822960" y="457200"/>
+            <a:ext cx="3291840" cy="384048"/>
+          </a:xfrm>
+          <a:prstGeom prst="roundRect">
             <a:avLst/>
           </a:prstGeom>
           <a:solidFill>
-            <a:srgbClr val="4E9EFF"/>
+            <a:srgbClr val="66BB6A"/>
           </a:solidFill>
           <a:ln>
             <a:noFill/>
@@ -5909,10 +6910,18 @@
           </a:fontRef>
         </p:style>
         <p:txBody>
-          <a:bodyPr rtlCol="0" anchor="ctr"/>
+          <a:bodyPr rtlCol="0" anchor="ctr" tIns="27432" lIns="109728"/>
           <a:lstStyle/>
           <a:p>
             <a:pPr algn="ctr"/>
+            <a:r>
+              <a:rPr sz="1300" b="1">
+                <a:solidFill>
+                  <a:srgbClr val="0F1420"/>
+                </a:solidFill>
+              </a:rPr>
+              <a:t>RUNNERS</a:t>
+            </a:r>
           </a:p>
         </p:txBody>
       </p:sp>
@@ -5924,8 +6933,8 @@
         </p:nvSpPr>
         <p:spPr>
           <a:xfrm>
-            <a:off x="822960" y="457200"/>
-            <a:ext cx="10515600" cy="1463040"/>
+            <a:off x="822960" y="1051560"/>
+            <a:ext cx="10789920" cy="914400"/>
           </a:xfrm>
           <a:prstGeom prst="rect">
             <a:avLst/>
@@ -5938,9 +6947,8 @@
           </a:bodyPr>
           <a:lstStyle/>
           <a:p>
-            <a:pPr algn="l"/>
-            <a:r>
-              <a:rPr sz="5400" b="1">
+            <a:r>
+              <a:rPr sz="4600" b="1">
                 <a:solidFill>
                   <a:srgbClr val="E8EDF4"/>
                 </a:solidFill>
@@ -5948,10 +6956,32 @@
               <a:t>Bot-hoster</a:t>
             </a:r>
           </a:p>
-          <a:p>
-            <a:pPr algn="l"/>
-            <a:r>
-              <a:rPr sz="2000">
+        </p:txBody>
+      </p:sp>
+      <p:sp>
+        <p:nvSpPr>
+          <p:cNvPr id="5" name="TextBox 4"/>
+          <p:cNvSpPr txBox="1"/>
+          <p:nvPr/>
+        </p:nvSpPr>
+        <p:spPr>
+          <a:xfrm>
+            <a:off x="841248" y="1965960"/>
+            <a:ext cx="10789920" cy="411480"/>
+          </a:xfrm>
+          <a:prstGeom prst="rect">
+            <a:avLst/>
+          </a:prstGeom>
+          <a:noFill/>
+        </p:spPr>
+        <p:txBody>
+          <a:bodyPr wrap="square">
+            <a:spAutoFit/>
+          </a:bodyPr>
+          <a:lstStyle/>
+          <a:p>
+            <a:r>
+              <a:rPr sz="1800" b="0">
                 <a:solidFill>
                   <a:srgbClr val="9AA6B8"/>
                 </a:solidFill>
@@ -5963,14 +6993,14 @@
       </p:sp>
       <p:sp>
         <p:nvSpPr>
-          <p:cNvPr id="5" name="Rounded Rectangle 4"/>
+          <p:cNvPr id="6" name="Rounded Rectangle 5"/>
           <p:cNvSpPr/>
           <p:nvPr/>
         </p:nvSpPr>
         <p:spPr>
           <a:xfrm>
-            <a:off x="822960" y="2286000"/>
-            <a:ext cx="3322320" cy="3657600"/>
+            <a:off x="822960" y="2880360"/>
+            <a:ext cx="3322320" cy="3474720"/>
           </a:xfrm>
           <a:prstGeom prst="roundRect">
             <a:avLst/>
@@ -6002,7 +7032,7 @@
           <a:p>
             <a:pPr algn="ctr"/>
             <a:r>
-              <a:rPr sz="1800" b="1">
+              <a:rPr sz="1700" b="1">
                 <a:solidFill>
                   <a:srgbClr val="4E9EFF"/>
                 </a:solidFill>
@@ -6012,7 +7042,7 @@
           </a:p>
           <a:p>
             <a:r>
-              <a:rPr sz="1400">
+              <a:rPr sz="1350">
                 <a:solidFill>
                   <a:srgbClr val="9AA6B8"/>
                 </a:solidFill>
@@ -6024,14 +7054,14 @@
       </p:sp>
       <p:sp>
         <p:nvSpPr>
-          <p:cNvPr id="6" name="Rounded Rectangle 5"/>
+          <p:cNvPr id="7" name="Rounded Rectangle 6"/>
           <p:cNvSpPr/>
           <p:nvPr/>
         </p:nvSpPr>
         <p:spPr>
           <a:xfrm>
-            <a:off x="4419600" y="2286000"/>
-            <a:ext cx="3322320" cy="3657600"/>
+            <a:off x="4419600" y="2880360"/>
+            <a:ext cx="3322320" cy="3474720"/>
           </a:xfrm>
           <a:prstGeom prst="roundRect">
             <a:avLst/>
@@ -6063,7 +7093,7 @@
           <a:p>
             <a:pPr algn="ctr"/>
             <a:r>
-              <a:rPr sz="1800" b="1">
+              <a:rPr sz="1700" b="1">
                 <a:solidFill>
                   <a:srgbClr val="4E9EFF"/>
                 </a:solidFill>
@@ -6073,7 +7103,7 @@
           </a:p>
           <a:p>
             <a:r>
-              <a:rPr sz="1400">
+              <a:rPr sz="1350">
                 <a:solidFill>
                   <a:srgbClr val="9AA6B8"/>
                 </a:solidFill>
@@ -6111,7 +7141,7 @@
       <p:grpSpPr/>
       <p:sp>
         <p:nvSpPr>
-          <p:cNvPr id="2" name="Rectangle 1"/>
+          <p:cNvPr id="2" name="Rounded Rectangle 1"/>
           <p:cNvSpPr/>
           <p:nvPr/>
         </p:nvSpPr>
@@ -6120,7 +7150,7 @@
             <a:off x="0" y="0"/>
             <a:ext cx="12191695" cy="6858000"/>
           </a:xfrm>
-          <a:prstGeom prst="rect">
+          <a:prstGeom prst="roundRect">
             <a:avLst/>
           </a:prstGeom>
           <a:solidFill>
@@ -6154,20 +7184,20 @@
       </p:sp>
       <p:sp>
         <p:nvSpPr>
-          <p:cNvPr id="3" name="Rectangle 2"/>
+          <p:cNvPr id="3" name="Rounded Rectangle 2"/>
           <p:cNvSpPr/>
           <p:nvPr/>
         </p:nvSpPr>
         <p:spPr>
           <a:xfrm>
-            <a:off x="457200" y="658368"/>
-            <a:ext cx="146304" cy="914400"/>
-          </a:xfrm>
-          <a:prstGeom prst="rect">
+            <a:off x="822960" y="457200"/>
+            <a:ext cx="3291840" cy="384048"/>
+          </a:xfrm>
+          <a:prstGeom prst="roundRect">
             <a:avLst/>
           </a:prstGeom>
           <a:solidFill>
-            <a:srgbClr val="4E9EFF"/>
+            <a:srgbClr val="FFB74D"/>
           </a:solidFill>
           <a:ln>
             <a:noFill/>
@@ -6188,10 +7218,18 @@
           </a:fontRef>
         </p:style>
         <p:txBody>
-          <a:bodyPr rtlCol="0" anchor="ctr"/>
+          <a:bodyPr rtlCol="0" anchor="ctr" tIns="27432" lIns="109728"/>
           <a:lstStyle/>
           <a:p>
             <a:pPr algn="ctr"/>
+            <a:r>
+              <a:rPr sz="1300" b="1">
+                <a:solidFill>
+                  <a:srgbClr val="0F1420"/>
+                </a:solidFill>
+              </a:rPr>
+              <a:t>CONSUMERS</a:t>
+            </a:r>
           </a:p>
         </p:txBody>
       </p:sp>
@@ -6203,8 +7241,8 @@
         </p:nvSpPr>
         <p:spPr>
           <a:xfrm>
-            <a:off x="822960" y="457200"/>
-            <a:ext cx="10515600" cy="1463040"/>
+            <a:off x="822960" y="1051560"/>
+            <a:ext cx="10789920" cy="914400"/>
           </a:xfrm>
           <a:prstGeom prst="rect">
             <a:avLst/>
@@ -6217,9 +7255,8 @@
           </a:bodyPr>
           <a:lstStyle/>
           <a:p>
-            <a:pPr algn="l"/>
-            <a:r>
-              <a:rPr sz="5400" b="1">
+            <a:r>
+              <a:rPr sz="4600" b="1">
                 <a:solidFill>
                   <a:srgbClr val="E8EDF4"/>
                 </a:solidFill>
@@ -6227,29 +7264,84 @@
               <a:t>Consumer</a:t>
             </a:r>
           </a:p>
-          <a:p>
-            <a:pPr algn="l"/>
-            <a:r>
-              <a:rPr sz="2000">
+        </p:txBody>
+      </p:sp>
+      <p:sp>
+        <p:nvSpPr>
+          <p:cNvPr id="5" name="TextBox 4"/>
+          <p:cNvSpPr txBox="1"/>
+          <p:nvPr/>
+        </p:nvSpPr>
+        <p:spPr>
+          <a:xfrm>
+            <a:off x="841248" y="1965960"/>
+            <a:ext cx="10789920" cy="411480"/>
+          </a:xfrm>
+          <a:prstGeom prst="rect">
+            <a:avLst/>
+          </a:prstGeom>
+          <a:noFill/>
+        </p:spPr>
+        <p:txBody>
+          <a:bodyPr wrap="square">
+            <a:spAutoFit/>
+          </a:bodyPr>
+          <a:lstStyle/>
+          <a:p>
+            <a:r>
+              <a:rPr sz="1800" b="0">
                 <a:solidFill>
                   <a:srgbClr val="9AA6B8"/>
                 </a:solidFill>
               </a:rPr>
-              <a:t>Uses the agent directly - the base for everyone who talks to it.</a:t>
-            </a:r>
-          </a:p>
-        </p:txBody>
-      </p:sp>
-      <p:sp>
-        <p:nvSpPr>
-          <p:cNvPr id="5" name="Rounded Rectangle 4"/>
+              <a:t>Uses the agent directly - the base everyone builds on.</a:t>
+            </a:r>
+          </a:p>
+        </p:txBody>
+      </p:sp>
+      <p:sp>
+        <p:nvSpPr>
+          <p:cNvPr id="6" name="TextBox 5"/>
+          <p:cNvSpPr txBox="1"/>
+          <p:nvPr/>
+        </p:nvSpPr>
+        <p:spPr>
+          <a:xfrm>
+            <a:off x="841248" y="2377440"/>
+            <a:ext cx="10789920" cy="365760"/>
+          </a:xfrm>
+          <a:prstGeom prst="rect">
+            <a:avLst/>
+          </a:prstGeom>
+          <a:noFill/>
+        </p:spPr>
+        <p:txBody>
+          <a:bodyPr wrap="square">
+            <a:spAutoFit/>
+          </a:bodyPr>
+          <a:lstStyle/>
+          <a:p>
+            <a:r>
+              <a:rPr sz="1500" b="0">
+                <a:solidFill>
+                  <a:srgbClr val="FFB74D"/>
+                </a:solidFill>
+              </a:rPr>
+              <a:t>Built on: base persona (no parent)</a:t>
+            </a:r>
+          </a:p>
+        </p:txBody>
+      </p:sp>
+      <p:sp>
+        <p:nvSpPr>
+          <p:cNvPr id="7" name="Rounded Rectangle 6"/>
           <p:cNvSpPr/>
           <p:nvPr/>
         </p:nvSpPr>
         <p:spPr>
           <a:xfrm>
-            <a:off x="822960" y="2286000"/>
-            <a:ext cx="3322320" cy="1828800"/>
+            <a:off x="822960" y="2880360"/>
+            <a:ext cx="3322320" cy="1737360"/>
           </a:xfrm>
           <a:prstGeom prst="roundRect">
             <a:avLst/>
@@ -6281,7 +7373,7 @@
           <a:p>
             <a:pPr algn="ctr"/>
             <a:r>
-              <a:rPr sz="1800" b="1">
+              <a:rPr sz="1700" b="1">
                 <a:solidFill>
                   <a:srgbClr val="4E9EFF"/>
                 </a:solidFill>
@@ -6291,7 +7383,7 @@
           </a:p>
           <a:p>
             <a:r>
-              <a:rPr sz="1400">
+              <a:rPr sz="1350">
                 <a:solidFill>
                   <a:srgbClr val="9AA6B8"/>
                 </a:solidFill>
@@ -6303,14 +7395,14 @@
       </p:sp>
       <p:sp>
         <p:nvSpPr>
-          <p:cNvPr id="6" name="Rounded Rectangle 5"/>
+          <p:cNvPr id="8" name="Rounded Rectangle 7"/>
           <p:cNvSpPr/>
           <p:nvPr/>
         </p:nvSpPr>
         <p:spPr>
           <a:xfrm>
-            <a:off x="4419600" y="2286000"/>
-            <a:ext cx="3322320" cy="1828800"/>
+            <a:off x="4419600" y="2880360"/>
+            <a:ext cx="3322320" cy="1737360"/>
           </a:xfrm>
           <a:prstGeom prst="roundRect">
             <a:avLst/>
@@ -6342,7 +7434,7 @@
           <a:p>
             <a:pPr algn="ctr"/>
             <a:r>
-              <a:rPr sz="1800" b="1">
+              <a:rPr sz="1700" b="1">
                 <a:solidFill>
                   <a:srgbClr val="4E9EFF"/>
                 </a:solidFill>
@@ -6352,7 +7444,7 @@
           </a:p>
           <a:p>
             <a:r>
-              <a:rPr sz="1400">
+              <a:rPr sz="1350">
                 <a:solidFill>
                   <a:srgbClr val="9AA6B8"/>
                 </a:solidFill>
@@ -6364,14 +7456,14 @@
       </p:sp>
       <p:sp>
         <p:nvSpPr>
-          <p:cNvPr id="7" name="Rounded Rectangle 6"/>
+          <p:cNvPr id="9" name="Rounded Rectangle 8"/>
           <p:cNvSpPr/>
           <p:nvPr/>
         </p:nvSpPr>
         <p:spPr>
           <a:xfrm>
-            <a:off x="8016239" y="2286000"/>
-            <a:ext cx="3322320" cy="1828800"/>
+            <a:off x="8016239" y="2880360"/>
+            <a:ext cx="3322320" cy="1737360"/>
           </a:xfrm>
           <a:prstGeom prst="roundRect">
             <a:avLst/>
@@ -6403,7 +7495,7 @@
           <a:p>
             <a:pPr algn="ctr"/>
             <a:r>
-              <a:rPr sz="1800" b="1">
+              <a:rPr sz="1700" b="1">
                 <a:solidFill>
                   <a:srgbClr val="4E9EFF"/>
                 </a:solidFill>
@@ -6413,7 +7505,7 @@
           </a:p>
           <a:p>
             <a:r>
-              <a:rPr sz="1400">
+              <a:rPr sz="1350">
                 <a:solidFill>
                   <a:srgbClr val="9AA6B8"/>
                 </a:solidFill>
@@ -6425,14 +7517,14 @@
       </p:sp>
       <p:sp>
         <p:nvSpPr>
-          <p:cNvPr id="8" name="Rounded Rectangle 7"/>
+          <p:cNvPr id="10" name="Rounded Rectangle 9"/>
           <p:cNvSpPr/>
           <p:nvPr/>
         </p:nvSpPr>
         <p:spPr>
           <a:xfrm>
-            <a:off x="822960" y="4343400"/>
-            <a:ext cx="3322320" cy="1828800"/>
+            <a:off x="822960" y="4846320"/>
+            <a:ext cx="3322320" cy="1737360"/>
           </a:xfrm>
           <a:prstGeom prst="roundRect">
             <a:avLst/>
@@ -6464,7 +7556,7 @@
           <a:p>
             <a:pPr algn="ctr"/>
             <a:r>
-              <a:rPr sz="1800" b="1">
+              <a:rPr sz="1700" b="1">
                 <a:solidFill>
                   <a:srgbClr val="4E9EFF"/>
                 </a:solidFill>
@@ -6474,7 +7566,7 @@
           </a:p>
           <a:p>
             <a:r>
-              <a:rPr sz="1400">
+              <a:rPr sz="1350">
                 <a:solidFill>
                   <a:srgbClr val="9AA6B8"/>
                 </a:solidFill>
@@ -6486,14 +7578,14 @@
       </p:sp>
       <p:sp>
         <p:nvSpPr>
-          <p:cNvPr id="9" name="Rounded Rectangle 8"/>
+          <p:cNvPr id="11" name="Rounded Rectangle 10"/>
           <p:cNvSpPr/>
           <p:nvPr/>
         </p:nvSpPr>
         <p:spPr>
           <a:xfrm>
-            <a:off x="4419600" y="4343400"/>
-            <a:ext cx="3322320" cy="1828800"/>
+            <a:off x="4419600" y="4846320"/>
+            <a:ext cx="3322320" cy="1737360"/>
           </a:xfrm>
           <a:prstGeom prst="roundRect">
             <a:avLst/>
@@ -6525,7 +7617,7 @@
           <a:p>
             <a:pPr algn="ctr"/>
             <a:r>
-              <a:rPr sz="1800" b="1">
+              <a:rPr sz="1700" b="1">
                 <a:solidFill>
                   <a:srgbClr val="4E9EFF"/>
                 </a:solidFill>
@@ -6535,7 +7627,7 @@
           </a:p>
           <a:p>
             <a:r>
-              <a:rPr sz="1400">
+              <a:rPr sz="1350">
                 <a:solidFill>
                   <a:srgbClr val="9AA6B8"/>
                 </a:solidFill>
@@ -6547,14 +7639,14 @@
       </p:sp>
       <p:sp>
         <p:nvSpPr>
-          <p:cNvPr id="10" name="Rounded Rectangle 9"/>
+          <p:cNvPr id="12" name="Rounded Rectangle 11"/>
           <p:cNvSpPr/>
           <p:nvPr/>
         </p:nvSpPr>
         <p:spPr>
           <a:xfrm>
-            <a:off x="8016239" y="4343400"/>
-            <a:ext cx="3322320" cy="1828800"/>
+            <a:off x="8016239" y="4846320"/>
+            <a:ext cx="3322320" cy="1737360"/>
           </a:xfrm>
           <a:prstGeom prst="roundRect">
             <a:avLst/>
@@ -6586,7 +7678,7 @@
           <a:p>
             <a:pPr algn="ctr"/>
             <a:r>
-              <a:rPr sz="1800" b="1">
+              <a:rPr sz="1700" b="1">
                 <a:solidFill>
                   <a:srgbClr val="4E9EFF"/>
                 </a:solidFill>
@@ -6596,7 +7688,7 @@
           </a:p>
           <a:p>
             <a:r>
-              <a:rPr sz="1400">
+              <a:rPr sz="1350">
                 <a:solidFill>
                   <a:srgbClr val="9AA6B8"/>
                 </a:solidFill>
@@ -6634,7 +7726,7 @@
       <p:grpSpPr/>
       <p:sp>
         <p:nvSpPr>
-          <p:cNvPr id="2" name="Rectangle 1"/>
+          <p:cNvPr id="2" name="Rounded Rectangle 1"/>
           <p:cNvSpPr/>
           <p:nvPr/>
         </p:nvSpPr>
@@ -6643,7 +7735,7 @@
             <a:off x="0" y="0"/>
             <a:ext cx="12191695" cy="6858000"/>
           </a:xfrm>
-          <a:prstGeom prst="rect">
+          <a:prstGeom prst="roundRect">
             <a:avLst/>
           </a:prstGeom>
           <a:solidFill>
@@ -6677,20 +7769,20 @@
       </p:sp>
       <p:sp>
         <p:nvSpPr>
-          <p:cNvPr id="3" name="Rectangle 2"/>
+          <p:cNvPr id="3" name="Rounded Rectangle 2"/>
           <p:cNvSpPr/>
           <p:nvPr/>
         </p:nvSpPr>
         <p:spPr>
           <a:xfrm>
-            <a:off x="457200" y="658368"/>
-            <a:ext cx="146304" cy="914400"/>
-          </a:xfrm>
-          <a:prstGeom prst="rect">
+            <a:off x="822960" y="457200"/>
+            <a:ext cx="3291840" cy="384048"/>
+          </a:xfrm>
+          <a:prstGeom prst="roundRect">
             <a:avLst/>
           </a:prstGeom>
           <a:solidFill>
-            <a:srgbClr val="4E9EFF"/>
+            <a:srgbClr val="FFB74D"/>
           </a:solidFill>
           <a:ln>
             <a:noFill/>
@@ -6711,10 +7803,18 @@
           </a:fontRef>
         </p:style>
         <p:txBody>
-          <a:bodyPr rtlCol="0" anchor="ctr"/>
+          <a:bodyPr rtlCol="0" anchor="ctr" tIns="27432" lIns="109728"/>
           <a:lstStyle/>
           <a:p>
             <a:pPr algn="ctr"/>
+            <a:r>
+              <a:rPr sz="1300" b="1">
+                <a:solidFill>
+                  <a:srgbClr val="0F1420"/>
+                </a:solidFill>
+              </a:rPr>
+              <a:t>CONSUMERS</a:t>
+            </a:r>
           </a:p>
         </p:txBody>
       </p:sp>
@@ -6726,8 +7826,8 @@
         </p:nvSpPr>
         <p:spPr>
           <a:xfrm>
-            <a:off x="822960" y="457200"/>
-            <a:ext cx="10515600" cy="1463040"/>
+            <a:off x="822960" y="1051560"/>
+            <a:ext cx="10789920" cy="914400"/>
           </a:xfrm>
           <a:prstGeom prst="rect">
             <a:avLst/>
@@ -6740,9 +7840,8 @@
           </a:bodyPr>
           <a:lstStyle/>
           <a:p>
-            <a:pPr algn="l"/>
-            <a:r>
-              <a:rPr sz="5400" b="1">
+            <a:r>
+              <a:rPr sz="4600" b="1">
                 <a:solidFill>
                   <a:srgbClr val="E8EDF4"/>
                 </a:solidFill>
@@ -6750,10 +7849,32 @@
               <a:t>Web User</a:t>
             </a:r>
           </a:p>
-          <a:p>
-            <a:pPr algn="l"/>
-            <a:r>
-              <a:rPr sz="2000">
+        </p:txBody>
+      </p:sp>
+      <p:sp>
+        <p:nvSpPr>
+          <p:cNvPr id="5" name="TextBox 4"/>
+          <p:cNvSpPr txBox="1"/>
+          <p:nvPr/>
+        </p:nvSpPr>
+        <p:spPr>
+          <a:xfrm>
+            <a:off x="841248" y="1965960"/>
+            <a:ext cx="10789920" cy="411480"/>
+          </a:xfrm>
+          <a:prstGeom prst="rect">
+            <a:avLst/>
+          </a:prstGeom>
+          <a:noFill/>
+        </p:spPr>
+        <p:txBody>
+          <a:bodyPr wrap="square">
+            <a:spAutoFit/>
+          </a:bodyPr>
+          <a:lstStyle/>
+          <a:p>
+            <a:r>
+              <a:rPr sz="1800" b="0">
                 <a:solidFill>
                   <a:srgbClr val="9AA6B8"/>
                 </a:solidFill>
@@ -6765,14 +7886,47 @@
       </p:sp>
       <p:sp>
         <p:nvSpPr>
-          <p:cNvPr id="5" name="Rounded Rectangle 4"/>
+          <p:cNvPr id="6" name="TextBox 5"/>
+          <p:cNvSpPr txBox="1"/>
+          <p:nvPr/>
+        </p:nvSpPr>
+        <p:spPr>
+          <a:xfrm>
+            <a:off x="841248" y="2377440"/>
+            <a:ext cx="10789920" cy="365760"/>
+          </a:xfrm>
+          <a:prstGeom prst="rect">
+            <a:avLst/>
+          </a:prstGeom>
+          <a:noFill/>
+        </p:spPr>
+        <p:txBody>
+          <a:bodyPr wrap="square">
+            <a:spAutoFit/>
+          </a:bodyPr>
+          <a:lstStyle/>
+          <a:p>
+            <a:r>
+              <a:rPr sz="1500" b="0">
+                <a:solidFill>
+                  <a:srgbClr val="FFB74D"/>
+                </a:solidFill>
+              </a:rPr>
+              <a:t>Built on: a Consumer</a:t>
+            </a:r>
+          </a:p>
+        </p:txBody>
+      </p:sp>
+      <p:sp>
+        <p:nvSpPr>
+          <p:cNvPr id="7" name="Rounded Rectangle 6"/>
           <p:cNvSpPr/>
           <p:nvPr/>
         </p:nvSpPr>
         <p:spPr>
           <a:xfrm>
-            <a:off x="822960" y="2286000"/>
-            <a:ext cx="3322320" cy="1828800"/>
+            <a:off x="822960" y="2880360"/>
+            <a:ext cx="3322320" cy="1737360"/>
           </a:xfrm>
           <a:prstGeom prst="roundRect">
             <a:avLst/>
@@ -6804,36 +7958,36 @@
           <a:p>
             <a:pPr algn="ctr"/>
             <a:r>
-              <a:rPr sz="1800" b="1">
+              <a:rPr sz="1700" b="1">
                 <a:solidFill>
                   <a:srgbClr val="4E9EFF"/>
                 </a:solidFill>
               </a:rPr>
-              <a:t>Language</a:t>
-            </a:r>
-          </a:p>
-          <a:p>
-            <a:r>
-              <a:rPr sz="1400">
+              <a:t>Choosing</a:t>
+            </a:r>
+          </a:p>
+          <a:p>
+            <a:r>
+              <a:rPr sz="1350">
                 <a:solidFill>
                   <a:srgbClr val="9AA6B8"/>
                 </a:solidFill>
               </a:rPr>
-              <a:t>GUI isn't fully translated</a:t>
-            </a:r>
-          </a:p>
-        </p:txBody>
-      </p:sp>
-      <p:sp>
-        <p:nvSpPr>
-          <p:cNvPr id="6" name="Rounded Rectangle 5"/>
+              <a:t>mode names are unclear</a:t>
+            </a:r>
+          </a:p>
+        </p:txBody>
+      </p:sp>
+      <p:sp>
+        <p:nvSpPr>
+          <p:cNvPr id="8" name="Rounded Rectangle 7"/>
           <p:cNvSpPr/>
           <p:nvPr/>
         </p:nvSpPr>
         <p:spPr>
           <a:xfrm>
-            <a:off x="4419600" y="2286000"/>
-            <a:ext cx="3322320" cy="1828800"/>
+            <a:off x="4419600" y="2880360"/>
+            <a:ext cx="3322320" cy="1737360"/>
           </a:xfrm>
           <a:prstGeom prst="roundRect">
             <a:avLst/>
@@ -6865,36 +8019,36 @@
           <a:p>
             <a:pPr algn="ctr"/>
             <a:r>
-              <a:rPr sz="1800" b="1">
+              <a:rPr sz="1700" b="1">
                 <a:solidFill>
                   <a:srgbClr val="4E9EFF"/>
                 </a:solidFill>
               </a:rPr>
-              <a:t>Navigation &amp; Settings</a:t>
-            </a:r>
-          </a:p>
-          <a:p>
-            <a:r>
-              <a:rPr sz="1400">
+              <a:t>Language</a:t>
+            </a:r>
+          </a:p>
+          <a:p>
+            <a:r>
+              <a:rPr sz="1350">
                 <a:solidFill>
                   <a:srgbClr val="9AA6B8"/>
                 </a:solidFill>
               </a:rPr>
-              <a:t>settings by module; skills/connectors split</a:t>
-            </a:r>
-          </a:p>
-        </p:txBody>
-      </p:sp>
-      <p:sp>
-        <p:nvSpPr>
-          <p:cNvPr id="7" name="Rounded Rectangle 6"/>
+              <a:t>GUI isn't fully translated</a:t>
+            </a:r>
+          </a:p>
+        </p:txBody>
+      </p:sp>
+      <p:sp>
+        <p:nvSpPr>
+          <p:cNvPr id="9" name="Rounded Rectangle 8"/>
           <p:cNvSpPr/>
           <p:nvPr/>
         </p:nvSpPr>
         <p:spPr>
           <a:xfrm>
-            <a:off x="8016239" y="2286000"/>
-            <a:ext cx="3322320" cy="1828800"/>
+            <a:off x="8016239" y="2880360"/>
+            <a:ext cx="3322320" cy="1737360"/>
           </a:xfrm>
           <a:prstGeom prst="roundRect">
             <a:avLst/>
@@ -6926,36 +8080,36 @@
           <a:p>
             <a:pPr algn="ctr"/>
             <a:r>
-              <a:rPr sz="1800" b="1">
+              <a:rPr sz="1700" b="1">
                 <a:solidFill>
                   <a:srgbClr val="4E9EFF"/>
                 </a:solidFill>
               </a:rPr>
-              <a:t>Discovery</a:t>
-            </a:r>
-          </a:p>
-          <a:p>
-            <a:r>
-              <a:rPr sz="1400">
+              <a:t>Navigation &amp; Settings</a:t>
+            </a:r>
+          </a:p>
+          <a:p>
+            <a:r>
+              <a:rPr sz="1350">
                 <a:solidFill>
                   <a:srgbClr val="9AA6B8"/>
                 </a:solidFill>
               </a:rPr>
-              <a:t>empty start; powerful features hidden</a:t>
-            </a:r>
-          </a:p>
-        </p:txBody>
-      </p:sp>
-      <p:sp>
-        <p:nvSpPr>
-          <p:cNvPr id="8" name="Rounded Rectangle 7"/>
+              <a:t>settings by module; skills/connectors split</a:t>
+            </a:r>
+          </a:p>
+        </p:txBody>
+      </p:sp>
+      <p:sp>
+        <p:nvSpPr>
+          <p:cNvPr id="10" name="Rounded Rectangle 9"/>
           <p:cNvSpPr/>
           <p:nvPr/>
         </p:nvSpPr>
         <p:spPr>
           <a:xfrm>
-            <a:off x="822960" y="4343400"/>
-            <a:ext cx="3322320" cy="1828800"/>
+            <a:off x="822960" y="4846320"/>
+            <a:ext cx="3322320" cy="1737360"/>
           </a:xfrm>
           <a:prstGeom prst="roundRect">
             <a:avLst/>
@@ -6987,36 +8141,36 @@
           <a:p>
             <a:pPr algn="ctr"/>
             <a:r>
-              <a:rPr sz="1800" b="1">
+              <a:rPr sz="1700" b="1">
                 <a:solidFill>
                   <a:srgbClr val="4E9EFF"/>
                 </a:solidFill>
               </a:rPr>
-              <a:t>Accessibility</a:t>
-            </a:r>
-          </a:p>
-          <a:p>
-            <a:r>
-              <a:rPr sz="1400">
+              <a:t>Discovery</a:t>
+            </a:r>
+          </a:p>
+          <a:p>
+            <a:r>
+              <a:rPr sz="1350">
                 <a:solidFill>
                   <a:srgbClr val="9AA6B8"/>
                 </a:solidFill>
               </a:rPr>
-              <a:t>contrast &amp; screen-reader gaps</a:t>
-            </a:r>
-          </a:p>
-        </p:txBody>
-      </p:sp>
-      <p:sp>
-        <p:nvSpPr>
-          <p:cNvPr id="9" name="Rounded Rectangle 8"/>
+              <a:t>empty start; powerful features hidden</a:t>
+            </a:r>
+          </a:p>
+        </p:txBody>
+      </p:sp>
+      <p:sp>
+        <p:nvSpPr>
+          <p:cNvPr id="11" name="Rounded Rectangle 10"/>
           <p:cNvSpPr/>
           <p:nvPr/>
         </p:nvSpPr>
         <p:spPr>
           <a:xfrm>
-            <a:off x="4419600" y="4343400"/>
-            <a:ext cx="3322320" cy="1828800"/>
+            <a:off x="4419600" y="4846320"/>
+            <a:ext cx="3322320" cy="1737360"/>
           </a:xfrm>
           <a:prstGeom prst="roundRect">
             <a:avLst/>
@@ -7048,17 +8202,78 @@
           <a:p>
             <a:pPr algn="ctr"/>
             <a:r>
-              <a:rPr sz="1800" b="1">
+              <a:rPr sz="1700" b="1">
                 <a:solidFill>
                   <a:srgbClr val="4E9EFF"/>
                 </a:solidFill>
               </a:rPr>
+              <a:t>Accessibility</a:t>
+            </a:r>
+          </a:p>
+          <a:p>
+            <a:r>
+              <a:rPr sz="1350">
+                <a:solidFill>
+                  <a:srgbClr val="9AA6B8"/>
+                </a:solidFill>
+              </a:rPr>
+              <a:t>contrast &amp; screen-reader gaps</a:t>
+            </a:r>
+          </a:p>
+        </p:txBody>
+      </p:sp>
+      <p:sp>
+        <p:nvSpPr>
+          <p:cNvPr id="12" name="Rounded Rectangle 11"/>
+          <p:cNvSpPr/>
+          <p:nvPr/>
+        </p:nvSpPr>
+        <p:spPr>
+          <a:xfrm>
+            <a:off x="8016239" y="4846320"/>
+            <a:ext cx="3322320" cy="1737360"/>
+          </a:xfrm>
+          <a:prstGeom prst="roundRect">
+            <a:avLst/>
+          </a:prstGeom>
+          <a:solidFill>
+            <a:srgbClr val="1E2A3A"/>
+          </a:solidFill>
+          <a:ln>
+            <a:noFill/>
+          </a:ln>
+        </p:spPr>
+        <p:style>
+          <a:lnRef idx="1">
+            <a:schemeClr val="accent1"/>
+          </a:lnRef>
+          <a:fillRef idx="3">
+            <a:schemeClr val="accent1"/>
+          </a:fillRef>
+          <a:effectRef idx="2">
+            <a:schemeClr val="accent1"/>
+          </a:effectRef>
+          <a:fontRef idx="minor">
+            <a:schemeClr val="lt1"/>
+          </a:fontRef>
+        </p:style>
+        <p:txBody>
+          <a:bodyPr rtlCol="0" anchor="ctr" lIns="137160" rIns="137160" tIns="109728" wrap="square"/>
+          <a:lstStyle/>
+          <a:p>
+            <a:pPr algn="ctr"/>
+            <a:r>
+              <a:rPr sz="1700" b="1">
+                <a:solidFill>
+                  <a:srgbClr val="4E9EFF"/>
+                </a:solidFill>
+              </a:rPr>
               <a:t>Mobile</a:t>
             </a:r>
           </a:p>
           <a:p>
             <a:r>
-              <a:rPr sz="1400">
+              <a:rPr sz="1350">
                 <a:solidFill>
                   <a:srgbClr val="9AA6B8"/>
                 </a:solidFill>
@@ -7096,7 +8311,7 @@
       <p:grpSpPr/>
       <p:sp>
         <p:nvSpPr>
-          <p:cNvPr id="2" name="Rectangle 1"/>
+          <p:cNvPr id="2" name="Rounded Rectangle 1"/>
           <p:cNvSpPr/>
           <p:nvPr/>
         </p:nvSpPr>
@@ -7105,7 +8320,7 @@
             <a:off x="0" y="0"/>
             <a:ext cx="12191695" cy="6858000"/>
           </a:xfrm>
-          <a:prstGeom prst="rect">
+          <a:prstGeom prst="roundRect">
             <a:avLst/>
           </a:prstGeom>
           <a:solidFill>
@@ -7139,20 +8354,20 @@
       </p:sp>
       <p:sp>
         <p:nvSpPr>
-          <p:cNvPr id="3" name="Rectangle 2"/>
+          <p:cNvPr id="3" name="Rounded Rectangle 2"/>
           <p:cNvSpPr/>
           <p:nvPr/>
         </p:nvSpPr>
         <p:spPr>
           <a:xfrm>
-            <a:off x="457200" y="658368"/>
-            <a:ext cx="146304" cy="914400"/>
-          </a:xfrm>
-          <a:prstGeom prst="rect">
+            <a:off x="822960" y="457200"/>
+            <a:ext cx="3291840" cy="384048"/>
+          </a:xfrm>
+          <a:prstGeom prst="roundRect">
             <a:avLst/>
           </a:prstGeom>
           <a:solidFill>
-            <a:srgbClr val="4E9EFF"/>
+            <a:srgbClr val="FFB74D"/>
           </a:solidFill>
           <a:ln>
             <a:noFill/>
@@ -7173,10 +8388,18 @@
           </a:fontRef>
         </p:style>
         <p:txBody>
-          <a:bodyPr rtlCol="0" anchor="ctr"/>
+          <a:bodyPr rtlCol="0" anchor="ctr" tIns="27432" lIns="109728"/>
           <a:lstStyle/>
           <a:p>
             <a:pPr algn="ctr"/>
+            <a:r>
+              <a:rPr sz="1300" b="1">
+                <a:solidFill>
+                  <a:srgbClr val="0F1420"/>
+                </a:solidFill>
+              </a:rPr>
+              <a:t>CONSUMERS -&gt; WEB USER</a:t>
+            </a:r>
           </a:p>
         </p:txBody>
       </p:sp>
@@ -7188,8 +8411,8 @@
         </p:nvSpPr>
         <p:spPr>
           <a:xfrm>
-            <a:off x="822960" y="457200"/>
-            <a:ext cx="10515600" cy="1463040"/>
+            <a:off x="822960" y="1051560"/>
+            <a:ext cx="10789920" cy="914400"/>
           </a:xfrm>
           <a:prstGeom prst="rect">
             <a:avLst/>
@@ -7202,9 +8425,8 @@
           </a:bodyPr>
           <a:lstStyle/>
           <a:p>
-            <a:pPr algn="l"/>
-            <a:r>
-              <a:rPr sz="5400" b="1">
+            <a:r>
+              <a:rPr sz="4600" b="1">
                 <a:solidFill>
                   <a:srgbClr val="E8EDF4"/>
                 </a:solidFill>
@@ -7212,10 +8434,32 @@
               <a:t>Web Chat</a:t>
             </a:r>
           </a:p>
-          <a:p>
-            <a:pPr algn="l"/>
-            <a:r>
-              <a:rPr sz="2000">
+        </p:txBody>
+      </p:sp>
+      <p:sp>
+        <p:nvSpPr>
+          <p:cNvPr id="5" name="TextBox 4"/>
+          <p:cNvSpPr txBox="1"/>
+          <p:nvPr/>
+        </p:nvSpPr>
+        <p:spPr>
+          <a:xfrm>
+            <a:off x="841248" y="1965960"/>
+            <a:ext cx="10789920" cy="411480"/>
+          </a:xfrm>
+          <a:prstGeom prst="rect">
+            <a:avLst/>
+          </a:prstGeom>
+          <a:noFill/>
+        </p:spPr>
+        <p:txBody>
+          <a:bodyPr wrap="square">
+            <a:spAutoFit/>
+          </a:bodyPr>
+          <a:lstStyle/>
+          <a:p>
+            <a:r>
+              <a:rPr sz="1800" b="0">
                 <a:solidFill>
                   <a:srgbClr val="9AA6B8"/>
                 </a:solidFill>
@@ -7227,14 +8471,47 @@
       </p:sp>
       <p:sp>
         <p:nvSpPr>
-          <p:cNvPr id="5" name="Rounded Rectangle 4"/>
+          <p:cNvPr id="6" name="TextBox 5"/>
+          <p:cNvSpPr txBox="1"/>
+          <p:nvPr/>
+        </p:nvSpPr>
+        <p:spPr>
+          <a:xfrm>
+            <a:off x="841248" y="2377440"/>
+            <a:ext cx="10789920" cy="365760"/>
+          </a:xfrm>
+          <a:prstGeom prst="rect">
+            <a:avLst/>
+          </a:prstGeom>
+          <a:noFill/>
+        </p:spPr>
+        <p:txBody>
+          <a:bodyPr wrap="square">
+            <a:spAutoFit/>
+          </a:bodyPr>
+          <a:lstStyle/>
+          <a:p>
+            <a:r>
+              <a:rPr sz="1500" b="0">
+                <a:solidFill>
+                  <a:srgbClr val="FFB74D"/>
+                </a:solidFill>
+              </a:rPr>
+              <a:t>Built on: a Consumer -&gt; Web User</a:t>
+            </a:r>
+          </a:p>
+        </p:txBody>
+      </p:sp>
+      <p:sp>
+        <p:nvSpPr>
+          <p:cNvPr id="7" name="Rounded Rectangle 6"/>
           <p:cNvSpPr/>
           <p:nvPr/>
         </p:nvSpPr>
         <p:spPr>
           <a:xfrm>
-            <a:off x="822960" y="2286000"/>
-            <a:ext cx="3322320" cy="3657600"/>
+            <a:off x="822960" y="2880360"/>
+            <a:ext cx="3322320" cy="3474720"/>
           </a:xfrm>
           <a:prstGeom prst="roundRect">
             <a:avLst/>
@@ -7266,7 +8543,7 @@
           <a:p>
             <a:pPr algn="ctr"/>
             <a:r>
-              <a:rPr sz="1800" b="1">
+              <a:rPr sz="1700" b="1">
                 <a:solidFill>
                   <a:srgbClr val="4E9EFF"/>
                 </a:solidFill>
@@ -7276,7 +8553,7 @@
           </a:p>
           <a:p>
             <a:r>
-              <a:rPr sz="1400">
+              <a:rPr sz="1350">
                 <a:solidFill>
                   <a:srgbClr val="9AA6B8"/>
                 </a:solidFill>
@@ -7288,14 +8565,14 @@
       </p:sp>
       <p:sp>
         <p:nvSpPr>
-          <p:cNvPr id="6" name="Rounded Rectangle 5"/>
+          <p:cNvPr id="8" name="Rounded Rectangle 7"/>
           <p:cNvSpPr/>
           <p:nvPr/>
         </p:nvSpPr>
         <p:spPr>
           <a:xfrm>
-            <a:off x="4419600" y="2286000"/>
-            <a:ext cx="3322320" cy="3657600"/>
+            <a:off x="4419600" y="2880360"/>
+            <a:ext cx="3322320" cy="3474720"/>
           </a:xfrm>
           <a:prstGeom prst="roundRect">
             <a:avLst/>
@@ -7327,7 +8604,7 @@
           <a:p>
             <a:pPr algn="ctr"/>
             <a:r>
-              <a:rPr sz="1800" b="1">
+              <a:rPr sz="1700" b="1">
                 <a:solidFill>
                   <a:srgbClr val="4E9EFF"/>
                 </a:solidFill>
@@ -7337,7 +8614,7 @@
           </a:p>
           <a:p>
             <a:r>
-              <a:rPr sz="1400">
+              <a:rPr sz="1350">
                 <a:solidFill>
                   <a:srgbClr val="9AA6B8"/>
                 </a:solidFill>
@@ -7375,7 +8652,7 @@
       <p:grpSpPr/>
       <p:sp>
         <p:nvSpPr>
-          <p:cNvPr id="2" name="Rectangle 1"/>
+          <p:cNvPr id="2" name="Rounded Rectangle 1"/>
           <p:cNvSpPr/>
           <p:nvPr/>
         </p:nvSpPr>
@@ -7384,7 +8661,7 @@
             <a:off x="0" y="0"/>
             <a:ext cx="12191695" cy="6858000"/>
           </a:xfrm>
-          <a:prstGeom prst="rect">
+          <a:prstGeom prst="roundRect">
             <a:avLst/>
           </a:prstGeom>
           <a:solidFill>
@@ -7418,20 +8695,20 @@
       </p:sp>
       <p:sp>
         <p:nvSpPr>
-          <p:cNvPr id="3" name="Rectangle 2"/>
+          <p:cNvPr id="3" name="Rounded Rectangle 2"/>
           <p:cNvSpPr/>
           <p:nvPr/>
         </p:nvSpPr>
         <p:spPr>
           <a:xfrm>
-            <a:off x="457200" y="658368"/>
-            <a:ext cx="146304" cy="914400"/>
-          </a:xfrm>
-          <a:prstGeom prst="rect">
+            <a:off x="822960" y="457200"/>
+            <a:ext cx="3291840" cy="384048"/>
+          </a:xfrm>
+          <a:prstGeom prst="roundRect">
             <a:avLst/>
           </a:prstGeom>
           <a:solidFill>
-            <a:srgbClr val="4E9EFF"/>
+            <a:srgbClr val="FFB74D"/>
           </a:solidFill>
           <a:ln>
             <a:noFill/>
@@ -7452,10 +8729,18 @@
           </a:fontRef>
         </p:style>
         <p:txBody>
-          <a:bodyPr rtlCol="0" anchor="ctr"/>
+          <a:bodyPr rtlCol="0" anchor="ctr" tIns="27432" lIns="109728"/>
           <a:lstStyle/>
           <a:p>
             <a:pPr algn="ctr"/>
+            <a:r>
+              <a:rPr sz="1300" b="1">
+                <a:solidFill>
+                  <a:srgbClr val="0F1420"/>
+                </a:solidFill>
+              </a:rPr>
+              <a:t>CONSUMERS -&gt; WEB USER</a:t>
+            </a:r>
           </a:p>
         </p:txBody>
       </p:sp>
@@ -7467,8 +8752,8 @@
         </p:nvSpPr>
         <p:spPr>
           <a:xfrm>
-            <a:off x="822960" y="457200"/>
-            <a:ext cx="10515600" cy="1463040"/>
+            <a:off x="822960" y="1051560"/>
+            <a:ext cx="10789920" cy="914400"/>
           </a:xfrm>
           <a:prstGeom prst="rect">
             <a:avLst/>
@@ -7481,9 +8766,8 @@
           </a:bodyPr>
           <a:lstStyle/>
           <a:p>
-            <a:pPr algn="l"/>
-            <a:r>
-              <a:rPr sz="5400" b="1">
+            <a:r>
+              <a:rPr sz="4600" b="1">
                 <a:solidFill>
                   <a:srgbClr val="E8EDF4"/>
                 </a:solidFill>
@@ -7491,10 +8775,32 @@
               <a:t>Web Code</a:t>
             </a:r>
           </a:p>
-          <a:p>
-            <a:pPr algn="l"/>
-            <a:r>
-              <a:rPr sz="2000">
+        </p:txBody>
+      </p:sp>
+      <p:sp>
+        <p:nvSpPr>
+          <p:cNvPr id="5" name="TextBox 4"/>
+          <p:cNvSpPr txBox="1"/>
+          <p:nvPr/>
+        </p:nvSpPr>
+        <p:spPr>
+          <a:xfrm>
+            <a:off x="841248" y="1965960"/>
+            <a:ext cx="10789920" cy="411480"/>
+          </a:xfrm>
+          <a:prstGeom prst="rect">
+            <a:avLst/>
+          </a:prstGeom>
+          <a:noFill/>
+        </p:spPr>
+        <p:txBody>
+          <a:bodyPr wrap="square">
+            <a:spAutoFit/>
+          </a:bodyPr>
+          <a:lstStyle/>
+          <a:p>
+            <a:r>
+              <a:rPr sz="1800" b="0">
                 <a:solidFill>
                   <a:srgbClr val="9AA6B8"/>
                 </a:solidFill>
@@ -7506,14 +8812,47 @@
       </p:sp>
       <p:sp>
         <p:nvSpPr>
-          <p:cNvPr id="5" name="Rounded Rectangle 4"/>
+          <p:cNvPr id="6" name="TextBox 5"/>
+          <p:cNvSpPr txBox="1"/>
+          <p:nvPr/>
+        </p:nvSpPr>
+        <p:spPr>
+          <a:xfrm>
+            <a:off x="841248" y="2377440"/>
+            <a:ext cx="10789920" cy="365760"/>
+          </a:xfrm>
+          <a:prstGeom prst="rect">
+            <a:avLst/>
+          </a:prstGeom>
+          <a:noFill/>
+        </p:spPr>
+        <p:txBody>
+          <a:bodyPr wrap="square">
+            <a:spAutoFit/>
+          </a:bodyPr>
+          <a:lstStyle/>
+          <a:p>
+            <a:r>
+              <a:rPr sz="1500" b="0">
+                <a:solidFill>
+                  <a:srgbClr val="FFB74D"/>
+                </a:solidFill>
+              </a:rPr>
+              <a:t>Built on: a Consumer -&gt; Web User</a:t>
+            </a:r>
+          </a:p>
+        </p:txBody>
+      </p:sp>
+      <p:sp>
+        <p:nvSpPr>
+          <p:cNvPr id="7" name="Rounded Rectangle 6"/>
           <p:cNvSpPr/>
           <p:nvPr/>
         </p:nvSpPr>
         <p:spPr>
           <a:xfrm>
-            <a:off x="822960" y="2286000"/>
-            <a:ext cx="3322320" cy="1828800"/>
+            <a:off x="822960" y="2880360"/>
+            <a:ext cx="3322320" cy="1737360"/>
           </a:xfrm>
           <a:prstGeom prst="roundRect">
             <a:avLst/>
@@ -7545,7 +8884,7 @@
           <a:p>
             <a:pPr algn="ctr"/>
             <a:r>
-              <a:rPr sz="1800" b="1">
+              <a:rPr sz="1700" b="1">
                 <a:solidFill>
                   <a:srgbClr val="4E9EFF"/>
                 </a:solidFill>
@@ -7555,7 +8894,7 @@
           </a:p>
           <a:p>
             <a:r>
-              <a:rPr sz="1400">
+              <a:rPr sz="1350">
                 <a:solidFill>
                   <a:srgbClr val="9AA6B8"/>
                 </a:solidFill>
@@ -7567,14 +8906,14 @@
       </p:sp>
       <p:sp>
         <p:nvSpPr>
-          <p:cNvPr id="6" name="Rounded Rectangle 5"/>
+          <p:cNvPr id="8" name="Rounded Rectangle 7"/>
           <p:cNvSpPr/>
           <p:nvPr/>
         </p:nvSpPr>
         <p:spPr>
           <a:xfrm>
-            <a:off x="4419600" y="2286000"/>
-            <a:ext cx="3322320" cy="1828800"/>
+            <a:off x="4419600" y="2880360"/>
+            <a:ext cx="3322320" cy="1737360"/>
           </a:xfrm>
           <a:prstGeom prst="roundRect">
             <a:avLst/>
@@ -7606,7 +8945,7 @@
           <a:p>
             <a:pPr algn="ctr"/>
             <a:r>
-              <a:rPr sz="1800" b="1">
+              <a:rPr sz="1700" b="1">
                 <a:solidFill>
                   <a:srgbClr val="4E9EFF"/>
                 </a:solidFill>
@@ -7616,7 +8955,7 @@
           </a:p>
           <a:p>
             <a:r>
-              <a:rPr sz="1400">
+              <a:rPr sz="1350">
                 <a:solidFill>
                   <a:srgbClr val="9AA6B8"/>
                 </a:solidFill>
@@ -7628,14 +8967,14 @@
       </p:sp>
       <p:sp>
         <p:nvSpPr>
-          <p:cNvPr id="7" name="Rounded Rectangle 6"/>
+          <p:cNvPr id="9" name="Rounded Rectangle 8"/>
           <p:cNvSpPr/>
           <p:nvPr/>
         </p:nvSpPr>
         <p:spPr>
           <a:xfrm>
-            <a:off x="8016239" y="2286000"/>
-            <a:ext cx="3322320" cy="1828800"/>
+            <a:off x="8016239" y="2880360"/>
+            <a:ext cx="3322320" cy="1737360"/>
           </a:xfrm>
           <a:prstGeom prst="roundRect">
             <a:avLst/>
@@ -7667,7 +9006,7 @@
           <a:p>
             <a:pPr algn="ctr"/>
             <a:r>
-              <a:rPr sz="1800" b="1">
+              <a:rPr sz="1700" b="1">
                 <a:solidFill>
                   <a:srgbClr val="4E9EFF"/>
                 </a:solidFill>
@@ -7677,7 +9016,7 @@
           </a:p>
           <a:p>
             <a:r>
-              <a:rPr sz="1400">
+              <a:rPr sz="1350">
                 <a:solidFill>
                   <a:srgbClr val="9AA6B8"/>
                 </a:solidFill>
@@ -7689,14 +9028,14 @@
       </p:sp>
       <p:sp>
         <p:nvSpPr>
-          <p:cNvPr id="8" name="Rounded Rectangle 7"/>
+          <p:cNvPr id="10" name="Rounded Rectangle 9"/>
           <p:cNvSpPr/>
           <p:nvPr/>
         </p:nvSpPr>
         <p:spPr>
           <a:xfrm>
-            <a:off x="822960" y="4343400"/>
-            <a:ext cx="3322320" cy="1828800"/>
+            <a:off x="822960" y="4846320"/>
+            <a:ext cx="3322320" cy="1737360"/>
           </a:xfrm>
           <a:prstGeom prst="roundRect">
             <a:avLst/>
@@ -7728,78 +9067,17 @@
           <a:p>
             <a:pPr algn="ctr"/>
             <a:r>
-              <a:rPr sz="1800" b="1">
+              <a:rPr sz="1700" b="1">
                 <a:solidFill>
                   <a:srgbClr val="4E9EFF"/>
                 </a:solidFill>
               </a:rPr>
-              <a:t>Choosing</a:t>
-            </a:r>
-          </a:p>
-          <a:p>
-            <a:r>
-              <a:rPr sz="1400">
-                <a:solidFill>
-                  <a:srgbClr val="9AA6B8"/>
-                </a:solidFill>
-              </a:rPr>
-              <a:t>modes have no clear names</a:t>
-            </a:r>
-          </a:p>
-        </p:txBody>
-      </p:sp>
-      <p:sp>
-        <p:nvSpPr>
-          <p:cNvPr id="9" name="Rounded Rectangle 8"/>
-          <p:cNvSpPr/>
-          <p:nvPr/>
-        </p:nvSpPr>
-        <p:spPr>
-          <a:xfrm>
-            <a:off x="4419600" y="4343400"/>
-            <a:ext cx="3322320" cy="1828800"/>
-          </a:xfrm>
-          <a:prstGeom prst="roundRect">
-            <a:avLst/>
-          </a:prstGeom>
-          <a:solidFill>
-            <a:srgbClr val="1E2A3A"/>
-          </a:solidFill>
-          <a:ln>
-            <a:noFill/>
-          </a:ln>
-        </p:spPr>
-        <p:style>
-          <a:lnRef idx="1">
-            <a:schemeClr val="accent1"/>
-          </a:lnRef>
-          <a:fillRef idx="3">
-            <a:schemeClr val="accent1"/>
-          </a:fillRef>
-          <a:effectRef idx="2">
-            <a:schemeClr val="accent1"/>
-          </a:effectRef>
-          <a:fontRef idx="minor">
-            <a:schemeClr val="lt1"/>
-          </a:fontRef>
-        </p:style>
-        <p:txBody>
-          <a:bodyPr rtlCol="0" anchor="ctr" lIns="137160" rIns="137160" tIns="109728" wrap="square"/>
-          <a:lstStyle/>
-          <a:p>
-            <a:pPr algn="ctr"/>
-            <a:r>
-              <a:rPr sz="1800" b="1">
-                <a:solidFill>
-                  <a:srgbClr val="4E9EFF"/>
-                </a:solidFill>
-              </a:rPr>
               <a:t>Keyboard</a:t>
             </a:r>
           </a:p>
           <a:p>
             <a:r>
-              <a:rPr sz="1400">
+              <a:rPr sz="1350">
                 <a:solidFill>
                   <a:srgbClr val="9AA6B8"/>
                 </a:solidFill>
@@ -7837,7 +9115,7 @@
       <p:grpSpPr/>
       <p:sp>
         <p:nvSpPr>
-          <p:cNvPr id="2" name="Rectangle 1"/>
+          <p:cNvPr id="2" name="Rounded Rectangle 1"/>
           <p:cNvSpPr/>
           <p:nvPr/>
         </p:nvSpPr>
@@ -7846,7 +9124,7 @@
             <a:off x="0" y="0"/>
             <a:ext cx="12191695" cy="6858000"/>
           </a:xfrm>
-          <a:prstGeom prst="rect">
+          <a:prstGeom prst="roundRect">
             <a:avLst/>
           </a:prstGeom>
           <a:solidFill>
@@ -7880,20 +9158,20 @@
       </p:sp>
       <p:sp>
         <p:nvSpPr>
-          <p:cNvPr id="3" name="Rectangle 2"/>
+          <p:cNvPr id="3" name="Rounded Rectangle 2"/>
           <p:cNvSpPr/>
           <p:nvPr/>
         </p:nvSpPr>
         <p:spPr>
           <a:xfrm>
-            <a:off x="457200" y="658368"/>
-            <a:ext cx="146304" cy="914400"/>
-          </a:xfrm>
-          <a:prstGeom prst="rect">
+            <a:off x="822960" y="457200"/>
+            <a:ext cx="3291840" cy="384048"/>
+          </a:xfrm>
+          <a:prstGeom prst="roundRect">
             <a:avLst/>
           </a:prstGeom>
           <a:solidFill>
-            <a:srgbClr val="4E9EFF"/>
+            <a:srgbClr val="FFB74D"/>
           </a:solidFill>
           <a:ln>
             <a:noFill/>
@@ -7914,10 +9192,18 @@
           </a:fontRef>
         </p:style>
         <p:txBody>
-          <a:bodyPr rtlCol="0" anchor="ctr"/>
+          <a:bodyPr rtlCol="0" anchor="ctr" tIns="27432" lIns="109728"/>
           <a:lstStyle/>
           <a:p>
             <a:pPr algn="ctr"/>
+            <a:r>
+              <a:rPr sz="1300" b="1">
+                <a:solidFill>
+                  <a:srgbClr val="0F1420"/>
+                </a:solidFill>
+              </a:rPr>
+              <a:t>CONSUMERS -&gt; TEXT USER</a:t>
+            </a:r>
           </a:p>
         </p:txBody>
       </p:sp>
@@ -7929,8 +9215,8 @@
         </p:nvSpPr>
         <p:spPr>
           <a:xfrm>
-            <a:off x="822960" y="457200"/>
-            <a:ext cx="10515600" cy="1463040"/>
+            <a:off x="822960" y="1051560"/>
+            <a:ext cx="10789920" cy="914400"/>
           </a:xfrm>
           <a:prstGeom prst="rect">
             <a:avLst/>
@@ -7943,39 +9229,93 @@
           </a:bodyPr>
           <a:lstStyle/>
           <a:p>
-            <a:pPr algn="l"/>
-            <a:r>
-              <a:rPr sz="5400" b="1">
+            <a:r>
+              <a:rPr sz="4600" b="1">
                 <a:solidFill>
                   <a:srgbClr val="E8EDF4"/>
                 </a:solidFill>
               </a:rPr>
-              <a:t>Product Builder</a:t>
-            </a:r>
-          </a:p>
-          <a:p>
-            <a:pPr algn="l"/>
-            <a:r>
-              <a:rPr sz="2000">
+              <a:t>Text Users (CLI · TUI · IM)</a:t>
+            </a:r>
+          </a:p>
+        </p:txBody>
+      </p:sp>
+      <p:sp>
+        <p:nvSpPr>
+          <p:cNvPr id="5" name="TextBox 4"/>
+          <p:cNvSpPr txBox="1"/>
+          <p:nvPr/>
+        </p:nvSpPr>
+        <p:spPr>
+          <a:xfrm>
+            <a:off x="841248" y="1965960"/>
+            <a:ext cx="10789920" cy="411480"/>
+          </a:xfrm>
+          <a:prstGeom prst="rect">
+            <a:avLst/>
+          </a:prstGeom>
+          <a:noFill/>
+        </p:spPr>
+        <p:txBody>
+          <a:bodyPr wrap="square">
+            <a:spAutoFit/>
+          </a:bodyPr>
+          <a:lstStyle/>
+          <a:p>
+            <a:r>
+              <a:rPr sz="1800" b="0">
                 <a:solidFill>
                   <a:srgbClr val="9AA6B8"/>
                 </a:solidFill>
               </a:rPr>
-              <a:t>Builds their own product using jiuwenswarm as its backend.</a:t>
-            </a:r>
-          </a:p>
-        </p:txBody>
-      </p:sp>
-      <p:sp>
-        <p:nvSpPr>
-          <p:cNvPr id="5" name="Rounded Rectangle 4"/>
+              <a:t>Reach the agent through a text surface.</a:t>
+            </a:r>
+          </a:p>
+        </p:txBody>
+      </p:sp>
+      <p:sp>
+        <p:nvSpPr>
+          <p:cNvPr id="6" name="TextBox 5"/>
+          <p:cNvSpPr txBox="1"/>
+          <p:nvPr/>
+        </p:nvSpPr>
+        <p:spPr>
+          <a:xfrm>
+            <a:off x="841248" y="2377440"/>
+            <a:ext cx="10789920" cy="365760"/>
+          </a:xfrm>
+          <a:prstGeom prst="rect">
+            <a:avLst/>
+          </a:prstGeom>
+          <a:noFill/>
+        </p:spPr>
+        <p:txBody>
+          <a:bodyPr wrap="square">
+            <a:spAutoFit/>
+          </a:bodyPr>
+          <a:lstStyle/>
+          <a:p>
+            <a:r>
+              <a:rPr sz="1500" b="0">
+                <a:solidFill>
+                  <a:srgbClr val="FFB74D"/>
+                </a:solidFill>
+              </a:rPr>
+              <a:t>Built on: a Consumer -&gt; Text User</a:t>
+            </a:r>
+          </a:p>
+        </p:txBody>
+      </p:sp>
+      <p:sp>
+        <p:nvSpPr>
+          <p:cNvPr id="7" name="Rounded Rectangle 6"/>
           <p:cNvSpPr/>
           <p:nvPr/>
         </p:nvSpPr>
         <p:spPr>
           <a:xfrm>
-            <a:off x="822960" y="2286000"/>
-            <a:ext cx="3322320" cy="3657600"/>
+            <a:off x="822960" y="2880360"/>
+            <a:ext cx="3322320" cy="3474720"/>
           </a:xfrm>
           <a:prstGeom prst="roundRect">
             <a:avLst/>
@@ -8007,36 +9347,36 @@
           <a:p>
             <a:pPr algn="ctr"/>
             <a:r>
-              <a:rPr sz="1800" b="1">
-                <a:solidFill>
-                  <a:srgbClr val="4E9EFF"/>
-                </a:solidFill>
-              </a:rPr>
-              <a:t>Connection &amp; Security</a:t>
-            </a:r>
-          </a:p>
-          <a:p>
-            <a:r>
-              <a:rPr sz="1400">
+              <a:rPr sz="1700" b="1">
+                <a:solidFill>
+                  <a:srgbClr val="E07B7B"/>
+                </a:solidFill>
+              </a:rPr>
+              <a:t>CLI  (TBD)</a:t>
+            </a:r>
+          </a:p>
+          <a:p>
+            <a:r>
+              <a:rPr sz="1350">
                 <a:solidFill>
                   <a:srgbClr val="9AA6B8"/>
                 </a:solidFill>
               </a:rPr>
-              <a:t>no API auth; weak origin checks</a:t>
-            </a:r>
-          </a:p>
-        </p:txBody>
-      </p:sp>
-      <p:sp>
-        <p:nvSpPr>
-          <p:cNvPr id="6" name="Rounded Rectangle 5"/>
+              <a:t>TBD - not built yet</a:t>
+            </a:r>
+          </a:p>
+        </p:txBody>
+      </p:sp>
+      <p:sp>
+        <p:nvSpPr>
+          <p:cNvPr id="8" name="Rounded Rectangle 7"/>
           <p:cNvSpPr/>
           <p:nvPr/>
         </p:nvSpPr>
         <p:spPr>
           <a:xfrm>
-            <a:off x="4419600" y="2286000"/>
-            <a:ext cx="3322320" cy="3657600"/>
+            <a:off x="4419600" y="2880360"/>
+            <a:ext cx="3322320" cy="3474720"/>
           </a:xfrm>
           <a:prstGeom prst="roundRect">
             <a:avLst/>
@@ -8068,36 +9408,36 @@
           <a:p>
             <a:pPr algn="ctr"/>
             <a:r>
-              <a:rPr sz="1800" b="1">
-                <a:solidFill>
-                  <a:srgbClr val="4E9EFF"/>
-                </a:solidFill>
-              </a:rPr>
-              <a:t>Transport &amp; Protocol</a:t>
-            </a:r>
-          </a:p>
-          <a:p>
-            <a:r>
-              <a:rPr sz="1400">
+              <a:rPr sz="1700" b="1">
+                <a:solidFill>
+                  <a:srgbClr val="E07B7B"/>
+                </a:solidFill>
+              </a:rPr>
+              <a:t>TUI  (TBD)</a:t>
+            </a:r>
+          </a:p>
+          <a:p>
+            <a:r>
+              <a:rPr sz="1350">
                 <a:solidFill>
                   <a:srgbClr val="9AA6B8"/>
                 </a:solidFill>
               </a:rPr>
-              <a:t>WebSocket-only; prose spec, no SDK</a:t>
-            </a:r>
-          </a:p>
-        </p:txBody>
-      </p:sp>
-      <p:sp>
-        <p:nvSpPr>
-          <p:cNvPr id="7" name="Rounded Rectangle 6"/>
+              <a:t>TBD - not built yet</a:t>
+            </a:r>
+          </a:p>
+        </p:txBody>
+      </p:sp>
+      <p:sp>
+        <p:nvSpPr>
+          <p:cNvPr id="9" name="Rounded Rectangle 8"/>
           <p:cNvSpPr/>
           <p:nvPr/>
         </p:nvSpPr>
         <p:spPr>
           <a:xfrm>
-            <a:off x="8016239" y="2286000"/>
-            <a:ext cx="3322320" cy="3657600"/>
+            <a:off x="8016239" y="2880360"/>
+            <a:ext cx="3322320" cy="3474720"/>
           </a:xfrm>
           <a:prstGeom prst="roundRect">
             <a:avLst/>
@@ -8129,22 +9469,22 @@
           <a:p>
             <a:pPr algn="ctr"/>
             <a:r>
-              <a:rPr sz="1800" b="1">
-                <a:solidFill>
-                  <a:srgbClr val="4E9EFF"/>
-                </a:solidFill>
-              </a:rPr>
-              <a:t>Integration &amp; Tooling</a:t>
-            </a:r>
-          </a:p>
-          <a:p>
-            <a:r>
-              <a:rPr sz="1400">
+              <a:rPr sz="1700" b="1">
+                <a:solidFill>
+                  <a:srgbClr val="E07B7B"/>
+                </a:solidFill>
+              </a:rPr>
+              <a:t>IM  (TBD)</a:t>
+            </a:r>
+          </a:p>
+          <a:p>
+            <a:r>
+              <a:rPr sz="1350">
                 <a:solidFill>
                   <a:srgbClr val="9AA6B8"/>
                 </a:solidFill>
               </a:rPr>
-              <a:t>no dev stubs; only shell hooks</a:t>
+              <a:t>TBD - not built yet</a:t>
             </a:r>
           </a:p>
         </p:txBody>

--- a/docs-michael/usability/slides/personas-deck.pptx
+++ b/docs-michael/usability/slides/personas-deck.pptx
@@ -5775,7 +5775,7 @@
                   <a:srgbClr val="4E9EFF"/>
                 </a:solidFill>
               </a:rPr>
-              <a:t>Versioning</a:t>
+              <a:t>Packaging &amp; Distribution</a:t>
             </a:r>
           </a:p>
           <a:p>
@@ -6729,7 +6729,7 @@
                   <a:srgbClr val="4E9EFF"/>
                 </a:solidFill>
               </a:rPr>
-              <a:t>Retention</a:t>
+              <a:t>Data Retention</a:t>
             </a:r>
           </a:p>
           <a:p>
@@ -6801,6 +6801,67 @@
                 </a:solidFill>
               </a:rPr>
               <a:t>subsystem failures go unnoticed</a:t>
+            </a:r>
+          </a:p>
+        </p:txBody>
+      </p:sp>
+      <p:sp>
+        <p:nvSpPr>
+          <p:cNvPr id="11" name="Rounded Rectangle 10"/>
+          <p:cNvSpPr/>
+          <p:nvPr/>
+        </p:nvSpPr>
+        <p:spPr>
+          <a:xfrm>
+            <a:off x="8016239" y="4846320"/>
+            <a:ext cx="3322320" cy="1737360"/>
+          </a:xfrm>
+          <a:prstGeom prst="roundRect">
+            <a:avLst/>
+          </a:prstGeom>
+          <a:solidFill>
+            <a:srgbClr val="1E2A3A"/>
+          </a:solidFill>
+          <a:ln>
+            <a:noFill/>
+          </a:ln>
+        </p:spPr>
+        <p:style>
+          <a:lnRef idx="1">
+            <a:schemeClr val="accent1"/>
+          </a:lnRef>
+          <a:fillRef idx="3">
+            <a:schemeClr val="accent1"/>
+          </a:fillRef>
+          <a:effectRef idx="2">
+            <a:schemeClr val="accent1"/>
+          </a:effectRef>
+          <a:fontRef idx="minor">
+            <a:schemeClr val="lt1"/>
+          </a:fontRef>
+        </p:style>
+        <p:txBody>
+          <a:bodyPr rtlCol="0" anchor="ctr" lIns="137160" rIns="137160" tIns="109728" wrap="square"/>
+          <a:lstStyle/>
+          <a:p>
+            <a:pPr algn="ctr"/>
+            <a:r>
+              <a:rPr sz="1700" b="1">
+                <a:solidFill>
+                  <a:srgbClr val="4E9EFF"/>
+                </a:solidFill>
+              </a:rPr>
+              <a:t>First Run</a:t>
+            </a:r>
+          </a:p>
+          <a:p>
+            <a:r>
+              <a:rPr sz="1350">
+                <a:solidFill>
+                  <a:srgbClr val="9AA6B8"/>
+                </a:solidFill>
+              </a:rPr>
+              <a:t>wizard exits before the model is confirmed working</a:t>
             </a:r>
           </a:p>
         </p:txBody>
@@ -7963,7 +8024,7 @@
                   <a:srgbClr val="4E9EFF"/>
                 </a:solidFill>
               </a:rPr>
-              <a:t>Choosing</a:t>
+              <a:t>Discovery &amp; Onboarding</a:t>
             </a:r>
           </a:p>
           <a:p>
@@ -7973,7 +8034,7 @@
                   <a:srgbClr val="9AA6B8"/>
                 </a:solidFill>
               </a:rPr>
-              <a:t>mode names are unclear</a:t>
+              <a:t>empty start; powerful features hidden; mode names are unclear</a:t>
             </a:r>
           </a:p>
         </p:txBody>
@@ -8096,67 +8157,6 @@
                 </a:solidFill>
               </a:rPr>
               <a:t>settings by module; skills/connectors split</a:t>
-            </a:r>
-          </a:p>
-        </p:txBody>
-      </p:sp>
-      <p:sp>
-        <p:nvSpPr>
-          <p:cNvPr id="10" name="Rounded Rectangle 9"/>
-          <p:cNvSpPr/>
-          <p:nvPr/>
-        </p:nvSpPr>
-        <p:spPr>
-          <a:xfrm>
-            <a:off x="822960" y="4846320"/>
-            <a:ext cx="3322320" cy="1737360"/>
-          </a:xfrm>
-          <a:prstGeom prst="roundRect">
-            <a:avLst/>
-          </a:prstGeom>
-          <a:solidFill>
-            <a:srgbClr val="1E2A3A"/>
-          </a:solidFill>
-          <a:ln>
-            <a:noFill/>
-          </a:ln>
-        </p:spPr>
-        <p:style>
-          <a:lnRef idx="1">
-            <a:schemeClr val="accent1"/>
-          </a:lnRef>
-          <a:fillRef idx="3">
-            <a:schemeClr val="accent1"/>
-          </a:fillRef>
-          <a:effectRef idx="2">
-            <a:schemeClr val="accent1"/>
-          </a:effectRef>
-          <a:fontRef idx="minor">
-            <a:schemeClr val="lt1"/>
-          </a:fontRef>
-        </p:style>
-        <p:txBody>
-          <a:bodyPr rtlCol="0" anchor="ctr" lIns="137160" rIns="137160" tIns="109728" wrap="square"/>
-          <a:lstStyle/>
-          <a:p>
-            <a:pPr algn="ctr"/>
-            <a:r>
-              <a:rPr sz="1700" b="1">
-                <a:solidFill>
-                  <a:srgbClr val="4E9EFF"/>
-                </a:solidFill>
-              </a:rPr>
-              <a:t>Discovery</a:t>
-            </a:r>
-          </a:p>
-          <a:p>
-            <a:r>
-              <a:rPr sz="1350">
-                <a:solidFill>
-                  <a:srgbClr val="9AA6B8"/>
-                </a:solidFill>
-              </a:rPr>
-              <a:t>empty start; powerful features hidden</a:t>
             </a:r>
           </a:p>
         </p:txBody>
@@ -8548,7 +8548,7 @@
                   <a:srgbClr val="4E9EFF"/>
                 </a:solidFill>
               </a:rPr>
-              <a:t>Reply</a:t>
+              <a:t>Reply &amp; Formatting</a:t>
             </a:r>
           </a:p>
           <a:p>
@@ -8609,7 +8609,7 @@
                   <a:srgbClr val="4E9EFF"/>
                 </a:solidFill>
               </a:rPr>
-              <a:t>Sharing</a:t>
+              <a:t>Sharing &amp; Export</a:t>
             </a:r>
           </a:p>
           <a:p>

--- a/docs-michael/usability/slides/personas-deck.pptx
+++ b/docs-michael/usability/slides/personas-deck.pptx
@@ -4569,6 +4569,17 @@
             </a:r>
           </a:p>
           <a:p>
+            <a:pPr algn="ctr"/>
+            <a:r>
+              <a:rPr sz="1600" i="1" dirty="0">
+                <a:solidFill>
+                  <a:srgbClr val="FFB74D"/>
+                </a:solidFill>
+              </a:rPr>
+              <a:t>B2C</a:t>
+            </a:r>
+          </a:p>
+          <a:p>
             <a:r>
               <a:rPr sz="1600">
                 <a:solidFill>
@@ -4687,6 +4698,17 @@
                 </a:solidFill>
               </a:rPr>
               <a:t>Builders</a:t>
+            </a:r>
+          </a:p>
+          <a:p>
+            <a:pPr algn="ctr"/>
+            <a:r>
+              <a:rPr sz="1600" i="1" dirty="0">
+                <a:solidFill>
+                  <a:srgbClr val="F46D9B"/>
+                </a:solidFill>
+              </a:rPr>
+              <a:t>B2B2C</a:t>
             </a:r>
           </a:p>
           <a:p>

--- a/docs-michael/usability/slides/personas-deck.pptx
+++ b/docs-michael/usability/slides/personas-deck.pptx
@@ -4423,7 +4423,7 @@
           </a:fontRef>
         </p:style>
         <p:txBody>
-          <a:bodyPr rtlCol="0" anchor="ctr" tIns="164592" lIns="137160"/>
+          <a:bodyPr rtlCol="0" anchor="t" tIns="164592" lIns="137160"/>
           <a:lstStyle/>
           <a:p>
             <a:pPr algn="ctr"/>
@@ -4484,7 +4484,7 @@
           </a:fontRef>
         </p:style>
         <p:txBody>
-          <a:bodyPr rtlCol="0" anchor="ctr" tIns="164592" lIns="137160"/>
+          <a:bodyPr rtlCol="0" anchor="t" tIns="164592" lIns="137160"/>
           <a:lstStyle/>
           <a:p>
             <a:pPr algn="ctr"/>
@@ -4555,7 +4555,7 @@
           </a:fontRef>
         </p:style>
         <p:txBody>
-          <a:bodyPr rtlCol="0" anchor="ctr" tIns="164592" lIns="137160"/>
+          <a:bodyPr rtlCol="0" anchor="t" tIns="164592" lIns="137160"/>
           <a:lstStyle/>
           <a:p>
             <a:pPr algn="ctr"/>
@@ -4687,7 +4687,7 @@
           </a:fontRef>
         </p:style>
         <p:txBody>
-          <a:bodyPr rtlCol="0" anchor="ctr" tIns="164592" lIns="137160"/>
+          <a:bodyPr rtlCol="0" anchor="t" tIns="164592" lIns="137160"/>
           <a:lstStyle/>
           <a:p>
             <a:pPr algn="ctr"/>
@@ -7344,7 +7344,7 @@
                   <a:srgbClr val="E8EDF4"/>
                 </a:solidFill>
               </a:rPr>
-              <a:t>Consumer</a:t>
+              <a:t>Consumer — Base</a:t>
             </a:r>
           </a:p>
         </p:txBody>
@@ -7377,7 +7377,7 @@
                   <a:srgbClr val="9AA6B8"/>
                 </a:solidFill>
               </a:rPr>
-              <a:t>Uses the agent directly - the base everyone builds on.</a:t>
+              <a:t>These findings apply to every consumer regardless of surface. Web, Text, and Channel personas all inherit from here.</a:t>
             </a:r>
           </a:p>
         </p:txBody>

--- a/docs-michael/usability/slides/personas-deck.pptx
+++ b/docs-michael/usability/slides/personas-deck.pptx
@@ -4,21 +4,25 @@
   <p:sldMasterIdLst>
     <p:sldMasterId id="2147483648" r:id="rId1"/>
   </p:sldMasterIdLst>
+  <p:notesMasterIdLst>
+    <p:notesMasterId r:id="rId15"/>
+  </p:notesMasterIdLst>
   <p:sldIdLst>
-    <p:sldId id="256" r:id="rId7"/>
-    <p:sldId id="257" r:id="rId8"/>
-    <p:sldId id="258" r:id="rId10"/>
-    <p:sldId id="259" r:id="rId11"/>
-    <p:sldId id="260" r:id="rId12"/>
-    <p:sldId id="261" r:id="rId13"/>
-    <p:sldId id="262" r:id="rId14"/>
-    <p:sldId id="263" r:id="rId15"/>
-    <p:sldId id="264" r:id="rId16"/>
-    <p:sldId id="265" r:id="rId17"/>
-    <p:sldId id="266" r:id="rId18"/>
-    <p:sldId id="267" r:id="rId19"/>
+    <p:sldId id="256" r:id="rId2"/>
+    <p:sldId id="257" r:id="rId3"/>
+    <p:sldId id="258" r:id="rId4"/>
+    <p:sldId id="259" r:id="rId5"/>
+    <p:sldId id="260" r:id="rId6"/>
+    <p:sldId id="261" r:id="rId7"/>
+    <p:sldId id="262" r:id="rId8"/>
+    <p:sldId id="263" r:id="rId9"/>
+    <p:sldId id="264" r:id="rId10"/>
+    <p:sldId id="265" r:id="rId11"/>
+    <p:sldId id="267" r:id="rId12"/>
+    <p:sldId id="268" r:id="rId13"/>
+    <p:sldId id="266" r:id="rId14"/>
   </p:sldIdLst>
-  <p:sldSz cx="12191695" cy="6858000" type="screen4x3"/>
+  <p:sldSz cx="12192000" cy="6858000"/>
   <p:notesSz cx="6858000" cy="9144000"/>
   <p:defaultTextStyle>
     <a:defPPr>
@@ -115,11 +119,27 @@
       </a:defRPr>
     </a:lvl9pPr>
   </p:defaultTextStyle>
+  <p:extLst>
+    <p:ext uri="{EFAFB233-063F-42B5-8137-9DF3F51BA10A}">
+      <p15:sldGuideLst xmlns:p15="http://schemas.microsoft.com/office/powerpoint/2012/main">
+        <p15:guide id="1" orient="horz" pos="2160">
+          <p15:clr>
+            <a:srgbClr val="A4A3A4"/>
+          </p15:clr>
+        </p15:guide>
+        <p15:guide id="2" pos="2880">
+          <p15:clr>
+            <a:srgbClr val="A4A3A4"/>
+          </p15:clr>
+        </p15:guide>
+      </p15:sldGuideLst>
+    </p:ext>
+  </p:extLst>
 </p:presentation>
 </file>
 
 <file path=ppt/notesMasters/notesMaster1.xml><?xml version="1.0" encoding="utf-8"?>
-<p:notesMaster xmlns:a="http://schemas.openxmlformats.org/drawingml/2006/main" xmlns:p="http://schemas.openxmlformats.org/presentationml/2006/main" xmlns:r="http://schemas.openxmlformats.org/officeDocument/2006/relationships">
+<p:notesMaster xmlns:a="http://schemas.openxmlformats.org/drawingml/2006/main" xmlns:r="http://schemas.openxmlformats.org/officeDocument/2006/relationships" xmlns:p="http://schemas.openxmlformats.org/presentationml/2006/main">
   <p:cSld>
     <p:bg>
       <p:bgRef idx="1001">
@@ -153,7 +173,7 @@
         <p:spPr>
           <a:xfrm>
             <a:off x="0" y="0"/>
-            <a:ext cx="2971800" cy="457200"/>
+            <a:ext cx="2971800" cy="458788"/>
           </a:xfrm>
           <a:prstGeom prst="rect">
             <a:avLst/>
@@ -167,7 +187,7 @@
             </a:lvl1pPr>
           </a:lstStyle>
           <a:p>
-            <a:endParaRPr lang="en-US"/>
+            <a:endParaRPr lang="en-IL"/>
           </a:p>
         </p:txBody>
       </p:sp>
@@ -184,7 +204,7 @@
         <p:spPr>
           <a:xfrm>
             <a:off x="3884613" y="0"/>
-            <a:ext cx="2971800" cy="457200"/>
+            <a:ext cx="2971800" cy="458788"/>
           </a:xfrm>
           <a:prstGeom prst="rect">
             <a:avLst/>
@@ -198,11 +218,11 @@
             </a:lvl1pPr>
           </a:lstStyle>
           <a:p>
-            <a:fld id="{0F89C1C7-3DCD-1040-A9CF-14679D8B5DDD}" type="datetimeFigureOut">
-              <a:rPr lang="en-US" smtClean="0"/>
-              <a:t>10/17/16</a:t>
+            <a:fld id="{54797859-CBE5-A345-A4D0-6AECFDEC885F}" type="datetimeFigureOut">
+              <a:rPr lang="en-IL" smtClean="0"/>
+              <a:t>09/09/2026</a:t>
             </a:fld>
-            <a:endParaRPr lang="en-US"/>
+            <a:endParaRPr lang="en-IL"/>
           </a:p>
         </p:txBody>
       </p:sp>
@@ -218,8 +238,8 @@
         </p:nvSpPr>
         <p:spPr>
           <a:xfrm>
-            <a:off x="1143000" y="685800"/>
-            <a:ext cx="4572000" cy="3429000"/>
+            <a:off x="685800" y="1143000"/>
+            <a:ext cx="5486400" cy="3086100"/>
           </a:xfrm>
           <a:prstGeom prst="rect">
             <a:avLst/>
@@ -235,7 +255,7 @@
           <a:bodyPr vert="horz" lIns="91440" tIns="45720" rIns="91440" bIns="45720" rtlCol="0" anchor="ctr"/>
           <a:lstStyle/>
           <a:p>
-            <a:endParaRPr lang="en-US"/>
+            <a:endParaRPr lang="en-IL"/>
           </a:p>
         </p:txBody>
       </p:sp>
@@ -251,8 +271,8 @@
         </p:nvSpPr>
         <p:spPr>
           <a:xfrm>
-            <a:off x="685800" y="4343400"/>
-            <a:ext cx="5486400" cy="4114800"/>
+            <a:off x="685800" y="4400550"/>
+            <a:ext cx="5486400" cy="3600450"/>
           </a:xfrm>
           <a:prstGeom prst="rect">
             <a:avLst/>
@@ -264,38 +284,38 @@
           <a:p>
             <a:pPr lvl="0"/>
             <a:r>
-              <a:rPr lang="en-US" smtClean="0"/>
+              <a:rPr lang="en-US"/>
               <a:t>Click to edit Master text styles</a:t>
             </a:r>
           </a:p>
           <a:p>
             <a:pPr lvl="1"/>
             <a:r>
-              <a:rPr lang="en-US" smtClean="0"/>
+              <a:rPr lang="en-US"/>
               <a:t>Second level</a:t>
             </a:r>
           </a:p>
           <a:p>
             <a:pPr lvl="2"/>
             <a:r>
-              <a:rPr lang="en-US" smtClean="0"/>
+              <a:rPr lang="en-US"/>
               <a:t>Third level</a:t>
             </a:r>
           </a:p>
           <a:p>
             <a:pPr lvl="3"/>
             <a:r>
-              <a:rPr lang="en-US" smtClean="0"/>
+              <a:rPr lang="en-US"/>
               <a:t>Fourth level</a:t>
             </a:r>
           </a:p>
           <a:p>
             <a:pPr lvl="4"/>
             <a:r>
-              <a:rPr lang="en-US" smtClean="0"/>
+              <a:rPr lang="en-US"/>
               <a:t>Fifth level</a:t>
             </a:r>
-            <a:endParaRPr lang="en-US"/>
+            <a:endParaRPr lang="en-IL"/>
           </a:p>
         </p:txBody>
       </p:sp>
@@ -312,7 +332,7 @@
         <p:spPr>
           <a:xfrm>
             <a:off x="0" y="8685213"/>
-            <a:ext cx="2971800" cy="457200"/>
+            <a:ext cx="2971800" cy="458787"/>
           </a:xfrm>
           <a:prstGeom prst="rect">
             <a:avLst/>
@@ -326,7 +346,7 @@
             </a:lvl1pPr>
           </a:lstStyle>
           <a:p>
-            <a:endParaRPr lang="en-US"/>
+            <a:endParaRPr lang="en-IL"/>
           </a:p>
         </p:txBody>
       </p:sp>
@@ -343,7 +363,7 @@
         <p:spPr>
           <a:xfrm>
             <a:off x="3884613" y="8685213"/>
-            <a:ext cx="2971800" cy="457200"/>
+            <a:ext cx="2971800" cy="458787"/>
           </a:xfrm>
           <a:prstGeom prst="rect">
             <a:avLst/>
@@ -357,24 +377,24 @@
             </a:lvl1pPr>
           </a:lstStyle>
           <a:p>
-            <a:fld id="{BB5E49A5-4136-284D-997B-48E1D791AD67}" type="slidenum">
-              <a:rPr lang="en-US" smtClean="0"/>
+            <a:fld id="{77EC4B32-A2B8-6C42-B9A5-F75DF8C2B84F}" type="slidenum">
+              <a:rPr lang="en-IL" smtClean="0"/>
               <a:t>‹#›</a:t>
             </a:fld>
-            <a:endParaRPr lang="en-US"/>
+            <a:endParaRPr lang="en-IL"/>
           </a:p>
         </p:txBody>
       </p:sp>
     </p:spTree>
     <p:extLst>
       <p:ext uri="{BB962C8B-B14F-4D97-AF65-F5344CB8AC3E}">
-        <p14:creationId xmlns:p14="http://schemas.microsoft.com/office/powerpoint/2010/main" val="2623252185"/>
+        <p14:creationId xmlns:p14="http://schemas.microsoft.com/office/powerpoint/2010/main" val="191875142"/>
       </p:ext>
     </p:extLst>
   </p:cSld>
   <p:clrMap bg1="lt1" tx1="dk1" bg2="lt2" tx2="dk2" accent1="accent1" accent2="accent2" accent3="accent3" accent4="accent4" accent5="accent5" accent6="accent6" hlink="hlink" folHlink="folHlink"/>
   <p:notesStyle>
-    <a:lvl1pPr marL="0" algn="l" defTabSz="457200" rtl="0" eaLnBrk="1" latinLnBrk="0" hangingPunct="1">
+    <a:lvl1pPr marL="0" algn="l" defTabSz="914400" rtl="0" eaLnBrk="1" latinLnBrk="0" hangingPunct="1">
       <a:defRPr sz="1200" kern="1200">
         <a:solidFill>
           <a:schemeClr val="tx1"/>
@@ -384,7 +404,7 @@
         <a:cs typeface="+mn-cs"/>
       </a:defRPr>
     </a:lvl1pPr>
-    <a:lvl2pPr marL="457200" algn="l" defTabSz="457200" rtl="0" eaLnBrk="1" latinLnBrk="0" hangingPunct="1">
+    <a:lvl2pPr marL="457200" algn="l" defTabSz="914400" rtl="0" eaLnBrk="1" latinLnBrk="0" hangingPunct="1">
       <a:defRPr sz="1200" kern="1200">
         <a:solidFill>
           <a:schemeClr val="tx1"/>
@@ -394,7 +414,7 @@
         <a:cs typeface="+mn-cs"/>
       </a:defRPr>
     </a:lvl2pPr>
-    <a:lvl3pPr marL="914400" algn="l" defTabSz="457200" rtl="0" eaLnBrk="1" latinLnBrk="0" hangingPunct="1">
+    <a:lvl3pPr marL="914400" algn="l" defTabSz="914400" rtl="0" eaLnBrk="1" latinLnBrk="0" hangingPunct="1">
       <a:defRPr sz="1200" kern="1200">
         <a:solidFill>
           <a:schemeClr val="tx1"/>
@@ -404,7 +424,7 @@
         <a:cs typeface="+mn-cs"/>
       </a:defRPr>
     </a:lvl3pPr>
-    <a:lvl4pPr marL="1371600" algn="l" defTabSz="457200" rtl="0" eaLnBrk="1" latinLnBrk="0" hangingPunct="1">
+    <a:lvl4pPr marL="1371600" algn="l" defTabSz="914400" rtl="0" eaLnBrk="1" latinLnBrk="0" hangingPunct="1">
       <a:defRPr sz="1200" kern="1200">
         <a:solidFill>
           <a:schemeClr val="tx1"/>
@@ -414,7 +434,7 @@
         <a:cs typeface="+mn-cs"/>
       </a:defRPr>
     </a:lvl4pPr>
-    <a:lvl5pPr marL="1828800" algn="l" defTabSz="457200" rtl="0" eaLnBrk="1" latinLnBrk="0" hangingPunct="1">
+    <a:lvl5pPr marL="1828800" algn="l" defTabSz="914400" rtl="0" eaLnBrk="1" latinLnBrk="0" hangingPunct="1">
       <a:defRPr sz="1200" kern="1200">
         <a:solidFill>
           <a:schemeClr val="tx1"/>
@@ -424,7 +444,7 @@
         <a:cs typeface="+mn-cs"/>
       </a:defRPr>
     </a:lvl5pPr>
-    <a:lvl6pPr marL="2286000" algn="l" defTabSz="457200" rtl="0" eaLnBrk="1" latinLnBrk="0" hangingPunct="1">
+    <a:lvl6pPr marL="2286000" algn="l" defTabSz="914400" rtl="0" eaLnBrk="1" latinLnBrk="0" hangingPunct="1">
       <a:defRPr sz="1200" kern="1200">
         <a:solidFill>
           <a:schemeClr val="tx1"/>
@@ -434,7 +454,7 @@
         <a:cs typeface="+mn-cs"/>
       </a:defRPr>
     </a:lvl6pPr>
-    <a:lvl7pPr marL="2743200" algn="l" defTabSz="457200" rtl="0" eaLnBrk="1" latinLnBrk="0" hangingPunct="1">
+    <a:lvl7pPr marL="2743200" algn="l" defTabSz="914400" rtl="0" eaLnBrk="1" latinLnBrk="0" hangingPunct="1">
       <a:defRPr sz="1200" kern="1200">
         <a:solidFill>
           <a:schemeClr val="tx1"/>
@@ -444,7 +464,7 @@
         <a:cs typeface="+mn-cs"/>
       </a:defRPr>
     </a:lvl7pPr>
-    <a:lvl8pPr marL="3200400" algn="l" defTabSz="457200" rtl="0" eaLnBrk="1" latinLnBrk="0" hangingPunct="1">
+    <a:lvl8pPr marL="3200400" algn="l" defTabSz="914400" rtl="0" eaLnBrk="1" latinLnBrk="0" hangingPunct="1">
       <a:defRPr sz="1200" kern="1200">
         <a:solidFill>
           <a:schemeClr val="tx1"/>
@@ -454,7 +474,7 @@
         <a:cs typeface="+mn-cs"/>
       </a:defRPr>
     </a:lvl8pPr>
-    <a:lvl9pPr marL="3657600" algn="l" defTabSz="457200" rtl="0" eaLnBrk="1" latinLnBrk="0" hangingPunct="1">
+    <a:lvl9pPr marL="3657600" algn="l" defTabSz="914400" rtl="0" eaLnBrk="1" latinLnBrk="0" hangingPunct="1">
       <a:defRPr sz="1200" kern="1200">
         <a:solidFill>
           <a:schemeClr val="tx1"/>
@@ -469,7 +489,7 @@
 </file>
 
 <file path=ppt/notesSlides/notesSlide1.xml><?xml version="1.0" encoding="utf-8"?>
-<p:notes xmlns:a="http://schemas.openxmlformats.org/drawingml/2006/main" xmlns:p="http://schemas.openxmlformats.org/presentationml/2006/main" xmlns:r="http://schemas.openxmlformats.org/officeDocument/2006/relationships">
+<p:notes xmlns:a="http://schemas.openxmlformats.org/drawingml/2006/main" xmlns:r="http://schemas.openxmlformats.org/officeDocument/2006/relationships" xmlns:p="http://schemas.openxmlformats.org/presentationml/2006/main">
   <p:cSld>
     <p:spTree>
       <p:nvGrpSpPr>
@@ -489,7 +509,7 @@
         <p:nvSpPr>
           <p:cNvPr id="2" name="Slide Image Placeholder 1"/>
           <p:cNvSpPr>
-            <a:spLocks noGrp="1"/>
+            <a:spLocks noGrp="1" noRot="1" noChangeAspect="1"/>
           </p:cNvSpPr>
           <p:nvPr>
             <p:ph type="sldImg" idx="2"/>
@@ -504,7 +524,7 @@
             <a:spLocks noGrp="1"/>
           </p:cNvSpPr>
           <p:nvPr>
-            <p:ph type="body" idx="3" sz="quarter"/>
+            <p:ph type="body" sz="quarter" idx="3"/>
           </p:nvPr>
         </p:nvSpPr>
         <p:spPr/>
@@ -525,7 +545,7 @@
             <a:spLocks noGrp="1"/>
           </p:cNvSpPr>
           <p:nvPr>
-            <p:ph type="sldNum" idx="5" sz="quarter"/>
+            <p:ph type="sldNum" sz="quarter" idx="5"/>
           </p:nvPr>
         </p:nvSpPr>
         <p:spPr/>
@@ -539,7 +559,7 @@
 </file>
 
 <file path=ppt/notesSlides/notesSlide10.xml><?xml version="1.0" encoding="utf-8"?>
-<p:notes xmlns:a="http://schemas.openxmlformats.org/drawingml/2006/main" xmlns:p="http://schemas.openxmlformats.org/presentationml/2006/main" xmlns:r="http://schemas.openxmlformats.org/officeDocument/2006/relationships">
+<p:notes xmlns:a="http://schemas.openxmlformats.org/drawingml/2006/main" xmlns:r="http://schemas.openxmlformats.org/officeDocument/2006/relationships" xmlns:p="http://schemas.openxmlformats.org/presentationml/2006/main">
   <p:cSld>
     <p:spTree>
       <p:nvGrpSpPr>
@@ -559,7 +579,7 @@
         <p:nvSpPr>
           <p:cNvPr id="2" name="Slide Image Placeholder 1"/>
           <p:cNvSpPr>
-            <a:spLocks noGrp="1"/>
+            <a:spLocks noGrp="1" noRot="1" noChangeAspect="1"/>
           </p:cNvSpPr>
           <p:nvPr>
             <p:ph type="sldImg" idx="2"/>
@@ -574,7 +594,7 @@
             <a:spLocks noGrp="1"/>
           </p:cNvSpPr>
           <p:nvPr>
-            <p:ph type="body" idx="3" sz="quarter"/>
+            <p:ph type="body" sz="quarter" idx="3"/>
           </p:nvPr>
         </p:nvSpPr>
         <p:spPr/>
@@ -583,7 +603,7 @@
           <a:lstStyle/>
           <a:p>
             <a:r>
-              <a:t>Builds their own product using jiuwenswarm as its backend.</a:t>
+              <a:t>Writes, packages, and distributes skills.</a:t>
             </a:r>
           </a:p>
         </p:txBody>
@@ -595,7 +615,7 @@
             <a:spLocks noGrp="1"/>
           </p:cNvSpPr>
           <p:nvPr>
-            <p:ph type="sldNum" idx="5" sz="quarter"/>
+            <p:ph type="sldNum" sz="quarter" idx="5"/>
           </p:nvPr>
         </p:nvSpPr>
         <p:spPr/>
@@ -609,7 +629,7 @@
 </file>
 
 <file path=ppt/notesSlides/notesSlide11.xml><?xml version="1.0" encoding="utf-8"?>
-<p:notes xmlns:a="http://schemas.openxmlformats.org/drawingml/2006/main" xmlns:p="http://schemas.openxmlformats.org/presentationml/2006/main" xmlns:r="http://schemas.openxmlformats.org/officeDocument/2006/relationships">
+<p:notes xmlns:a="http://schemas.openxmlformats.org/drawingml/2006/main" xmlns:r="http://schemas.openxmlformats.org/officeDocument/2006/relationships" xmlns:p="http://schemas.openxmlformats.org/presentationml/2006/main">
   <p:cSld>
     <p:spTree>
       <p:nvGrpSpPr>
@@ -629,7 +649,7 @@
         <p:nvSpPr>
           <p:cNvPr id="2" name="Slide Image Placeholder 1"/>
           <p:cNvSpPr>
-            <a:spLocks noGrp="1"/>
+            <a:spLocks noGrp="1" noRot="1" noChangeAspect="1"/>
           </p:cNvSpPr>
           <p:nvPr>
             <p:ph type="sldImg" idx="2"/>
@@ -644,7 +664,7 @@
             <a:spLocks noGrp="1"/>
           </p:cNvSpPr>
           <p:nvPr>
-            <p:ph type="body" idx="3" sz="quarter"/>
+            <p:ph type="body" sz="quarter" idx="3"/>
           </p:nvPr>
         </p:nvSpPr>
         <p:spPr/>
@@ -653,7 +673,7 @@
           <a:lstStyle/>
           <a:p>
             <a:r>
-              <a:t>Writes, packages, and distributes skills.</a:t>
+              <a:t>Builds their own product using jiuwenswarm as its backend.</a:t>
             </a:r>
           </a:p>
         </p:txBody>
@@ -665,7 +685,7 @@
             <a:spLocks noGrp="1"/>
           </p:cNvSpPr>
           <p:nvPr>
-            <p:ph type="sldNum" idx="5" sz="quarter"/>
+            <p:ph type="sldNum" sz="quarter" idx="5"/>
           </p:nvPr>
         </p:nvSpPr>
         <p:spPr/>
@@ -679,7 +699,7 @@
 </file>
 
 <file path=ppt/notesSlides/notesSlide2.xml><?xml version="1.0" encoding="utf-8"?>
-<p:notes xmlns:a="http://schemas.openxmlformats.org/drawingml/2006/main" xmlns:p="http://schemas.openxmlformats.org/presentationml/2006/main" xmlns:r="http://schemas.openxmlformats.org/officeDocument/2006/relationships">
+<p:notes xmlns:a="http://schemas.openxmlformats.org/drawingml/2006/main" xmlns:r="http://schemas.openxmlformats.org/officeDocument/2006/relationships" xmlns:p="http://schemas.openxmlformats.org/presentationml/2006/main">
   <p:cSld>
     <p:spTree>
       <p:nvGrpSpPr>
@@ -699,7 +719,7 @@
         <p:nvSpPr>
           <p:cNvPr id="2" name="Slide Image Placeholder 1"/>
           <p:cNvSpPr>
-            <a:spLocks noGrp="1"/>
+            <a:spLocks noGrp="1" noRot="1" noChangeAspect="1"/>
           </p:cNvSpPr>
           <p:nvPr>
             <p:ph type="sldImg" idx="2"/>
@@ -714,7 +734,7 @@
             <a:spLocks noGrp="1"/>
           </p:cNvSpPr>
           <p:nvPr>
-            <p:ph type="body" idx="3" sz="quarter"/>
+            <p:ph type="body" sz="quarter" idx="3"/>
           </p:nvPr>
         </p:nvSpPr>
         <p:spPr/>
@@ -735,7 +755,7 @@
             <a:spLocks noGrp="1"/>
           </p:cNvSpPr>
           <p:nvPr>
-            <p:ph type="sldNum" idx="5" sz="quarter"/>
+            <p:ph type="sldNum" sz="quarter" idx="5"/>
           </p:nvPr>
         </p:nvSpPr>
         <p:spPr/>
@@ -749,7 +769,7 @@
 </file>
 
 <file path=ppt/notesSlides/notesSlide3.xml><?xml version="1.0" encoding="utf-8"?>
-<p:notes xmlns:a="http://schemas.openxmlformats.org/drawingml/2006/main" xmlns:p="http://schemas.openxmlformats.org/presentationml/2006/main" xmlns:r="http://schemas.openxmlformats.org/officeDocument/2006/relationships">
+<p:notes xmlns:a="http://schemas.openxmlformats.org/drawingml/2006/main" xmlns:r="http://schemas.openxmlformats.org/officeDocument/2006/relationships" xmlns:p="http://schemas.openxmlformats.org/presentationml/2006/main">
   <p:cSld>
     <p:spTree>
       <p:nvGrpSpPr>
@@ -769,7 +789,7 @@
         <p:nvSpPr>
           <p:cNvPr id="2" name="Slide Image Placeholder 1"/>
           <p:cNvSpPr>
-            <a:spLocks noGrp="1"/>
+            <a:spLocks noGrp="1" noRot="1" noChangeAspect="1"/>
           </p:cNvSpPr>
           <p:nvPr>
             <p:ph type="sldImg" idx="2"/>
@@ -784,7 +804,7 @@
             <a:spLocks noGrp="1"/>
           </p:cNvSpPr>
           <p:nvPr>
-            <p:ph type="body" idx="3" sz="quarter"/>
+            <p:ph type="body" sz="quarter" idx="3"/>
           </p:nvPr>
         </p:nvSpPr>
         <p:spPr/>
@@ -805,7 +825,7 @@
             <a:spLocks noGrp="1"/>
           </p:cNvSpPr>
           <p:nvPr>
-            <p:ph type="sldNum" idx="5" sz="quarter"/>
+            <p:ph type="sldNum" sz="quarter" idx="5"/>
           </p:nvPr>
         </p:nvSpPr>
         <p:spPr/>
@@ -819,7 +839,7 @@
 </file>
 
 <file path=ppt/notesSlides/notesSlide4.xml><?xml version="1.0" encoding="utf-8"?>
-<p:notes xmlns:a="http://schemas.openxmlformats.org/drawingml/2006/main" xmlns:p="http://schemas.openxmlformats.org/presentationml/2006/main" xmlns:r="http://schemas.openxmlformats.org/officeDocument/2006/relationships">
+<p:notes xmlns:a="http://schemas.openxmlformats.org/drawingml/2006/main" xmlns:r="http://schemas.openxmlformats.org/officeDocument/2006/relationships" xmlns:p="http://schemas.openxmlformats.org/presentationml/2006/main">
   <p:cSld>
     <p:spTree>
       <p:nvGrpSpPr>
@@ -839,7 +859,7 @@
         <p:nvSpPr>
           <p:cNvPr id="2" name="Slide Image Placeholder 1"/>
           <p:cNvSpPr>
-            <a:spLocks noGrp="1"/>
+            <a:spLocks noGrp="1" noRot="1" noChangeAspect="1"/>
           </p:cNvSpPr>
           <p:nvPr>
             <p:ph type="sldImg" idx="2"/>
@@ -854,7 +874,7 @@
             <a:spLocks noGrp="1"/>
           </p:cNvSpPr>
           <p:nvPr>
-            <p:ph type="body" idx="3" sz="quarter"/>
+            <p:ph type="body" sz="quarter" idx="3"/>
           </p:nvPr>
         </p:nvSpPr>
         <p:spPr/>
@@ -875,7 +895,7 @@
             <a:spLocks noGrp="1"/>
           </p:cNvSpPr>
           <p:nvPr>
-            <p:ph type="sldNum" idx="5" sz="quarter"/>
+            <p:ph type="sldNum" sz="quarter" idx="5"/>
           </p:nvPr>
         </p:nvSpPr>
         <p:spPr/>
@@ -889,7 +909,7 @@
 </file>
 
 <file path=ppt/notesSlides/notesSlide5.xml><?xml version="1.0" encoding="utf-8"?>
-<p:notes xmlns:a="http://schemas.openxmlformats.org/drawingml/2006/main" xmlns:p="http://schemas.openxmlformats.org/presentationml/2006/main" xmlns:r="http://schemas.openxmlformats.org/officeDocument/2006/relationships">
+<p:notes xmlns:a="http://schemas.openxmlformats.org/drawingml/2006/main" xmlns:r="http://schemas.openxmlformats.org/officeDocument/2006/relationships" xmlns:p="http://schemas.openxmlformats.org/presentationml/2006/main">
   <p:cSld>
     <p:spTree>
       <p:nvGrpSpPr>
@@ -909,7 +929,7 @@
         <p:nvSpPr>
           <p:cNvPr id="2" name="Slide Image Placeholder 1"/>
           <p:cNvSpPr>
-            <a:spLocks noGrp="1"/>
+            <a:spLocks noGrp="1" noRot="1" noChangeAspect="1"/>
           </p:cNvSpPr>
           <p:nvPr>
             <p:ph type="sldImg" idx="2"/>
@@ -924,7 +944,7 @@
             <a:spLocks noGrp="1"/>
           </p:cNvSpPr>
           <p:nvPr>
-            <p:ph type="body" idx="3" sz="quarter"/>
+            <p:ph type="body" sz="quarter" idx="3"/>
           </p:nvPr>
         </p:nvSpPr>
         <p:spPr/>
@@ -945,7 +965,7 @@
             <a:spLocks noGrp="1"/>
           </p:cNvSpPr>
           <p:nvPr>
-            <p:ph type="sldNum" idx="5" sz="quarter"/>
+            <p:ph type="sldNum" sz="quarter" idx="5"/>
           </p:nvPr>
         </p:nvSpPr>
         <p:spPr/>
@@ -959,7 +979,7 @@
 </file>
 
 <file path=ppt/notesSlides/notesSlide6.xml><?xml version="1.0" encoding="utf-8"?>
-<p:notes xmlns:a="http://schemas.openxmlformats.org/drawingml/2006/main" xmlns:p="http://schemas.openxmlformats.org/presentationml/2006/main" xmlns:r="http://schemas.openxmlformats.org/officeDocument/2006/relationships">
+<p:notes xmlns:a="http://schemas.openxmlformats.org/drawingml/2006/main" xmlns:r="http://schemas.openxmlformats.org/officeDocument/2006/relationships" xmlns:p="http://schemas.openxmlformats.org/presentationml/2006/main">
   <p:cSld>
     <p:spTree>
       <p:nvGrpSpPr>
@@ -979,7 +999,7 @@
         <p:nvSpPr>
           <p:cNvPr id="2" name="Slide Image Placeholder 1"/>
           <p:cNvSpPr>
-            <a:spLocks noGrp="1"/>
+            <a:spLocks noGrp="1" noRot="1" noChangeAspect="1"/>
           </p:cNvSpPr>
           <p:nvPr>
             <p:ph type="sldImg" idx="2"/>
@@ -994,7 +1014,7 @@
             <a:spLocks noGrp="1"/>
           </p:cNvSpPr>
           <p:nvPr>
-            <p:ph type="body" idx="3" sz="quarter"/>
+            <p:ph type="body" sz="quarter" idx="3"/>
           </p:nvPr>
         </p:nvSpPr>
         <p:spPr/>
@@ -1015,7 +1035,7 @@
             <a:spLocks noGrp="1"/>
           </p:cNvSpPr>
           <p:nvPr>
-            <p:ph type="sldNum" idx="5" sz="quarter"/>
+            <p:ph type="sldNum" sz="quarter" idx="5"/>
           </p:nvPr>
         </p:nvSpPr>
         <p:spPr/>
@@ -1029,7 +1049,7 @@
 </file>
 
 <file path=ppt/notesSlides/notesSlide7.xml><?xml version="1.0" encoding="utf-8"?>
-<p:notes xmlns:a="http://schemas.openxmlformats.org/drawingml/2006/main" xmlns:p="http://schemas.openxmlformats.org/presentationml/2006/main" xmlns:r="http://schemas.openxmlformats.org/officeDocument/2006/relationships">
+<p:notes xmlns:a="http://schemas.openxmlformats.org/drawingml/2006/main" xmlns:r="http://schemas.openxmlformats.org/officeDocument/2006/relationships" xmlns:p="http://schemas.openxmlformats.org/presentationml/2006/main">
   <p:cSld>
     <p:spTree>
       <p:nvGrpSpPr>
@@ -1049,7 +1069,7 @@
         <p:nvSpPr>
           <p:cNvPr id="2" name="Slide Image Placeholder 1"/>
           <p:cNvSpPr>
-            <a:spLocks noGrp="1"/>
+            <a:spLocks noGrp="1" noRot="1" noChangeAspect="1"/>
           </p:cNvSpPr>
           <p:nvPr>
             <p:ph type="sldImg" idx="2"/>
@@ -1064,7 +1084,7 @@
             <a:spLocks noGrp="1"/>
           </p:cNvSpPr>
           <p:nvPr>
-            <p:ph type="body" idx="3" sz="quarter"/>
+            <p:ph type="body" sz="quarter" idx="3"/>
           </p:nvPr>
         </p:nvSpPr>
         <p:spPr/>
@@ -1085,7 +1105,7 @@
             <a:spLocks noGrp="1"/>
           </p:cNvSpPr>
           <p:nvPr>
-            <p:ph type="sldNum" idx="5" sz="quarter"/>
+            <p:ph type="sldNum" sz="quarter" idx="5"/>
           </p:nvPr>
         </p:nvSpPr>
         <p:spPr/>
@@ -1099,7 +1119,7 @@
 </file>
 
 <file path=ppt/notesSlides/notesSlide8.xml><?xml version="1.0" encoding="utf-8"?>
-<p:notes xmlns:a="http://schemas.openxmlformats.org/drawingml/2006/main" xmlns:p="http://schemas.openxmlformats.org/presentationml/2006/main" xmlns:r="http://schemas.openxmlformats.org/officeDocument/2006/relationships">
+<p:notes xmlns:a="http://schemas.openxmlformats.org/drawingml/2006/main" xmlns:r="http://schemas.openxmlformats.org/officeDocument/2006/relationships" xmlns:p="http://schemas.openxmlformats.org/presentationml/2006/main">
   <p:cSld>
     <p:spTree>
       <p:nvGrpSpPr>
@@ -1119,7 +1139,7 @@
         <p:nvSpPr>
           <p:cNvPr id="2" name="Slide Image Placeholder 1"/>
           <p:cNvSpPr>
-            <a:spLocks noGrp="1"/>
+            <a:spLocks noGrp="1" noRot="1" noChangeAspect="1"/>
           </p:cNvSpPr>
           <p:nvPr>
             <p:ph type="sldImg" idx="2"/>
@@ -1134,7 +1154,7 @@
             <a:spLocks noGrp="1"/>
           </p:cNvSpPr>
           <p:nvPr>
-            <p:ph type="body" idx="3" sz="quarter"/>
+            <p:ph type="body" sz="quarter" idx="3"/>
           </p:nvPr>
         </p:nvSpPr>
         <p:spPr/>
@@ -1155,7 +1175,7 @@
             <a:spLocks noGrp="1"/>
           </p:cNvSpPr>
           <p:nvPr>
-            <p:ph type="sldNum" idx="5" sz="quarter"/>
+            <p:ph type="sldNum" sz="quarter" idx="5"/>
           </p:nvPr>
         </p:nvSpPr>
         <p:spPr/>
@@ -1169,7 +1189,7 @@
 </file>
 
 <file path=ppt/notesSlides/notesSlide9.xml><?xml version="1.0" encoding="utf-8"?>
-<p:notes xmlns:a="http://schemas.openxmlformats.org/drawingml/2006/main" xmlns:p="http://schemas.openxmlformats.org/presentationml/2006/main" xmlns:r="http://schemas.openxmlformats.org/officeDocument/2006/relationships">
+<p:notes xmlns:a="http://schemas.openxmlformats.org/drawingml/2006/main" xmlns:r="http://schemas.openxmlformats.org/officeDocument/2006/relationships" xmlns:p="http://schemas.openxmlformats.org/presentationml/2006/main">
   <p:cSld>
     <p:spTree>
       <p:nvGrpSpPr>
@@ -1189,7 +1209,7 @@
         <p:nvSpPr>
           <p:cNvPr id="2" name="Slide Image Placeholder 1"/>
           <p:cNvSpPr>
-            <a:spLocks noGrp="1"/>
+            <a:spLocks noGrp="1" noRot="1" noChangeAspect="1"/>
           </p:cNvSpPr>
           <p:nvPr>
             <p:ph type="sldImg" idx="2"/>
@@ -1204,7 +1224,7 @@
             <a:spLocks noGrp="1"/>
           </p:cNvSpPr>
           <p:nvPr>
-            <p:ph type="body" idx="3" sz="quarter"/>
+            <p:ph type="body" sz="quarter" idx="3"/>
           </p:nvPr>
         </p:nvSpPr>
         <p:spPr/>
@@ -1225,7 +1245,7 @@
             <a:spLocks noGrp="1"/>
           </p:cNvSpPr>
           <p:nvPr>
-            <p:ph type="sldNum" idx="5" sz="quarter"/>
+            <p:ph type="sldNum" sz="quarter" idx="5"/>
           </p:nvPr>
         </p:nvSpPr>
         <p:spPr/>
@@ -1276,10 +1296,9 @@
           <a:lstStyle/>
           <a:p>
             <a:r>
-              <a:rPr lang="en-US" smtClean="0"/>
+              <a:rPr lang="en-US"/>
               <a:t>Click to edit Master title style</a:t>
             </a:r>
-            <a:endParaRPr lang="en-US"/>
           </a:p>
         </p:txBody>
       </p:sp>
@@ -1395,10 +1414,9 @@
           </a:lstStyle>
           <a:p>
             <a:r>
-              <a:rPr lang="en-US" smtClean="0"/>
+              <a:rPr lang="en-US"/>
               <a:t>Click to edit Master subtitle style</a:t>
             </a:r>
-            <a:endParaRPr lang="en-US"/>
           </a:p>
         </p:txBody>
       </p:sp>
@@ -1419,7 +1437,7 @@
           <a:p>
             <a:fld id="{5BCAD085-E8A6-8845-BD4E-CB4CCA059FC4}" type="datetimeFigureOut">
               <a:rPr lang="en-US" smtClean="0"/>
-              <a:t>1/27/13</a:t>
+              <a:t>9/9/26</a:t>
             </a:fld>
             <a:endParaRPr lang="en-US"/>
           </a:p>
@@ -1513,10 +1531,9 @@
           <a:lstStyle/>
           <a:p>
             <a:r>
-              <a:rPr lang="en-US" smtClean="0"/>
+              <a:rPr lang="en-US"/>
               <a:t>Click to edit Master title style</a:t>
             </a:r>
-            <a:endParaRPr lang="en-US"/>
           </a:p>
         </p:txBody>
       </p:sp>
@@ -1537,38 +1554,37 @@
           <a:p>
             <a:pPr lvl="0"/>
             <a:r>
-              <a:rPr lang="en-US" smtClean="0"/>
+              <a:rPr lang="en-US"/>
               <a:t>Click to edit Master text styles</a:t>
             </a:r>
           </a:p>
           <a:p>
             <a:pPr lvl="1"/>
             <a:r>
-              <a:rPr lang="en-US" smtClean="0"/>
+              <a:rPr lang="en-US"/>
               <a:t>Second level</a:t>
             </a:r>
           </a:p>
           <a:p>
             <a:pPr lvl="2"/>
             <a:r>
-              <a:rPr lang="en-US" smtClean="0"/>
+              <a:rPr lang="en-US"/>
               <a:t>Third level</a:t>
             </a:r>
           </a:p>
           <a:p>
             <a:pPr lvl="3"/>
             <a:r>
-              <a:rPr lang="en-US" smtClean="0"/>
+              <a:rPr lang="en-US"/>
               <a:t>Fourth level</a:t>
             </a:r>
           </a:p>
           <a:p>
             <a:pPr lvl="4"/>
             <a:r>
-              <a:rPr lang="en-US" smtClean="0"/>
+              <a:rPr lang="en-US"/>
               <a:t>Fifth level</a:t>
             </a:r>
-            <a:endParaRPr lang="en-US"/>
           </a:p>
         </p:txBody>
       </p:sp>
@@ -1589,7 +1605,7 @@
           <a:p>
             <a:fld id="{5BCAD085-E8A6-8845-BD4E-CB4CCA059FC4}" type="datetimeFigureOut">
               <a:rPr lang="en-US" smtClean="0"/>
-              <a:t>1/27/13</a:t>
+              <a:t>9/9/26</a:t>
             </a:fld>
             <a:endParaRPr lang="en-US"/>
           </a:p>
@@ -1688,10 +1704,9 @@
           <a:lstStyle/>
           <a:p>
             <a:r>
-              <a:rPr lang="en-US" smtClean="0"/>
+              <a:rPr lang="en-US"/>
               <a:t>Click to edit Master title style</a:t>
             </a:r>
-            <a:endParaRPr lang="en-US"/>
           </a:p>
         </p:txBody>
       </p:sp>
@@ -1717,38 +1732,37 @@
           <a:p>
             <a:pPr lvl="0"/>
             <a:r>
-              <a:rPr lang="en-US" smtClean="0"/>
+              <a:rPr lang="en-US"/>
               <a:t>Click to edit Master text styles</a:t>
             </a:r>
           </a:p>
           <a:p>
             <a:pPr lvl="1"/>
             <a:r>
-              <a:rPr lang="en-US" smtClean="0"/>
+              <a:rPr lang="en-US"/>
               <a:t>Second level</a:t>
             </a:r>
           </a:p>
           <a:p>
             <a:pPr lvl="2"/>
             <a:r>
-              <a:rPr lang="en-US" smtClean="0"/>
+              <a:rPr lang="en-US"/>
               <a:t>Third level</a:t>
             </a:r>
           </a:p>
           <a:p>
             <a:pPr lvl="3"/>
             <a:r>
-              <a:rPr lang="en-US" smtClean="0"/>
+              <a:rPr lang="en-US"/>
               <a:t>Fourth level</a:t>
             </a:r>
           </a:p>
           <a:p>
             <a:pPr lvl="4"/>
             <a:r>
-              <a:rPr lang="en-US" smtClean="0"/>
+              <a:rPr lang="en-US"/>
               <a:t>Fifth level</a:t>
             </a:r>
-            <a:endParaRPr lang="en-US"/>
           </a:p>
         </p:txBody>
       </p:sp>
@@ -1769,7 +1783,7 @@
           <a:p>
             <a:fld id="{5BCAD085-E8A6-8845-BD4E-CB4CCA059FC4}" type="datetimeFigureOut">
               <a:rPr lang="en-US" smtClean="0"/>
-              <a:t>1/27/13</a:t>
+              <a:t>9/9/26</a:t>
             </a:fld>
             <a:endParaRPr lang="en-US"/>
           </a:p>
@@ -1863,10 +1877,9 @@
           <a:lstStyle/>
           <a:p>
             <a:r>
-              <a:rPr lang="en-US" smtClean="0"/>
+              <a:rPr lang="en-US"/>
               <a:t>Click to edit Master title style</a:t>
             </a:r>
-            <a:endParaRPr lang="en-US"/>
           </a:p>
         </p:txBody>
       </p:sp>
@@ -1887,38 +1900,37 @@
           <a:p>
             <a:pPr lvl="0"/>
             <a:r>
-              <a:rPr lang="en-US" smtClean="0"/>
+              <a:rPr lang="en-US"/>
               <a:t>Click to edit Master text styles</a:t>
             </a:r>
           </a:p>
           <a:p>
             <a:pPr lvl="1"/>
             <a:r>
-              <a:rPr lang="en-US" smtClean="0"/>
+              <a:rPr lang="en-US"/>
               <a:t>Second level</a:t>
             </a:r>
           </a:p>
           <a:p>
             <a:pPr lvl="2"/>
             <a:r>
-              <a:rPr lang="en-US" smtClean="0"/>
+              <a:rPr lang="en-US"/>
               <a:t>Third level</a:t>
             </a:r>
           </a:p>
           <a:p>
             <a:pPr lvl="3"/>
             <a:r>
-              <a:rPr lang="en-US" smtClean="0"/>
+              <a:rPr lang="en-US"/>
               <a:t>Fourth level</a:t>
             </a:r>
           </a:p>
           <a:p>
             <a:pPr lvl="4"/>
             <a:r>
-              <a:rPr lang="en-US" smtClean="0"/>
+              <a:rPr lang="en-US"/>
               <a:t>Fifth level</a:t>
             </a:r>
-            <a:endParaRPr lang="en-US"/>
           </a:p>
         </p:txBody>
       </p:sp>
@@ -1939,7 +1951,7 @@
           <a:p>
             <a:fld id="{5BCAD085-E8A6-8845-BD4E-CB4CCA059FC4}" type="datetimeFigureOut">
               <a:rPr lang="en-US" smtClean="0"/>
-              <a:t>1/27/13</a:t>
+              <a:t>9/9/26</a:t>
             </a:fld>
             <a:endParaRPr lang="en-US"/>
           </a:p>
@@ -2042,10 +2054,9 @@
           </a:lstStyle>
           <a:p>
             <a:r>
-              <a:rPr lang="en-US" smtClean="0"/>
+              <a:rPr lang="en-US"/>
               <a:t>Click to edit Master title style</a:t>
             </a:r>
-            <a:endParaRPr lang="en-US"/>
           </a:p>
         </p:txBody>
       </p:sp>
@@ -2162,7 +2173,7 @@
           <a:p>
             <a:pPr lvl="0"/>
             <a:r>
-              <a:rPr lang="en-US" smtClean="0"/>
+              <a:rPr lang="en-US"/>
               <a:t>Click to edit Master text styles</a:t>
             </a:r>
           </a:p>
@@ -2185,7 +2196,7 @@
           <a:p>
             <a:fld id="{5BCAD085-E8A6-8845-BD4E-CB4CCA059FC4}" type="datetimeFigureOut">
               <a:rPr lang="en-US" smtClean="0"/>
-              <a:t>1/27/13</a:t>
+              <a:t>9/9/26</a:t>
             </a:fld>
             <a:endParaRPr lang="en-US"/>
           </a:p>
@@ -2279,10 +2290,9 @@
           <a:lstStyle/>
           <a:p>
             <a:r>
-              <a:rPr lang="en-US" smtClean="0"/>
+              <a:rPr lang="en-US"/>
               <a:t>Click to edit Master title style</a:t>
             </a:r>
-            <a:endParaRPr lang="en-US"/>
           </a:p>
         </p:txBody>
       </p:sp>
@@ -2336,38 +2346,37 @@
           <a:p>
             <a:pPr lvl="0"/>
             <a:r>
-              <a:rPr lang="en-US" smtClean="0"/>
+              <a:rPr lang="en-US"/>
               <a:t>Click to edit Master text styles</a:t>
             </a:r>
           </a:p>
           <a:p>
             <a:pPr lvl="1"/>
             <a:r>
-              <a:rPr lang="en-US" smtClean="0"/>
+              <a:rPr lang="en-US"/>
               <a:t>Second level</a:t>
             </a:r>
           </a:p>
           <a:p>
             <a:pPr lvl="2"/>
             <a:r>
-              <a:rPr lang="en-US" smtClean="0"/>
+              <a:rPr lang="en-US"/>
               <a:t>Third level</a:t>
             </a:r>
           </a:p>
           <a:p>
             <a:pPr lvl="3"/>
             <a:r>
-              <a:rPr lang="en-US" smtClean="0"/>
+              <a:rPr lang="en-US"/>
               <a:t>Fourth level</a:t>
             </a:r>
           </a:p>
           <a:p>
             <a:pPr lvl="4"/>
             <a:r>
-              <a:rPr lang="en-US" smtClean="0"/>
+              <a:rPr lang="en-US"/>
               <a:t>Fifth level</a:t>
             </a:r>
-            <a:endParaRPr lang="en-US"/>
           </a:p>
         </p:txBody>
       </p:sp>
@@ -2421,38 +2430,37 @@
           <a:p>
             <a:pPr lvl="0"/>
             <a:r>
-              <a:rPr lang="en-US" smtClean="0"/>
+              <a:rPr lang="en-US"/>
               <a:t>Click to edit Master text styles</a:t>
             </a:r>
           </a:p>
           <a:p>
             <a:pPr lvl="1"/>
             <a:r>
-              <a:rPr lang="en-US" smtClean="0"/>
+              <a:rPr lang="en-US"/>
               <a:t>Second level</a:t>
             </a:r>
           </a:p>
           <a:p>
             <a:pPr lvl="2"/>
             <a:r>
-              <a:rPr lang="en-US" smtClean="0"/>
+              <a:rPr lang="en-US"/>
               <a:t>Third level</a:t>
             </a:r>
           </a:p>
           <a:p>
             <a:pPr lvl="3"/>
             <a:r>
-              <a:rPr lang="en-US" smtClean="0"/>
+              <a:rPr lang="en-US"/>
               <a:t>Fourth level</a:t>
             </a:r>
           </a:p>
           <a:p>
             <a:pPr lvl="4"/>
             <a:r>
-              <a:rPr lang="en-US" smtClean="0"/>
+              <a:rPr lang="en-US"/>
               <a:t>Fifth level</a:t>
             </a:r>
-            <a:endParaRPr lang="en-US"/>
           </a:p>
         </p:txBody>
       </p:sp>
@@ -2473,7 +2481,7 @@
           <a:p>
             <a:fld id="{5BCAD085-E8A6-8845-BD4E-CB4CCA059FC4}" type="datetimeFigureOut">
               <a:rPr lang="en-US" smtClean="0"/>
-              <a:t>1/27/13</a:t>
+              <a:t>9/9/26</a:t>
             </a:fld>
             <a:endParaRPr lang="en-US"/>
           </a:p>
@@ -2571,10 +2579,9 @@
           </a:lstStyle>
           <a:p>
             <a:r>
-              <a:rPr lang="en-US" smtClean="0"/>
+              <a:rPr lang="en-US"/>
               <a:t>Click to edit Master title style</a:t>
             </a:r>
-            <a:endParaRPr lang="en-US"/>
           </a:p>
         </p:txBody>
       </p:sp>
@@ -2637,7 +2644,7 @@
           <a:p>
             <a:pPr lvl="0"/>
             <a:r>
-              <a:rPr lang="en-US" smtClean="0"/>
+              <a:rPr lang="en-US"/>
               <a:t>Click to edit Master text styles</a:t>
             </a:r>
           </a:p>
@@ -2693,38 +2700,37 @@
           <a:p>
             <a:pPr lvl="0"/>
             <a:r>
-              <a:rPr lang="en-US" smtClean="0"/>
+              <a:rPr lang="en-US"/>
               <a:t>Click to edit Master text styles</a:t>
             </a:r>
           </a:p>
           <a:p>
             <a:pPr lvl="1"/>
             <a:r>
-              <a:rPr lang="en-US" smtClean="0"/>
+              <a:rPr lang="en-US"/>
               <a:t>Second level</a:t>
             </a:r>
           </a:p>
           <a:p>
             <a:pPr lvl="2"/>
             <a:r>
-              <a:rPr lang="en-US" smtClean="0"/>
+              <a:rPr lang="en-US"/>
               <a:t>Third level</a:t>
             </a:r>
           </a:p>
           <a:p>
             <a:pPr lvl="3"/>
             <a:r>
-              <a:rPr lang="en-US" smtClean="0"/>
+              <a:rPr lang="en-US"/>
               <a:t>Fourth level</a:t>
             </a:r>
           </a:p>
           <a:p>
             <a:pPr lvl="4"/>
             <a:r>
-              <a:rPr lang="en-US" smtClean="0"/>
+              <a:rPr lang="en-US"/>
               <a:t>Fifth level</a:t>
             </a:r>
-            <a:endParaRPr lang="en-US"/>
           </a:p>
         </p:txBody>
       </p:sp>
@@ -2787,7 +2793,7 @@
           <a:p>
             <a:pPr lvl="0"/>
             <a:r>
-              <a:rPr lang="en-US" smtClean="0"/>
+              <a:rPr lang="en-US"/>
               <a:t>Click to edit Master text styles</a:t>
             </a:r>
           </a:p>
@@ -2843,38 +2849,37 @@
           <a:p>
             <a:pPr lvl="0"/>
             <a:r>
-              <a:rPr lang="en-US" smtClean="0"/>
+              <a:rPr lang="en-US"/>
               <a:t>Click to edit Master text styles</a:t>
             </a:r>
           </a:p>
           <a:p>
             <a:pPr lvl="1"/>
             <a:r>
-              <a:rPr lang="en-US" smtClean="0"/>
+              <a:rPr lang="en-US"/>
               <a:t>Second level</a:t>
             </a:r>
           </a:p>
           <a:p>
             <a:pPr lvl="2"/>
             <a:r>
-              <a:rPr lang="en-US" smtClean="0"/>
+              <a:rPr lang="en-US"/>
               <a:t>Third level</a:t>
             </a:r>
           </a:p>
           <a:p>
             <a:pPr lvl="3"/>
             <a:r>
-              <a:rPr lang="en-US" smtClean="0"/>
+              <a:rPr lang="en-US"/>
               <a:t>Fourth level</a:t>
             </a:r>
           </a:p>
           <a:p>
             <a:pPr lvl="4"/>
             <a:r>
-              <a:rPr lang="en-US" smtClean="0"/>
+              <a:rPr lang="en-US"/>
               <a:t>Fifth level</a:t>
             </a:r>
-            <a:endParaRPr lang="en-US"/>
           </a:p>
         </p:txBody>
       </p:sp>
@@ -2895,7 +2900,7 @@
           <a:p>
             <a:fld id="{5BCAD085-E8A6-8845-BD4E-CB4CCA059FC4}" type="datetimeFigureOut">
               <a:rPr lang="en-US" smtClean="0"/>
-              <a:t>1/27/13</a:t>
+              <a:t>9/9/26</a:t>
             </a:fld>
             <a:endParaRPr lang="en-US"/>
           </a:p>
@@ -2989,10 +2994,9 @@
           <a:lstStyle/>
           <a:p>
             <a:r>
-              <a:rPr lang="en-US" smtClean="0"/>
+              <a:rPr lang="en-US"/>
               <a:t>Click to edit Master title style</a:t>
             </a:r>
-            <a:endParaRPr lang="en-US"/>
           </a:p>
         </p:txBody>
       </p:sp>
@@ -3013,7 +3017,7 @@
           <a:p>
             <a:fld id="{5BCAD085-E8A6-8845-BD4E-CB4CCA059FC4}" type="datetimeFigureOut">
               <a:rPr lang="en-US" smtClean="0"/>
-              <a:t>1/27/13</a:t>
+              <a:t>9/9/26</a:t>
             </a:fld>
             <a:endParaRPr lang="en-US"/>
           </a:p>
@@ -3108,7 +3112,7 @@
           <a:p>
             <a:fld id="{5BCAD085-E8A6-8845-BD4E-CB4CCA059FC4}" type="datetimeFigureOut">
               <a:rPr lang="en-US" smtClean="0"/>
-              <a:t>1/27/13</a:t>
+              <a:t>9/9/26</a:t>
             </a:fld>
             <a:endParaRPr lang="en-US"/>
           </a:p>
@@ -3211,10 +3215,9 @@
           </a:lstStyle>
           <a:p>
             <a:r>
-              <a:rPr lang="en-US" smtClean="0"/>
+              <a:rPr lang="en-US"/>
               <a:t>Click to edit Master title style</a:t>
             </a:r>
-            <a:endParaRPr lang="en-US"/>
           </a:p>
         </p:txBody>
       </p:sp>
@@ -3268,38 +3271,37 @@
           <a:p>
             <a:pPr lvl="0"/>
             <a:r>
-              <a:rPr lang="en-US" smtClean="0"/>
+              <a:rPr lang="en-US"/>
               <a:t>Click to edit Master text styles</a:t>
             </a:r>
           </a:p>
           <a:p>
             <a:pPr lvl="1"/>
             <a:r>
-              <a:rPr lang="en-US" smtClean="0"/>
+              <a:rPr lang="en-US"/>
               <a:t>Second level</a:t>
             </a:r>
           </a:p>
           <a:p>
             <a:pPr lvl="2"/>
             <a:r>
-              <a:rPr lang="en-US" smtClean="0"/>
+              <a:rPr lang="en-US"/>
               <a:t>Third level</a:t>
             </a:r>
           </a:p>
           <a:p>
             <a:pPr lvl="3"/>
             <a:r>
-              <a:rPr lang="en-US" smtClean="0"/>
+              <a:rPr lang="en-US"/>
               <a:t>Fourth level</a:t>
             </a:r>
           </a:p>
           <a:p>
             <a:pPr lvl="4"/>
             <a:r>
-              <a:rPr lang="en-US" smtClean="0"/>
+              <a:rPr lang="en-US"/>
               <a:t>Fifth level</a:t>
             </a:r>
-            <a:endParaRPr lang="en-US"/>
           </a:p>
         </p:txBody>
       </p:sp>
@@ -3362,7 +3364,7 @@
           <a:p>
             <a:pPr lvl="0"/>
             <a:r>
-              <a:rPr lang="en-US" smtClean="0"/>
+              <a:rPr lang="en-US"/>
               <a:t>Click to edit Master text styles</a:t>
             </a:r>
           </a:p>
@@ -3385,7 +3387,7 @@
           <a:p>
             <a:fld id="{5BCAD085-E8A6-8845-BD4E-CB4CCA059FC4}" type="datetimeFigureOut">
               <a:rPr lang="en-US" smtClean="0"/>
-              <a:t>1/27/13</a:t>
+              <a:t>9/9/26</a:t>
             </a:fld>
             <a:endParaRPr lang="en-US"/>
           </a:p>
@@ -3488,10 +3490,9 @@
           </a:lstStyle>
           <a:p>
             <a:r>
-              <a:rPr lang="en-US" smtClean="0"/>
+              <a:rPr lang="en-US"/>
               <a:t>Click to edit Master title style</a:t>
             </a:r>
-            <a:endParaRPr lang="en-US"/>
           </a:p>
         </p:txBody>
       </p:sp>
@@ -3615,7 +3616,7 @@
           <a:p>
             <a:pPr lvl="0"/>
             <a:r>
-              <a:rPr lang="en-US" smtClean="0"/>
+              <a:rPr lang="en-US"/>
               <a:t>Click to edit Master text styles</a:t>
             </a:r>
           </a:p>
@@ -3638,7 +3639,7 @@
           <a:p>
             <a:fld id="{5BCAD085-E8A6-8845-BD4E-CB4CCA059FC4}" type="datetimeFigureOut">
               <a:rPr lang="en-US" smtClean="0"/>
-              <a:t>1/27/13</a:t>
+              <a:t>9/9/26</a:t>
             </a:fld>
             <a:endParaRPr lang="en-US"/>
           </a:p>
@@ -3747,10 +3748,9 @@
           <a:lstStyle/>
           <a:p>
             <a:r>
-              <a:rPr lang="en-US" smtClean="0"/>
+              <a:rPr lang="en-US"/>
               <a:t>Click to edit Master title style</a:t>
             </a:r>
-            <a:endParaRPr lang="en-US"/>
           </a:p>
         </p:txBody>
       </p:sp>
@@ -3781,38 +3781,37 @@
           <a:p>
             <a:pPr lvl="0"/>
             <a:r>
-              <a:rPr lang="en-US" smtClean="0"/>
+              <a:rPr lang="en-US"/>
               <a:t>Click to edit Master text styles</a:t>
             </a:r>
           </a:p>
           <a:p>
             <a:pPr lvl="1"/>
             <a:r>
-              <a:rPr lang="en-US" smtClean="0"/>
+              <a:rPr lang="en-US"/>
               <a:t>Second level</a:t>
             </a:r>
           </a:p>
           <a:p>
             <a:pPr lvl="2"/>
             <a:r>
-              <a:rPr lang="en-US" smtClean="0"/>
+              <a:rPr lang="en-US"/>
               <a:t>Third level</a:t>
             </a:r>
           </a:p>
           <a:p>
             <a:pPr lvl="3"/>
             <a:r>
-              <a:rPr lang="en-US" smtClean="0"/>
+              <a:rPr lang="en-US"/>
               <a:t>Fourth level</a:t>
             </a:r>
           </a:p>
           <a:p>
             <a:pPr lvl="4"/>
             <a:r>
-              <a:rPr lang="en-US" smtClean="0"/>
+              <a:rPr lang="en-US"/>
               <a:t>Fifth level</a:t>
             </a:r>
-            <a:endParaRPr lang="en-US"/>
           </a:p>
         </p:txBody>
       </p:sp>
@@ -3851,7 +3850,7 @@
           <a:p>
             <a:fld id="{5BCAD085-E8A6-8845-BD4E-CB4CCA059FC4}" type="datetimeFigureOut">
               <a:rPr lang="en-US" smtClean="0"/>
-              <a:t>1/27/13</a:t>
+              <a:t>9/9/26</a:t>
             </a:fld>
             <a:endParaRPr lang="en-US"/>
           </a:p>
@@ -4210,7 +4209,7 @@
 </file>
 
 <file path=ppt/slides/slide1.xml><?xml version="1.0" encoding="utf-8"?>
-<p:sld xmlns:a="http://schemas.openxmlformats.org/drawingml/2006/main" xmlns:p="http://schemas.openxmlformats.org/presentationml/2006/main" xmlns:r="http://schemas.openxmlformats.org/officeDocument/2006/relationships">
+<p:sld xmlns:a="http://schemas.openxmlformats.org/drawingml/2006/main" xmlns:r="http://schemas.openxmlformats.org/officeDocument/2006/relationships" xmlns:p="http://schemas.openxmlformats.org/presentationml/2006/main">
   <p:cSld>
     <p:bg>
       <p:bgPr>
@@ -4226,7 +4225,14 @@
         <p:cNvGrpSpPr/>
         <p:nvPr/>
       </p:nvGrpSpPr>
-      <p:grpSpPr/>
+      <p:grpSpPr>
+        <a:xfrm>
+          <a:off x="0" y="0"/>
+          <a:ext cx="0" cy="0"/>
+          <a:chOff x="0" y="0"/>
+          <a:chExt cx="0" cy="0"/>
+        </a:xfrm>
+      </p:grpSpPr>
       <p:sp>
         <p:nvSpPr>
           <p:cNvPr id="2" name="Rounded Rectangle 1"/>
@@ -4235,7 +4241,7 @@
         </p:nvSpPr>
         <p:spPr>
           <a:xfrm>
-            <a:off x="0" y="0"/>
+            <a:off x="0" y="316523"/>
             <a:ext cx="12191695" cy="6858000"/>
           </a:xfrm>
           <a:prstGeom prst="roundRect">
@@ -4267,6 +4273,7 @@
           <a:lstStyle/>
           <a:p>
             <a:pPr algn="ctr"/>
+            <a:endParaRPr/>
           </a:p>
         </p:txBody>
       </p:sp>
@@ -4306,7 +4313,7 @@
           </a:fontRef>
         </p:style>
         <p:txBody>
-          <a:bodyPr rtlCol="0" anchor="ctr" tIns="27432" lIns="109728"/>
+          <a:bodyPr lIns="109728" tIns="27432" rtlCol="0" anchor="ctr"/>
           <a:lstStyle/>
           <a:p>
             <a:pPr algn="ctr"/>
@@ -4423,22 +4430,42 @@
           </a:fontRef>
         </p:style>
         <p:txBody>
-          <a:bodyPr rtlCol="0" anchor="t" tIns="164592" lIns="137160"/>
+          <a:bodyPr lIns="137160" tIns="164592" rtlCol="0" anchor="t"/>
           <a:lstStyle/>
           <a:p>
             <a:pPr algn="ctr"/>
             <a:r>
-              <a:rPr sz="2400" b="1">
+              <a:rPr sz="2400" b="1" dirty="0">
                 <a:solidFill>
                   <a:srgbClr val="4E9EFF"/>
                 </a:solidFill>
               </a:rPr>
               <a:t>Makers</a:t>
             </a:r>
-          </a:p>
-          <a:p>
-            <a:r>
-              <a:rPr sz="1600">
+            <a:endParaRPr lang="ru-RU" sz="2400" b="1" dirty="0">
+              <a:solidFill>
+                <a:srgbClr val="4E9EFF"/>
+              </a:solidFill>
+            </a:endParaRPr>
+          </a:p>
+          <a:p>
+            <a:pPr algn="ctr"/>
+            <a:endParaRPr sz="2400" b="1" dirty="0">
+              <a:solidFill>
+                <a:srgbClr val="4E9EFF"/>
+              </a:solidFill>
+            </a:endParaRPr>
+          </a:p>
+          <a:p>
+            <a:endParaRPr lang="ru-RU" sz="1600" dirty="0">
+              <a:solidFill>
+                <a:srgbClr val="9AA6B8"/>
+              </a:solidFill>
+            </a:endParaRPr>
+          </a:p>
+          <a:p>
+            <a:r>
+              <a:rPr sz="1600" dirty="0">
                 <a:solidFill>
                   <a:srgbClr val="9AA6B8"/>
                 </a:solidFill>
@@ -4484,38 +4511,84 @@
           </a:fontRef>
         </p:style>
         <p:txBody>
-          <a:bodyPr rtlCol="0" anchor="t" tIns="164592" lIns="137160"/>
+          <a:bodyPr lIns="137160" tIns="164592" rtlCol="0" anchor="t"/>
           <a:lstStyle/>
           <a:p>
             <a:pPr algn="ctr"/>
             <a:r>
-              <a:rPr sz="2400" b="1">
+              <a:rPr sz="2400" b="1" dirty="0">
                 <a:solidFill>
                   <a:srgbClr val="66BB6A"/>
                 </a:solidFill>
               </a:rPr>
               <a:t>Runners</a:t>
             </a:r>
-          </a:p>
-          <a:p>
-            <a:r>
-              <a:rPr sz="1600">
+            <a:endParaRPr lang="ru-RU" sz="2400" b="1" dirty="0">
+              <a:solidFill>
+                <a:srgbClr val="66BB6A"/>
+              </a:solidFill>
+            </a:endParaRPr>
+          </a:p>
+          <a:p>
+            <a:pPr algn="ctr"/>
+            <a:endParaRPr sz="2400" b="1" dirty="0">
+              <a:solidFill>
+                <a:srgbClr val="66BB6A"/>
+              </a:solidFill>
+            </a:endParaRPr>
+          </a:p>
+          <a:p>
+            <a:endParaRPr lang="ru-RU" sz="1600" dirty="0">
+              <a:solidFill>
+                <a:srgbClr val="9AA6B8"/>
+              </a:solidFill>
+            </a:endParaRPr>
+          </a:p>
+          <a:p>
+            <a:r>
+              <a:rPr sz="1600" dirty="0">
                 <a:solidFill>
                   <a:srgbClr val="9AA6B8"/>
                 </a:solidFill>
               </a:rPr>
-              <a:t>Self-hoster</a:t>
-            </a:r>
-          </a:p>
-          <a:p>
-            <a:r>
-              <a:rPr sz="1600">
+              <a:t>Self-</a:t>
+            </a:r>
+            <a:r>
+              <a:rPr sz="1600" dirty="0" err="1">
                 <a:solidFill>
                   <a:srgbClr val="9AA6B8"/>
                 </a:solidFill>
               </a:rPr>
-              <a:t>Bot-hoster</a:t>
-            </a:r>
+              <a:t>hoster</a:t>
+            </a:r>
+            <a:endParaRPr sz="1600" dirty="0">
+              <a:solidFill>
+                <a:srgbClr val="9AA6B8"/>
+              </a:solidFill>
+            </a:endParaRPr>
+          </a:p>
+          <a:p>
+            <a:r>
+              <a:rPr sz="1600" dirty="0">
+                <a:solidFill>
+                  <a:srgbClr val="9AA6B8"/>
+                </a:solidFill>
+              </a:rPr>
+              <a:t>Bot-</a:t>
+            </a:r>
+            <a:r>
+              <a:rPr sz="1600" dirty="0" err="1">
+                <a:solidFill>
+                  <a:srgbClr val="9AA6B8"/>
+                </a:solidFill>
+              </a:rPr>
+              <a:t>hoster</a:t>
+            </a:r>
+            <a:endParaRPr sz="1600" dirty="0">
+              <a:solidFill>
+                <a:srgbClr val="9AA6B8"/>
+              </a:solidFill>
+            </a:endParaRPr>
           </a:p>
         </p:txBody>
       </p:sp>
@@ -4555,33 +4628,50 @@
           </a:fontRef>
         </p:style>
         <p:txBody>
-          <a:bodyPr rtlCol="0" anchor="t" tIns="164592" lIns="137160"/>
+          <a:bodyPr lIns="137160" tIns="164592" rtlCol="0" anchor="t"/>
           <a:lstStyle/>
           <a:p>
             <a:pPr algn="ctr"/>
             <a:r>
-              <a:rPr sz="2400" b="1">
+              <a:rPr sz="2400" b="1" dirty="0">
                 <a:solidFill>
                   <a:srgbClr val="FFB74D"/>
                 </a:solidFill>
               </a:rPr>
               <a:t>Consumers</a:t>
             </a:r>
+            <a:r>
+              <a:rPr lang="en-US" sz="2400" b="1" dirty="0">
+                <a:solidFill>
+                  <a:srgbClr val="FFB74D"/>
+                </a:solidFill>
+              </a:rPr>
+              <a:t> (B2C)</a:t>
+            </a:r>
+            <a:endParaRPr lang="ru-RU" sz="1600" i="1" dirty="0">
+              <a:solidFill>
+                <a:srgbClr val="FFB74D"/>
+              </a:solidFill>
+            </a:endParaRPr>
           </a:p>
           <a:p>
             <a:pPr algn="ctr"/>
-            <a:r>
-              <a:rPr sz="1600" i="1" dirty="0">
-                <a:solidFill>
-                  <a:srgbClr val="FFB74D"/>
-                </a:solidFill>
-              </a:rPr>
-              <a:t>B2C</a:t>
-            </a:r>
-          </a:p>
-          <a:p>
-            <a:r>
-              <a:rPr sz="1600">
+            <a:endParaRPr sz="1600" i="1" dirty="0">
+              <a:solidFill>
+                <a:srgbClr val="FFB74D"/>
+              </a:solidFill>
+            </a:endParaRPr>
+          </a:p>
+          <a:p>
+            <a:endParaRPr lang="en-US" sz="1600" dirty="0">
+              <a:solidFill>
+                <a:srgbClr val="9AA6B8"/>
+              </a:solidFill>
+            </a:endParaRPr>
+          </a:p>
+          <a:p>
+            <a:r>
+              <a:rPr sz="1600" dirty="0">
                 <a:solidFill>
                   <a:srgbClr val="9AA6B8"/>
                 </a:solidFill>
@@ -4591,7 +4681,7 @@
           </a:p>
           <a:p>
             <a:r>
-              <a:rPr sz="1600">
+              <a:rPr sz="1600" dirty="0">
                 <a:solidFill>
                   <a:srgbClr val="9AA6B8"/>
                 </a:solidFill>
@@ -4601,7 +4691,7 @@
           </a:p>
           <a:p>
             <a:r>
-              <a:rPr sz="1600">
+              <a:rPr sz="1600" dirty="0">
                 <a:solidFill>
                   <a:srgbClr val="9AA6B8"/>
                 </a:solidFill>
@@ -4611,7 +4701,7 @@
           </a:p>
           <a:p>
             <a:r>
-              <a:rPr sz="1600">
+              <a:rPr sz="1600" dirty="0">
                 <a:solidFill>
                   <a:srgbClr val="9AA6B8"/>
                 </a:solidFill>
@@ -4621,7 +4711,7 @@
           </a:p>
           <a:p>
             <a:r>
-              <a:rPr sz="1600">
+              <a:rPr sz="1600" dirty="0">
                 <a:solidFill>
                   <a:srgbClr val="9AA6B8"/>
                 </a:solidFill>
@@ -4631,7 +4721,7 @@
           </a:p>
           <a:p>
             <a:r>
-              <a:rPr sz="1600">
+              <a:rPr sz="1600" dirty="0">
                 <a:solidFill>
                   <a:srgbClr val="9AA6B8"/>
                 </a:solidFill>
@@ -4641,7 +4731,7 @@
           </a:p>
           <a:p>
             <a:r>
-              <a:rPr sz="1600">
+              <a:rPr sz="1600" dirty="0">
                 <a:solidFill>
                   <a:srgbClr val="9AA6B8"/>
                 </a:solidFill>
@@ -4687,12 +4777,12 @@
           </a:fontRef>
         </p:style>
         <p:txBody>
-          <a:bodyPr rtlCol="0" anchor="t" tIns="164592" lIns="137160"/>
+          <a:bodyPr lIns="137160" tIns="164592" rtlCol="0" anchor="t"/>
           <a:lstStyle/>
           <a:p>
             <a:pPr algn="ctr"/>
             <a:r>
-              <a:rPr sz="2400" b="1">
+              <a:rPr sz="2400" b="1" dirty="0">
                 <a:solidFill>
                   <a:srgbClr val="F46D9B"/>
                 </a:solidFill>
@@ -4703,32 +4793,136 @@
           <a:p>
             <a:pPr algn="ctr"/>
             <a:r>
-              <a:rPr sz="1600" i="1" dirty="0">
+              <a:rPr lang="en-US" sz="1600" i="1" dirty="0">
                 <a:solidFill>
                   <a:srgbClr val="F46D9B"/>
                 </a:solidFill>
               </a:rPr>
+              <a:t> </a:t>
+            </a:r>
+          </a:p>
+          <a:p>
+            <a:pPr algn="ctr"/>
+            <a:endParaRPr lang="en-US" sz="1600" i="1" dirty="0">
+              <a:solidFill>
+                <a:srgbClr val="F46D9B"/>
+              </a:solidFill>
+            </a:endParaRPr>
+          </a:p>
+          <a:p>
+            <a:pPr algn="ctr"/>
+            <a:endParaRPr lang="ru-RU" sz="1600" i="1" dirty="0">
+              <a:solidFill>
+                <a:srgbClr val="F46D9B"/>
+              </a:solidFill>
+            </a:endParaRPr>
+          </a:p>
+          <a:p>
+            <a:r>
+              <a:rPr lang="en-US" sz="1200" i="1" dirty="0">
+                <a:solidFill>
+                  <a:srgbClr val="F46D9B"/>
+                </a:solidFill>
+              </a:rPr>
+              <a:t>Ecosystem</a:t>
+            </a:r>
+            <a:r>
+              <a:rPr lang="en-US" sz="1600" i="1" dirty="0">
+                <a:solidFill>
+                  <a:srgbClr val="F46D9B"/>
+                </a:solidFill>
+              </a:rPr>
+              <a:t> </a:t>
+            </a:r>
+          </a:p>
+          <a:p>
+            <a:r>
+              <a:rPr lang="en-US" sz="1600" i="1" dirty="0">
+                <a:solidFill>
+                  <a:srgbClr val="F46D9B"/>
+                </a:solidFill>
+              </a:rPr>
+              <a:t>	</a:t>
+            </a:r>
+            <a:r>
+              <a:rPr sz="1600" dirty="0">
+                <a:solidFill>
+                  <a:srgbClr val="9AA6B8"/>
+                </a:solidFill>
+              </a:rPr>
+              <a:t>Skill Author</a:t>
+            </a:r>
+          </a:p>
+          <a:p>
+            <a:r>
+              <a:rPr lang="en-US" sz="1200" i="1" dirty="0">
+                <a:solidFill>
+                  <a:srgbClr val="F46D9B"/>
+                </a:solidFill>
+              </a:rPr>
+              <a:t>M2M</a:t>
+            </a:r>
+            <a:r>
+              <a:rPr lang="en-US" sz="1600" i="1" dirty="0">
+                <a:solidFill>
+                  <a:srgbClr val="F46D9B"/>
+                </a:solidFill>
+              </a:rPr>
+              <a:t> </a:t>
+            </a:r>
+          </a:p>
+          <a:p>
+            <a:r>
+              <a:rPr lang="en-US" sz="1600" i="1" dirty="0">
+                <a:solidFill>
+                  <a:srgbClr val="F46D9B"/>
+                </a:solidFill>
+              </a:rPr>
+              <a:t>	</a:t>
+            </a:r>
+            <a:r>
+              <a:rPr sz="1600" dirty="0">
+                <a:solidFill>
+                  <a:srgbClr val="9AA6B8"/>
+                </a:solidFill>
+              </a:rPr>
+              <a:t>Agent Integrator</a:t>
+            </a:r>
+          </a:p>
+          <a:p>
+            <a:r>
+              <a:rPr lang="en-US" sz="1200" i="1" dirty="0">
+                <a:solidFill>
+                  <a:srgbClr val="F46D9B"/>
+                </a:solidFill>
+              </a:rPr>
               <a:t>B2B2C</a:t>
             </a:r>
-          </a:p>
-          <a:p>
-            <a:r>
-              <a:rPr sz="1600">
+            <a:r>
+              <a:rPr lang="en-US" sz="1600" i="1" dirty="0">
+                <a:solidFill>
+                  <a:srgbClr val="F46D9B"/>
+                </a:solidFill>
+              </a:rPr>
+              <a:t> </a:t>
+            </a:r>
+          </a:p>
+          <a:p>
+            <a:r>
+              <a:rPr lang="en-US" sz="1600" i="1" dirty="0">
+                <a:solidFill>
+                  <a:srgbClr val="F46D9B"/>
+                </a:solidFill>
+              </a:rPr>
+              <a:t>	 </a:t>
+            </a:r>
+            <a:r>
+              <a:rPr sz="1600" dirty="0">
                 <a:solidFill>
                   <a:srgbClr val="9AA6B8"/>
                 </a:solidFill>
               </a:rPr>
               <a:t>Product Builder</a:t>
-            </a:r>
-          </a:p>
-          <a:p>
-            <a:r>
-              <a:rPr sz="1600">
-                <a:solidFill>
-                  <a:srgbClr val="9AA6B8"/>
-                </a:solidFill>
-              </a:rPr>
-              <a:t>Skill Author</a:t>
             </a:r>
           </a:p>
         </p:txBody>
@@ -4742,7 +4936,7 @@
 </file>
 
 <file path=ppt/slides/slide10.xml><?xml version="1.0" encoding="utf-8"?>
-<p:sld xmlns:a="http://schemas.openxmlformats.org/drawingml/2006/main" xmlns:p="http://schemas.openxmlformats.org/presentationml/2006/main" xmlns:r="http://schemas.openxmlformats.org/officeDocument/2006/relationships">
+<p:sld xmlns:a="http://schemas.openxmlformats.org/drawingml/2006/main" xmlns:r="http://schemas.openxmlformats.org/officeDocument/2006/relationships" xmlns:p="http://schemas.openxmlformats.org/presentationml/2006/main">
   <p:cSld>
     <p:bg>
       <p:bgPr>
@@ -4758,7 +4952,14 @@
         <p:cNvGrpSpPr/>
         <p:nvPr/>
       </p:nvGrpSpPr>
-      <p:grpSpPr/>
+      <p:grpSpPr>
+        <a:xfrm>
+          <a:off x="0" y="0"/>
+          <a:ext cx="0" cy="0"/>
+          <a:chOff x="0" y="0"/>
+          <a:chExt cx="0" cy="0"/>
+        </a:xfrm>
+      </p:grpSpPr>
       <p:sp>
         <p:nvSpPr>
           <p:cNvPr id="2" name="Rounded Rectangle 1"/>
@@ -4799,6 +5000,7 @@
           <a:lstStyle/>
           <a:p>
             <a:pPr algn="ctr"/>
+            <a:endParaRPr/>
           </a:p>
         </p:txBody>
       </p:sp>
@@ -4838,7 +5040,7 @@
           </a:fontRef>
         </p:style>
         <p:txBody>
-          <a:bodyPr rtlCol="0" anchor="ctr" tIns="27432" lIns="109728"/>
+          <a:bodyPr lIns="109728" tIns="27432" rtlCol="0" anchor="ctr"/>
           <a:lstStyle/>
           <a:p>
             <a:pPr algn="ctr"/>
@@ -4988,7 +5190,7 @@
           </a:fontRef>
         </p:style>
         <p:txBody>
-          <a:bodyPr rtlCol="0" anchor="ctr" lIns="137160" rIns="137160" tIns="109728" wrap="square"/>
+          <a:bodyPr wrap="square" lIns="137160" tIns="109728" rIns="137160" rtlCol="0" anchor="ctr"/>
           <a:lstStyle/>
           <a:p>
             <a:pPr algn="ctr"/>
@@ -5049,7 +5251,7 @@
           </a:fontRef>
         </p:style>
         <p:txBody>
-          <a:bodyPr rtlCol="0" anchor="ctr" lIns="137160" rIns="137160" tIns="109728" wrap="square"/>
+          <a:bodyPr wrap="square" lIns="137160" tIns="109728" rIns="137160" rtlCol="0" anchor="ctr"/>
           <a:lstStyle/>
           <a:p>
             <a:pPr algn="ctr"/>
@@ -5083,7 +5285,7 @@
 </file>
 
 <file path=ppt/slides/slide11.xml><?xml version="1.0" encoding="utf-8"?>
-<p:sld xmlns:a="http://schemas.openxmlformats.org/drawingml/2006/main" xmlns:p="http://schemas.openxmlformats.org/presentationml/2006/main" xmlns:r="http://schemas.openxmlformats.org/officeDocument/2006/relationships">
+<p:sld xmlns:a="http://schemas.openxmlformats.org/drawingml/2006/main" xmlns:r="http://schemas.openxmlformats.org/officeDocument/2006/relationships" xmlns:p="http://schemas.openxmlformats.org/presentationml/2006/main">
   <p:cSld>
     <p:bg>
       <p:bgPr>
@@ -5099,7 +5301,14 @@
         <p:cNvGrpSpPr/>
         <p:nvPr/>
       </p:nvGrpSpPr>
-      <p:grpSpPr/>
+      <p:grpSpPr>
+        <a:xfrm>
+          <a:off x="0" y="0"/>
+          <a:ext cx="0" cy="0"/>
+          <a:chOff x="0" y="0"/>
+          <a:chExt cx="0" cy="0"/>
+        </a:xfrm>
+      </p:grpSpPr>
       <p:sp>
         <p:nvSpPr>
           <p:cNvPr id="2" name="Rounded Rectangle 1"/>
@@ -5140,6 +5349,7 @@
           <a:lstStyle/>
           <a:p>
             <a:pPr algn="ctr"/>
+            <a:endParaRPr/>
           </a:p>
         </p:txBody>
       </p:sp>
@@ -5179,7 +5389,7 @@
           </a:fontRef>
         </p:style>
         <p:txBody>
-          <a:bodyPr rtlCol="0" anchor="ctr" tIns="27432" lIns="109728"/>
+          <a:bodyPr lIns="109728" tIns="27432" rtlCol="0" anchor="ctr"/>
           <a:lstStyle/>
           <a:p>
             <a:pPr algn="ctr"/>
@@ -5222,7 +5432,7 @@
                   <a:srgbClr val="E8EDF4"/>
                 </a:solidFill>
               </a:rPr>
-              <a:t>Product Builder</a:t>
+              <a:t>Skill Author</a:t>
             </a:r>
           </a:p>
         </p:txBody>
@@ -5255,7 +5465,7 @@
                   <a:srgbClr val="9AA6B8"/>
                 </a:solidFill>
               </a:rPr>
-              <a:t>Builds their own product using jiuwenswarm as its backend.</a:t>
+              <a:t>Writes, packages, and distributes skills.</a:t>
             </a:r>
           </a:p>
         </p:txBody>
@@ -5296,7 +5506,7 @@
           </a:fontRef>
         </p:style>
         <p:txBody>
-          <a:bodyPr rtlCol="0" anchor="ctr" lIns="137160" rIns="137160" tIns="109728" wrap="square"/>
+          <a:bodyPr wrap="square" lIns="137160" tIns="109728" rIns="137160" rtlCol="0" anchor="ctr"/>
           <a:lstStyle/>
           <a:p>
             <a:pPr algn="ctr"/>
@@ -5306,7 +5516,7 @@
                   <a:srgbClr val="4E9EFF"/>
                 </a:solidFill>
               </a:rPr>
-              <a:t>Connection &amp; Security</a:t>
+              <a:t>Authoring &amp; Testing</a:t>
             </a:r>
           </a:p>
           <a:p>
@@ -5316,7 +5526,7 @@
                   <a:srgbClr val="9AA6B8"/>
                 </a:solidFill>
               </a:rPr>
-              <a:t>no API auth; weak origin checks</a:t>
+              <a:t>no clear entry point; only live-chat testing</a:t>
             </a:r>
           </a:p>
         </p:txBody>
@@ -5357,7 +5567,7 @@
           </a:fontRef>
         </p:style>
         <p:txBody>
-          <a:bodyPr rtlCol="0" anchor="ctr" lIns="137160" rIns="137160" tIns="109728" wrap="square"/>
+          <a:bodyPr wrap="square" lIns="137160" tIns="109728" rIns="137160" rtlCol="0" anchor="ctr"/>
           <a:lstStyle/>
           <a:p>
             <a:pPr algn="ctr"/>
@@ -5367,7 +5577,7 @@
                   <a:srgbClr val="4E9EFF"/>
                 </a:solidFill>
               </a:rPr>
-              <a:t>Transport &amp; Protocol</a:t>
+              <a:t>Marketplace</a:t>
             </a:r>
           </a:p>
           <a:p>
@@ -5377,7 +5587,7 @@
                   <a:srgbClr val="9AA6B8"/>
                 </a:solidFill>
               </a:rPr>
-              <a:t>WebSocket-only; prose spec, no SDK</a:t>
+              <a:t>no ratings, usage or freshness</a:t>
             </a:r>
           </a:p>
         </p:txBody>
@@ -5418,7 +5628,7 @@
           </a:fontRef>
         </p:style>
         <p:txBody>
-          <a:bodyPr rtlCol="0" anchor="ctr" lIns="137160" rIns="137160" tIns="109728" wrap="square"/>
+          <a:bodyPr wrap="square" lIns="137160" tIns="109728" rIns="137160" rtlCol="0" anchor="ctr"/>
           <a:lstStyle/>
           <a:p>
             <a:pPr algn="ctr"/>
@@ -5428,7 +5638,7 @@
                   <a:srgbClr val="4E9EFF"/>
                 </a:solidFill>
               </a:rPr>
-              <a:t>Integration &amp; Tooling</a:t>
+              <a:t>Packaging &amp; Distribution</a:t>
             </a:r>
           </a:p>
           <a:p>
@@ -5438,7 +5648,7 @@
                   <a:srgbClr val="9AA6B8"/>
                 </a:solidFill>
               </a:rPr>
-              <a:t>no dev stubs; only shell hooks</a:t>
+              <a:t>updates can't be reviewed or rolled back</a:t>
             </a:r>
           </a:p>
         </p:txBody>
@@ -5452,7 +5662,260 @@
 </file>
 
 <file path=ppt/slides/slide12.xml><?xml version="1.0" encoding="utf-8"?>
-<p:sld xmlns:a="http://schemas.openxmlformats.org/drawingml/2006/main" xmlns:p="http://schemas.openxmlformats.org/presentationml/2006/main" xmlns:r="http://schemas.openxmlformats.org/officeDocument/2006/relationships">
+<p:sld xmlns:a="http://schemas.openxmlformats.org/drawingml/2006/main" xmlns:r="http://schemas.openxmlformats.org/officeDocument/2006/relationships" xmlns:p="http://schemas.openxmlformats.org/presentationml/2006/main">
+  <p:cSld>
+    <p:spTree>
+      <p:nvGrpSpPr>
+        <p:cNvPr id="1" name=""/>
+        <p:cNvGrpSpPr/>
+        <p:nvPr/>
+      </p:nvGrpSpPr>
+      <p:grpSpPr>
+        <a:xfrm>
+          <a:off x="0" y="0"/>
+          <a:ext cx="0" cy="0"/>
+          <a:chOff x="0" y="0"/>
+          <a:chExt cx="0" cy="0"/>
+        </a:xfrm>
+      </p:grpSpPr>
+      <p:sp>
+        <p:nvSpPr>
+          <p:cNvPr id="2" name="Rounded Rectangle 1"/>
+          <p:cNvSpPr/>
+          <p:nvPr/>
+        </p:nvSpPr>
+        <p:spPr>
+          <a:xfrm>
+            <a:off x="0" y="0"/>
+            <a:ext cx="12191695" cy="6858000"/>
+          </a:xfrm>
+          <a:prstGeom prst="roundRect">
+            <a:avLst/>
+          </a:prstGeom>
+          <a:solidFill>
+            <a:srgbClr val="0F1420"/>
+          </a:solidFill>
+          <a:ln>
+            <a:noFill/>
+          </a:ln>
+        </p:spPr>
+        <p:style>
+          <a:lnRef idx="1">
+            <a:schemeClr val="accent1"/>
+          </a:lnRef>
+          <a:fillRef idx="3">
+            <a:schemeClr val="accent1"/>
+          </a:fillRef>
+          <a:effectRef idx="2">
+            <a:schemeClr val="accent1"/>
+          </a:effectRef>
+          <a:fontRef idx="minor">
+            <a:schemeClr val="lt1"/>
+          </a:fontRef>
+        </p:style>
+        <p:txBody>
+          <a:bodyPr rtlCol="0" anchor="ctr"/>
+          <a:lstStyle/>
+          <a:p>
+            <a:pPr algn="ctr"/>
+            <a:endParaRPr/>
+          </a:p>
+        </p:txBody>
+      </p:sp>
+      <p:sp>
+        <p:nvSpPr>
+          <p:cNvPr id="3" name="Rounded Rectangle 2"/>
+          <p:cNvSpPr/>
+          <p:nvPr/>
+        </p:nvSpPr>
+        <p:spPr>
+          <a:xfrm>
+            <a:off x="822960" y="457200"/>
+            <a:ext cx="3291840" cy="384048"/>
+          </a:xfrm>
+          <a:prstGeom prst="roundRect">
+            <a:avLst/>
+          </a:prstGeom>
+          <a:solidFill>
+            <a:srgbClr val="F46D9B"/>
+          </a:solidFill>
+          <a:ln>
+            <a:noFill/>
+          </a:ln>
+        </p:spPr>
+        <p:style>
+          <a:lnRef idx="1">
+            <a:schemeClr val="accent1"/>
+          </a:lnRef>
+          <a:fillRef idx="3">
+            <a:schemeClr val="accent1"/>
+          </a:fillRef>
+          <a:effectRef idx="2">
+            <a:schemeClr val="accent1"/>
+          </a:effectRef>
+          <a:fontRef idx="minor">
+            <a:schemeClr val="lt1"/>
+          </a:fontRef>
+        </p:style>
+        <p:txBody>
+          <a:bodyPr lIns="109728" tIns="27432" rtlCol="0" anchor="ctr"/>
+          <a:lstStyle/>
+          <a:p>
+            <a:pPr algn="ctr"/>
+            <a:r>
+              <a:rPr sz="1300" b="1">
+                <a:solidFill>
+                  <a:srgbClr val="0F1420"/>
+                </a:solidFill>
+              </a:rPr>
+              <a:t>BUILDERS</a:t>
+            </a:r>
+          </a:p>
+        </p:txBody>
+      </p:sp>
+      <p:sp>
+        <p:nvSpPr>
+          <p:cNvPr id="4" name="TextBox 3"/>
+          <p:cNvSpPr txBox="1"/>
+          <p:nvPr/>
+        </p:nvSpPr>
+        <p:spPr>
+          <a:xfrm>
+            <a:off x="822960" y="1051560"/>
+            <a:ext cx="10789920" cy="914400"/>
+          </a:xfrm>
+          <a:prstGeom prst="rect">
+            <a:avLst/>
+          </a:prstGeom>
+          <a:noFill/>
+        </p:spPr>
+        <p:txBody>
+          <a:bodyPr wrap="square">
+            <a:spAutoFit/>
+          </a:bodyPr>
+          <a:lstStyle/>
+          <a:p>
+            <a:r>
+              <a:rPr sz="4600" b="1">
+                <a:solidFill>
+                  <a:srgbClr val="E8EDF4"/>
+                </a:solidFill>
+              </a:rPr>
+              <a:t>Agent Integrator</a:t>
+            </a:r>
+          </a:p>
+        </p:txBody>
+      </p:sp>
+      <p:sp>
+        <p:nvSpPr>
+          <p:cNvPr id="5" name="TextBox 4"/>
+          <p:cNvSpPr txBox="1"/>
+          <p:nvPr/>
+        </p:nvSpPr>
+        <p:spPr>
+          <a:xfrm>
+            <a:off x="841248" y="1965960"/>
+            <a:ext cx="10789920" cy="411480"/>
+          </a:xfrm>
+          <a:prstGeom prst="rect">
+            <a:avLst/>
+          </a:prstGeom>
+          <a:noFill/>
+        </p:spPr>
+        <p:txBody>
+          <a:bodyPr wrap="square">
+            <a:spAutoFit/>
+          </a:bodyPr>
+          <a:lstStyle/>
+          <a:p>
+            <a:r>
+              <a:rPr sz="1800" b="0">
+                <a:solidFill>
+                  <a:srgbClr val="9AA6B8"/>
+                </a:solidFill>
+              </a:rPr>
+              <a:t>Wires jiuwenswarm into a multi-agent system via the A2A protocol.</a:t>
+            </a:r>
+          </a:p>
+        </p:txBody>
+      </p:sp>
+      <p:sp>
+        <p:nvSpPr>
+          <p:cNvPr id="11" name="Rounded Rectangle 10">
+            <a:extLst>
+              <a:ext uri="{FF2B5EF4-FFF2-40B4-BE49-F238E27FC236}">
+                <a16:creationId xmlns:a16="http://schemas.microsoft.com/office/drawing/2014/main" id="{142A2D31-BF03-DAC4-08A1-8F6BADA696A2}"/>
+              </a:ext>
+            </a:extLst>
+          </p:cNvPr>
+          <p:cNvSpPr/>
+          <p:nvPr/>
+        </p:nvSpPr>
+        <p:spPr>
+          <a:xfrm>
+            <a:off x="822960" y="2880360"/>
+            <a:ext cx="3322320" cy="3474720"/>
+          </a:xfrm>
+          <a:prstGeom prst="roundRect">
+            <a:avLst/>
+          </a:prstGeom>
+          <a:solidFill>
+            <a:srgbClr val="1E2A3A"/>
+          </a:solidFill>
+          <a:ln>
+            <a:noFill/>
+          </a:ln>
+        </p:spPr>
+        <p:style>
+          <a:lnRef idx="1">
+            <a:schemeClr val="accent1"/>
+          </a:lnRef>
+          <a:fillRef idx="3">
+            <a:schemeClr val="accent1"/>
+          </a:fillRef>
+          <a:effectRef idx="2">
+            <a:schemeClr val="accent1"/>
+          </a:effectRef>
+          <a:fontRef idx="minor">
+            <a:schemeClr val="lt1"/>
+          </a:fontRef>
+        </p:style>
+        <p:txBody>
+          <a:bodyPr wrap="square" lIns="137160" tIns="109728" rIns="137160" rtlCol="0" anchor="ctr"/>
+          <a:lstStyle/>
+          <a:p>
+            <a:pPr algn="ctr"/>
+            <a:r>
+              <a:rPr sz="1700" b="1" dirty="0">
+                <a:solidFill>
+                  <a:srgbClr val="E07B7B"/>
+                </a:solidFill>
+              </a:rPr>
+              <a:t> (TBD)</a:t>
+            </a:r>
+          </a:p>
+          <a:p>
+            <a:r>
+              <a:rPr sz="1350" dirty="0">
+                <a:solidFill>
+                  <a:srgbClr val="9AA6B8"/>
+                </a:solidFill>
+              </a:rPr>
+              <a:t>TBD - not built yet</a:t>
+            </a:r>
+          </a:p>
+        </p:txBody>
+      </p:sp>
+    </p:spTree>
+  </p:cSld>
+  <p:clrMapOvr>
+    <a:masterClrMapping/>
+  </p:clrMapOvr>
+</p:sld>
+</file>
+
+<file path=ppt/slides/slide13.xml><?xml version="1.0" encoding="utf-8"?>
+<p:sld xmlns:a="http://schemas.openxmlformats.org/drawingml/2006/main" xmlns:r="http://schemas.openxmlformats.org/officeDocument/2006/relationships" xmlns:p="http://schemas.openxmlformats.org/presentationml/2006/main">
   <p:cSld>
     <p:bg>
       <p:bgPr>
@@ -5468,7 +5931,14 @@
         <p:cNvGrpSpPr/>
         <p:nvPr/>
       </p:nvGrpSpPr>
-      <p:grpSpPr/>
+      <p:grpSpPr>
+        <a:xfrm>
+          <a:off x="0" y="0"/>
+          <a:ext cx="0" cy="0"/>
+          <a:chOff x="0" y="0"/>
+          <a:chExt cx="0" cy="0"/>
+        </a:xfrm>
+      </p:grpSpPr>
       <p:sp>
         <p:nvSpPr>
           <p:cNvPr id="2" name="Rounded Rectangle 1"/>
@@ -5509,6 +5979,7 @@
           <a:lstStyle/>
           <a:p>
             <a:pPr algn="ctr"/>
+            <a:endParaRPr/>
           </a:p>
         </p:txBody>
       </p:sp>
@@ -5548,7 +6019,7 @@
           </a:fontRef>
         </p:style>
         <p:txBody>
-          <a:bodyPr rtlCol="0" anchor="ctr" tIns="27432" lIns="109728"/>
+          <a:bodyPr lIns="109728" tIns="27432" rtlCol="0" anchor="ctr"/>
           <a:lstStyle/>
           <a:p>
             <a:pPr algn="ctr"/>
@@ -5591,7 +6062,7 @@
                   <a:srgbClr val="E8EDF4"/>
                 </a:solidFill>
               </a:rPr>
-              <a:t>Skill Author</a:t>
+              <a:t>Product Builder</a:t>
             </a:r>
           </a:p>
         </p:txBody>
@@ -5624,7 +6095,7 @@
                   <a:srgbClr val="9AA6B8"/>
                 </a:solidFill>
               </a:rPr>
-              <a:t>Writes, packages, and distributes skills.</a:t>
+              <a:t>Builds their own product using jiuwenswarm as its backend.</a:t>
             </a:r>
           </a:p>
         </p:txBody>
@@ -5665,7 +6136,7 @@
           </a:fontRef>
         </p:style>
         <p:txBody>
-          <a:bodyPr rtlCol="0" anchor="ctr" lIns="137160" rIns="137160" tIns="109728" wrap="square"/>
+          <a:bodyPr wrap="square" lIns="137160" tIns="109728" rIns="137160" rtlCol="0" anchor="ctr"/>
           <a:lstStyle/>
           <a:p>
             <a:pPr algn="ctr"/>
@@ -5675,7 +6146,7 @@
                   <a:srgbClr val="4E9EFF"/>
                 </a:solidFill>
               </a:rPr>
-              <a:t>Authoring &amp; Testing</a:t>
+              <a:t>Connection &amp; Security</a:t>
             </a:r>
           </a:p>
           <a:p>
@@ -5685,7 +6156,7 @@
                   <a:srgbClr val="9AA6B8"/>
                 </a:solidFill>
               </a:rPr>
-              <a:t>no clear entry point; only live-chat testing</a:t>
+              <a:t>no API auth; weak origin checks</a:t>
             </a:r>
           </a:p>
         </p:txBody>
@@ -5726,7 +6197,7 @@
           </a:fontRef>
         </p:style>
         <p:txBody>
-          <a:bodyPr rtlCol="0" anchor="ctr" lIns="137160" rIns="137160" tIns="109728" wrap="square"/>
+          <a:bodyPr wrap="square" lIns="137160" tIns="109728" rIns="137160" rtlCol="0" anchor="ctr"/>
           <a:lstStyle/>
           <a:p>
             <a:pPr algn="ctr"/>
@@ -5736,7 +6207,7 @@
                   <a:srgbClr val="4E9EFF"/>
                 </a:solidFill>
               </a:rPr>
-              <a:t>Marketplace</a:t>
+              <a:t>Transport &amp; Protocol</a:t>
             </a:r>
           </a:p>
           <a:p>
@@ -5746,7 +6217,7 @@
                   <a:srgbClr val="9AA6B8"/>
                 </a:solidFill>
               </a:rPr>
-              <a:t>no ratings, usage or freshness</a:t>
+              <a:t>WebSocket-only; prose spec, no SDK</a:t>
             </a:r>
           </a:p>
         </p:txBody>
@@ -5787,7 +6258,7 @@
           </a:fontRef>
         </p:style>
         <p:txBody>
-          <a:bodyPr rtlCol="0" anchor="ctr" lIns="137160" rIns="137160" tIns="109728" wrap="square"/>
+          <a:bodyPr wrap="square" lIns="137160" tIns="109728" rIns="137160" rtlCol="0" anchor="ctr"/>
           <a:lstStyle/>
           <a:p>
             <a:pPr algn="ctr"/>
@@ -5797,7 +6268,7 @@
                   <a:srgbClr val="4E9EFF"/>
                 </a:solidFill>
               </a:rPr>
-              <a:t>Packaging &amp; Distribution</a:t>
+              <a:t>Integration &amp; Tooling</a:t>
             </a:r>
           </a:p>
           <a:p>
@@ -5807,7 +6278,7 @@
                   <a:srgbClr val="9AA6B8"/>
                 </a:solidFill>
               </a:rPr>
-              <a:t>updates can't be reviewed or rolled back</a:t>
+              <a:t>no dev stubs; only shell hooks</a:t>
             </a:r>
           </a:p>
         </p:txBody>
@@ -5821,7 +6292,7 @@
 </file>
 
 <file path=ppt/slides/slide2.xml><?xml version="1.0" encoding="utf-8"?>
-<p:sld xmlns:a="http://schemas.openxmlformats.org/drawingml/2006/main" xmlns:p="http://schemas.openxmlformats.org/presentationml/2006/main" xmlns:r="http://schemas.openxmlformats.org/officeDocument/2006/relationships">
+<p:sld xmlns:a="http://schemas.openxmlformats.org/drawingml/2006/main" xmlns:r="http://schemas.openxmlformats.org/officeDocument/2006/relationships" xmlns:p="http://schemas.openxmlformats.org/presentationml/2006/main">
   <p:cSld>
     <p:bg>
       <p:bgPr>
@@ -5837,7 +6308,14 @@
         <p:cNvGrpSpPr/>
         <p:nvPr/>
       </p:nvGrpSpPr>
-      <p:grpSpPr/>
+      <p:grpSpPr>
+        <a:xfrm>
+          <a:off x="0" y="0"/>
+          <a:ext cx="0" cy="0"/>
+          <a:chOff x="0" y="0"/>
+          <a:chExt cx="0" cy="0"/>
+        </a:xfrm>
+      </p:grpSpPr>
       <p:sp>
         <p:nvSpPr>
           <p:cNvPr id="2" name="Rounded Rectangle 1"/>
@@ -5878,6 +6356,7 @@
           <a:lstStyle/>
           <a:p>
             <a:pPr algn="ctr"/>
+            <a:endParaRPr/>
           </a:p>
         </p:txBody>
       </p:sp>
@@ -5917,7 +6396,7 @@
           </a:fontRef>
         </p:style>
         <p:txBody>
-          <a:bodyPr rtlCol="0" anchor="ctr" tIns="27432" lIns="109728"/>
+          <a:bodyPr lIns="109728" tIns="27432" rtlCol="0" anchor="ctr"/>
           <a:lstStyle/>
           <a:p>
             <a:pPr algn="ctr"/>
@@ -6034,7 +6513,7 @@
           </a:fontRef>
         </p:style>
         <p:txBody>
-          <a:bodyPr rtlCol="0" anchor="ctr" lIns="137160" rIns="137160" tIns="109728" wrap="square"/>
+          <a:bodyPr wrap="square" lIns="137160" tIns="109728" rIns="137160" rtlCol="0" anchor="ctr"/>
           <a:lstStyle/>
           <a:p>
             <a:pPr algn="ctr"/>
@@ -6095,7 +6574,7 @@
           </a:fontRef>
         </p:style>
         <p:txBody>
-          <a:bodyPr rtlCol="0" anchor="ctr" lIns="137160" rIns="137160" tIns="109728" wrap="square"/>
+          <a:bodyPr wrap="square" lIns="137160" tIns="109728" rIns="137160" rtlCol="0" anchor="ctr"/>
           <a:lstStyle/>
           <a:p>
             <a:pPr algn="ctr"/>
@@ -6156,7 +6635,7 @@
           </a:fontRef>
         </p:style>
         <p:txBody>
-          <a:bodyPr rtlCol="0" anchor="ctr" lIns="137160" rIns="137160" tIns="109728" wrap="square"/>
+          <a:bodyPr wrap="square" lIns="137160" tIns="109728" rIns="137160" rtlCol="0" anchor="ctr"/>
           <a:lstStyle/>
           <a:p>
             <a:pPr algn="ctr"/>
@@ -6217,7 +6696,7 @@
           </a:fontRef>
         </p:style>
         <p:txBody>
-          <a:bodyPr rtlCol="0" anchor="ctr" lIns="137160" rIns="137160" tIns="109728" wrap="square"/>
+          <a:bodyPr wrap="square" lIns="137160" tIns="109728" rIns="137160" rtlCol="0" anchor="ctr"/>
           <a:lstStyle/>
           <a:p>
             <a:pPr algn="ctr"/>
@@ -6278,7 +6757,7 @@
           </a:fontRef>
         </p:style>
         <p:txBody>
-          <a:bodyPr rtlCol="0" anchor="ctr" lIns="137160" rIns="137160" tIns="109728" wrap="square"/>
+          <a:bodyPr wrap="square" lIns="137160" tIns="109728" rIns="137160" rtlCol="0" anchor="ctr"/>
           <a:lstStyle/>
           <a:p>
             <a:pPr algn="ctr"/>
@@ -6312,7 +6791,7 @@
 </file>
 
 <file path=ppt/slides/slide3.xml><?xml version="1.0" encoding="utf-8"?>
-<p:sld xmlns:a="http://schemas.openxmlformats.org/drawingml/2006/main" xmlns:p="http://schemas.openxmlformats.org/presentationml/2006/main" xmlns:r="http://schemas.openxmlformats.org/officeDocument/2006/relationships">
+<p:sld xmlns:a="http://schemas.openxmlformats.org/drawingml/2006/main" xmlns:r="http://schemas.openxmlformats.org/officeDocument/2006/relationships" xmlns:p="http://schemas.openxmlformats.org/presentationml/2006/main">
   <p:cSld>
     <p:bg>
       <p:bgPr>
@@ -6328,7 +6807,14 @@
         <p:cNvGrpSpPr/>
         <p:nvPr/>
       </p:nvGrpSpPr>
-      <p:grpSpPr/>
+      <p:grpSpPr>
+        <a:xfrm>
+          <a:off x="0" y="0"/>
+          <a:ext cx="0" cy="0"/>
+          <a:chOff x="0" y="0"/>
+          <a:chExt cx="0" cy="0"/>
+        </a:xfrm>
+      </p:grpSpPr>
       <p:sp>
         <p:nvSpPr>
           <p:cNvPr id="2" name="Rounded Rectangle 1"/>
@@ -6369,6 +6855,7 @@
           <a:lstStyle/>
           <a:p>
             <a:pPr algn="ctr"/>
+            <a:endParaRPr/>
           </a:p>
         </p:txBody>
       </p:sp>
@@ -6408,7 +6895,7 @@
           </a:fontRef>
         </p:style>
         <p:txBody>
-          <a:bodyPr rtlCol="0" anchor="ctr" tIns="27432" lIns="109728"/>
+          <a:bodyPr lIns="109728" tIns="27432" rtlCol="0" anchor="ctr"/>
           <a:lstStyle/>
           <a:p>
             <a:pPr algn="ctr"/>
@@ -6558,7 +7045,7 @@
           </a:fontRef>
         </p:style>
         <p:txBody>
-          <a:bodyPr rtlCol="0" anchor="ctr" lIns="137160" rIns="137160" tIns="109728" wrap="square"/>
+          <a:bodyPr wrap="square" lIns="137160" tIns="109728" rIns="137160" rtlCol="0" anchor="ctr"/>
           <a:lstStyle/>
           <a:p>
             <a:pPr algn="ctr"/>
@@ -6619,7 +7106,7 @@
           </a:fontRef>
         </p:style>
         <p:txBody>
-          <a:bodyPr rtlCol="0" anchor="ctr" lIns="137160" rIns="137160" tIns="109728" wrap="square"/>
+          <a:bodyPr wrap="square" lIns="137160" tIns="109728" rIns="137160" rtlCol="0" anchor="ctr"/>
           <a:lstStyle/>
           <a:p>
             <a:pPr algn="ctr"/>
@@ -6680,7 +7167,7 @@
           </a:fontRef>
         </p:style>
         <p:txBody>
-          <a:bodyPr rtlCol="0" anchor="ctr" lIns="137160" rIns="137160" tIns="109728" wrap="square"/>
+          <a:bodyPr wrap="square" lIns="137160" tIns="109728" rIns="137160" rtlCol="0" anchor="ctr"/>
           <a:lstStyle/>
           <a:p>
             <a:pPr algn="ctr"/>
@@ -6741,7 +7228,7 @@
           </a:fontRef>
         </p:style>
         <p:txBody>
-          <a:bodyPr rtlCol="0" anchor="ctr" lIns="137160" rIns="137160" tIns="109728" wrap="square"/>
+          <a:bodyPr wrap="square" lIns="137160" tIns="109728" rIns="137160" rtlCol="0" anchor="ctr"/>
           <a:lstStyle/>
           <a:p>
             <a:pPr algn="ctr"/>
@@ -6802,7 +7289,7 @@
           </a:fontRef>
         </p:style>
         <p:txBody>
-          <a:bodyPr rtlCol="0" anchor="ctr" lIns="137160" rIns="137160" tIns="109728" wrap="square"/>
+          <a:bodyPr wrap="square" lIns="137160" tIns="109728" rIns="137160" rtlCol="0" anchor="ctr"/>
           <a:lstStyle/>
           <a:p>
             <a:pPr algn="ctr"/>
@@ -6829,7 +7316,7 @@
       </p:sp>
       <p:sp>
         <p:nvSpPr>
-          <p:cNvPr id="11" name="Rounded Rectangle 10"/>
+          <p:cNvPr id="12" name="Rounded Rectangle 10"/>
           <p:cNvSpPr/>
           <p:nvPr/>
         </p:nvSpPr>
@@ -6863,7 +7350,7 @@
           </a:fontRef>
         </p:style>
         <p:txBody>
-          <a:bodyPr rtlCol="0" anchor="ctr" lIns="137160" rIns="137160" tIns="109728" wrap="square"/>
+          <a:bodyPr wrap="square" lIns="137160" tIns="109728" rIns="137160" rtlCol="0" anchor="ctr"/>
           <a:lstStyle/>
           <a:p>
             <a:pPr algn="ctr"/>
@@ -6897,7 +7384,7 @@
 </file>
 
 <file path=ppt/slides/slide4.xml><?xml version="1.0" encoding="utf-8"?>
-<p:sld xmlns:a="http://schemas.openxmlformats.org/drawingml/2006/main" xmlns:p="http://schemas.openxmlformats.org/presentationml/2006/main" xmlns:r="http://schemas.openxmlformats.org/officeDocument/2006/relationships">
+<p:sld xmlns:a="http://schemas.openxmlformats.org/drawingml/2006/main" xmlns:r="http://schemas.openxmlformats.org/officeDocument/2006/relationships" xmlns:p="http://schemas.openxmlformats.org/presentationml/2006/main">
   <p:cSld>
     <p:bg>
       <p:bgPr>
@@ -6913,7 +7400,14 @@
         <p:cNvGrpSpPr/>
         <p:nvPr/>
       </p:nvGrpSpPr>
-      <p:grpSpPr/>
+      <p:grpSpPr>
+        <a:xfrm>
+          <a:off x="0" y="0"/>
+          <a:ext cx="0" cy="0"/>
+          <a:chOff x="0" y="0"/>
+          <a:chExt cx="0" cy="0"/>
+        </a:xfrm>
+      </p:grpSpPr>
       <p:sp>
         <p:nvSpPr>
           <p:cNvPr id="2" name="Rounded Rectangle 1"/>
@@ -6954,6 +7448,7 @@
           <a:lstStyle/>
           <a:p>
             <a:pPr algn="ctr"/>
+            <a:endParaRPr/>
           </a:p>
         </p:txBody>
       </p:sp>
@@ -6993,7 +7488,7 @@
           </a:fontRef>
         </p:style>
         <p:txBody>
-          <a:bodyPr rtlCol="0" anchor="ctr" tIns="27432" lIns="109728"/>
+          <a:bodyPr lIns="109728" tIns="27432" rtlCol="0" anchor="ctr"/>
           <a:lstStyle/>
           <a:p>
             <a:pPr algn="ctr"/>
@@ -7110,7 +7605,7 @@
           </a:fontRef>
         </p:style>
         <p:txBody>
-          <a:bodyPr rtlCol="0" anchor="ctr" lIns="137160" rIns="137160" tIns="109728" wrap="square"/>
+          <a:bodyPr wrap="square" lIns="137160" tIns="109728" rIns="137160" rtlCol="0" anchor="ctr"/>
           <a:lstStyle/>
           <a:p>
             <a:pPr algn="ctr"/>
@@ -7171,7 +7666,7 @@
           </a:fontRef>
         </p:style>
         <p:txBody>
-          <a:bodyPr rtlCol="0" anchor="ctr" lIns="137160" rIns="137160" tIns="109728" wrap="square"/>
+          <a:bodyPr wrap="square" lIns="137160" tIns="109728" rIns="137160" rtlCol="0" anchor="ctr"/>
           <a:lstStyle/>
           <a:p>
             <a:pPr algn="ctr"/>
@@ -7205,7 +7700,7 @@
 </file>
 
 <file path=ppt/slides/slide5.xml><?xml version="1.0" encoding="utf-8"?>
-<p:sld xmlns:a="http://schemas.openxmlformats.org/drawingml/2006/main" xmlns:p="http://schemas.openxmlformats.org/presentationml/2006/main" xmlns:r="http://schemas.openxmlformats.org/officeDocument/2006/relationships">
+<p:sld xmlns:a="http://schemas.openxmlformats.org/drawingml/2006/main" xmlns:r="http://schemas.openxmlformats.org/officeDocument/2006/relationships" xmlns:p="http://schemas.openxmlformats.org/presentationml/2006/main">
   <p:cSld>
     <p:bg>
       <p:bgPr>
@@ -7221,7 +7716,14 @@
         <p:cNvGrpSpPr/>
         <p:nvPr/>
       </p:nvGrpSpPr>
-      <p:grpSpPr/>
+      <p:grpSpPr>
+        <a:xfrm>
+          <a:off x="0" y="0"/>
+          <a:ext cx="0" cy="0"/>
+          <a:chOff x="0" y="0"/>
+          <a:chExt cx="0" cy="0"/>
+        </a:xfrm>
+      </p:grpSpPr>
       <p:sp>
         <p:nvSpPr>
           <p:cNvPr id="2" name="Rounded Rectangle 1"/>
@@ -7262,6 +7764,7 @@
           <a:lstStyle/>
           <a:p>
             <a:pPr algn="ctr"/>
+            <a:endParaRPr/>
           </a:p>
         </p:txBody>
       </p:sp>
@@ -7301,7 +7804,7 @@
           </a:fontRef>
         </p:style>
         <p:txBody>
-          <a:bodyPr rtlCol="0" anchor="ctr" tIns="27432" lIns="109728"/>
+          <a:bodyPr lIns="109728" tIns="27432" rtlCol="0" anchor="ctr"/>
           <a:lstStyle/>
           <a:p>
             <a:pPr algn="ctr"/>
@@ -7451,7 +7954,7 @@
           </a:fontRef>
         </p:style>
         <p:txBody>
-          <a:bodyPr rtlCol="0" anchor="ctr" lIns="137160" rIns="137160" tIns="109728" wrap="square"/>
+          <a:bodyPr wrap="square" lIns="137160" tIns="109728" rIns="137160" rtlCol="0" anchor="ctr"/>
           <a:lstStyle/>
           <a:p>
             <a:pPr algn="ctr"/>
@@ -7512,7 +8015,7 @@
           </a:fontRef>
         </p:style>
         <p:txBody>
-          <a:bodyPr rtlCol="0" anchor="ctr" lIns="137160" rIns="137160" tIns="109728" wrap="square"/>
+          <a:bodyPr wrap="square" lIns="137160" tIns="109728" rIns="137160" rtlCol="0" anchor="ctr"/>
           <a:lstStyle/>
           <a:p>
             <a:pPr algn="ctr"/>
@@ -7573,7 +8076,7 @@
           </a:fontRef>
         </p:style>
         <p:txBody>
-          <a:bodyPr rtlCol="0" anchor="ctr" lIns="137160" rIns="137160" tIns="109728" wrap="square"/>
+          <a:bodyPr wrap="square" lIns="137160" tIns="109728" rIns="137160" rtlCol="0" anchor="ctr"/>
           <a:lstStyle/>
           <a:p>
             <a:pPr algn="ctr"/>
@@ -7634,7 +8137,7 @@
           </a:fontRef>
         </p:style>
         <p:txBody>
-          <a:bodyPr rtlCol="0" anchor="ctr" lIns="137160" rIns="137160" tIns="109728" wrap="square"/>
+          <a:bodyPr wrap="square" lIns="137160" tIns="109728" rIns="137160" rtlCol="0" anchor="ctr"/>
           <a:lstStyle/>
           <a:p>
             <a:pPr algn="ctr"/>
@@ -7695,7 +8198,7 @@
           </a:fontRef>
         </p:style>
         <p:txBody>
-          <a:bodyPr rtlCol="0" anchor="ctr" lIns="137160" rIns="137160" tIns="109728" wrap="square"/>
+          <a:bodyPr wrap="square" lIns="137160" tIns="109728" rIns="137160" rtlCol="0" anchor="ctr"/>
           <a:lstStyle/>
           <a:p>
             <a:pPr algn="ctr"/>
@@ -7756,7 +8259,7 @@
           </a:fontRef>
         </p:style>
         <p:txBody>
-          <a:bodyPr rtlCol="0" anchor="ctr" lIns="137160" rIns="137160" tIns="109728" wrap="square"/>
+          <a:bodyPr wrap="square" lIns="137160" tIns="109728" rIns="137160" rtlCol="0" anchor="ctr"/>
           <a:lstStyle/>
           <a:p>
             <a:pPr algn="ctr"/>
@@ -7790,7 +8293,7 @@
 </file>
 
 <file path=ppt/slides/slide6.xml><?xml version="1.0" encoding="utf-8"?>
-<p:sld xmlns:a="http://schemas.openxmlformats.org/drawingml/2006/main" xmlns:p="http://schemas.openxmlformats.org/presentationml/2006/main" xmlns:r="http://schemas.openxmlformats.org/officeDocument/2006/relationships">
+<p:sld xmlns:a="http://schemas.openxmlformats.org/drawingml/2006/main" xmlns:r="http://schemas.openxmlformats.org/officeDocument/2006/relationships" xmlns:p="http://schemas.openxmlformats.org/presentationml/2006/main">
   <p:cSld>
     <p:bg>
       <p:bgPr>
@@ -7806,7 +8309,14 @@
         <p:cNvGrpSpPr/>
         <p:nvPr/>
       </p:nvGrpSpPr>
-      <p:grpSpPr/>
+      <p:grpSpPr>
+        <a:xfrm>
+          <a:off x="0" y="0"/>
+          <a:ext cx="0" cy="0"/>
+          <a:chOff x="0" y="0"/>
+          <a:chExt cx="0" cy="0"/>
+        </a:xfrm>
+      </p:grpSpPr>
       <p:sp>
         <p:nvSpPr>
           <p:cNvPr id="2" name="Rounded Rectangle 1"/>
@@ -7847,6 +8357,7 @@
           <a:lstStyle/>
           <a:p>
             <a:pPr algn="ctr"/>
+            <a:endParaRPr/>
           </a:p>
         </p:txBody>
       </p:sp>
@@ -7886,7 +8397,7 @@
           </a:fontRef>
         </p:style>
         <p:txBody>
-          <a:bodyPr rtlCol="0" anchor="ctr" tIns="27432" lIns="109728"/>
+          <a:bodyPr lIns="109728" tIns="27432" rtlCol="0" anchor="ctr"/>
           <a:lstStyle/>
           <a:p>
             <a:pPr algn="ctr"/>
@@ -8036,7 +8547,7 @@
           </a:fontRef>
         </p:style>
         <p:txBody>
-          <a:bodyPr rtlCol="0" anchor="ctr" lIns="137160" rIns="137160" tIns="109728" wrap="square"/>
+          <a:bodyPr wrap="square" lIns="137160" tIns="109728" rIns="137160" rtlCol="0" anchor="ctr"/>
           <a:lstStyle/>
           <a:p>
             <a:pPr algn="ctr"/>
@@ -8097,7 +8608,7 @@
           </a:fontRef>
         </p:style>
         <p:txBody>
-          <a:bodyPr rtlCol="0" anchor="ctr" lIns="137160" rIns="137160" tIns="109728" wrap="square"/>
+          <a:bodyPr wrap="square" lIns="137160" tIns="109728" rIns="137160" rtlCol="0" anchor="ctr"/>
           <a:lstStyle/>
           <a:p>
             <a:pPr algn="ctr"/>
@@ -8158,7 +8669,7 @@
           </a:fontRef>
         </p:style>
         <p:txBody>
-          <a:bodyPr rtlCol="0" anchor="ctr" lIns="137160" rIns="137160" tIns="109728" wrap="square"/>
+          <a:bodyPr wrap="square" lIns="137160" tIns="109728" rIns="137160" rtlCol="0" anchor="ctr"/>
           <a:lstStyle/>
           <a:p>
             <a:pPr algn="ctr"/>
@@ -8219,7 +8730,7 @@
           </a:fontRef>
         </p:style>
         <p:txBody>
-          <a:bodyPr rtlCol="0" anchor="ctr" lIns="137160" rIns="137160" tIns="109728" wrap="square"/>
+          <a:bodyPr wrap="square" lIns="137160" tIns="109728" rIns="137160" rtlCol="0" anchor="ctr"/>
           <a:lstStyle/>
           <a:p>
             <a:pPr algn="ctr"/>
@@ -8280,7 +8791,7 @@
           </a:fontRef>
         </p:style>
         <p:txBody>
-          <a:bodyPr rtlCol="0" anchor="ctr" lIns="137160" rIns="137160" tIns="109728" wrap="square"/>
+          <a:bodyPr wrap="square" lIns="137160" tIns="109728" rIns="137160" rtlCol="0" anchor="ctr"/>
           <a:lstStyle/>
           <a:p>
             <a:pPr algn="ctr"/>
@@ -8314,7 +8825,7 @@
 </file>
 
 <file path=ppt/slides/slide7.xml><?xml version="1.0" encoding="utf-8"?>
-<p:sld xmlns:a="http://schemas.openxmlformats.org/drawingml/2006/main" xmlns:p="http://schemas.openxmlformats.org/presentationml/2006/main" xmlns:r="http://schemas.openxmlformats.org/officeDocument/2006/relationships">
+<p:sld xmlns:a="http://schemas.openxmlformats.org/drawingml/2006/main" xmlns:r="http://schemas.openxmlformats.org/officeDocument/2006/relationships" xmlns:p="http://schemas.openxmlformats.org/presentationml/2006/main">
   <p:cSld>
     <p:bg>
       <p:bgPr>
@@ -8330,7 +8841,14 @@
         <p:cNvGrpSpPr/>
         <p:nvPr/>
       </p:nvGrpSpPr>
-      <p:grpSpPr/>
+      <p:grpSpPr>
+        <a:xfrm>
+          <a:off x="0" y="0"/>
+          <a:ext cx="0" cy="0"/>
+          <a:chOff x="0" y="0"/>
+          <a:chExt cx="0" cy="0"/>
+        </a:xfrm>
+      </p:grpSpPr>
       <p:sp>
         <p:nvSpPr>
           <p:cNvPr id="2" name="Rounded Rectangle 1"/>
@@ -8371,6 +8889,7 @@
           <a:lstStyle/>
           <a:p>
             <a:pPr algn="ctr"/>
+            <a:endParaRPr/>
           </a:p>
         </p:txBody>
       </p:sp>
@@ -8410,7 +8929,7 @@
           </a:fontRef>
         </p:style>
         <p:txBody>
-          <a:bodyPr rtlCol="0" anchor="ctr" tIns="27432" lIns="109728"/>
+          <a:bodyPr lIns="109728" tIns="27432" rtlCol="0" anchor="ctr"/>
           <a:lstStyle/>
           <a:p>
             <a:pPr algn="ctr"/>
@@ -8560,7 +9079,7 @@
           </a:fontRef>
         </p:style>
         <p:txBody>
-          <a:bodyPr rtlCol="0" anchor="ctr" lIns="137160" rIns="137160" tIns="109728" wrap="square"/>
+          <a:bodyPr wrap="square" lIns="137160" tIns="109728" rIns="137160" rtlCol="0" anchor="ctr"/>
           <a:lstStyle/>
           <a:p>
             <a:pPr algn="ctr"/>
@@ -8621,7 +9140,7 @@
           </a:fontRef>
         </p:style>
         <p:txBody>
-          <a:bodyPr rtlCol="0" anchor="ctr" lIns="137160" rIns="137160" tIns="109728" wrap="square"/>
+          <a:bodyPr wrap="square" lIns="137160" tIns="109728" rIns="137160" rtlCol="0" anchor="ctr"/>
           <a:lstStyle/>
           <a:p>
             <a:pPr algn="ctr"/>
@@ -8655,7 +9174,7 @@
 </file>
 
 <file path=ppt/slides/slide8.xml><?xml version="1.0" encoding="utf-8"?>
-<p:sld xmlns:a="http://schemas.openxmlformats.org/drawingml/2006/main" xmlns:p="http://schemas.openxmlformats.org/presentationml/2006/main" xmlns:r="http://schemas.openxmlformats.org/officeDocument/2006/relationships">
+<p:sld xmlns:a="http://schemas.openxmlformats.org/drawingml/2006/main" xmlns:r="http://schemas.openxmlformats.org/officeDocument/2006/relationships" xmlns:p="http://schemas.openxmlformats.org/presentationml/2006/main">
   <p:cSld>
     <p:bg>
       <p:bgPr>
@@ -8671,7 +9190,14 @@
         <p:cNvGrpSpPr/>
         <p:nvPr/>
       </p:nvGrpSpPr>
-      <p:grpSpPr/>
+      <p:grpSpPr>
+        <a:xfrm>
+          <a:off x="0" y="0"/>
+          <a:ext cx="0" cy="0"/>
+          <a:chOff x="0" y="0"/>
+          <a:chExt cx="0" cy="0"/>
+        </a:xfrm>
+      </p:grpSpPr>
       <p:sp>
         <p:nvSpPr>
           <p:cNvPr id="2" name="Rounded Rectangle 1"/>
@@ -8712,6 +9238,7 @@
           <a:lstStyle/>
           <a:p>
             <a:pPr algn="ctr"/>
+            <a:endParaRPr/>
           </a:p>
         </p:txBody>
       </p:sp>
@@ -8751,7 +9278,7 @@
           </a:fontRef>
         </p:style>
         <p:txBody>
-          <a:bodyPr rtlCol="0" anchor="ctr" tIns="27432" lIns="109728"/>
+          <a:bodyPr lIns="109728" tIns="27432" rtlCol="0" anchor="ctr"/>
           <a:lstStyle/>
           <a:p>
             <a:pPr algn="ctr"/>
@@ -8901,7 +9428,7 @@
           </a:fontRef>
         </p:style>
         <p:txBody>
-          <a:bodyPr rtlCol="0" anchor="ctr" lIns="137160" rIns="137160" tIns="109728" wrap="square"/>
+          <a:bodyPr wrap="square" lIns="137160" tIns="109728" rIns="137160" rtlCol="0" anchor="ctr"/>
           <a:lstStyle/>
           <a:p>
             <a:pPr algn="ctr"/>
@@ -8962,7 +9489,7 @@
           </a:fontRef>
         </p:style>
         <p:txBody>
-          <a:bodyPr rtlCol="0" anchor="ctr" lIns="137160" rIns="137160" tIns="109728" wrap="square"/>
+          <a:bodyPr wrap="square" lIns="137160" tIns="109728" rIns="137160" rtlCol="0" anchor="ctr"/>
           <a:lstStyle/>
           <a:p>
             <a:pPr algn="ctr"/>
@@ -9023,7 +9550,7 @@
           </a:fontRef>
         </p:style>
         <p:txBody>
-          <a:bodyPr rtlCol="0" anchor="ctr" lIns="137160" rIns="137160" tIns="109728" wrap="square"/>
+          <a:bodyPr wrap="square" lIns="137160" tIns="109728" rIns="137160" rtlCol="0" anchor="ctr"/>
           <a:lstStyle/>
           <a:p>
             <a:pPr algn="ctr"/>
@@ -9084,7 +9611,7 @@
           </a:fontRef>
         </p:style>
         <p:txBody>
-          <a:bodyPr rtlCol="0" anchor="ctr" lIns="137160" rIns="137160" tIns="109728" wrap="square"/>
+          <a:bodyPr wrap="square" lIns="137160" tIns="109728" rIns="137160" rtlCol="0" anchor="ctr"/>
           <a:lstStyle/>
           <a:p>
             <a:pPr algn="ctr"/>
@@ -9118,7 +9645,7 @@
 </file>
 
 <file path=ppt/slides/slide9.xml><?xml version="1.0" encoding="utf-8"?>
-<p:sld xmlns:a="http://schemas.openxmlformats.org/drawingml/2006/main" xmlns:p="http://schemas.openxmlformats.org/presentationml/2006/main" xmlns:r="http://schemas.openxmlformats.org/officeDocument/2006/relationships">
+<p:sld xmlns:a="http://schemas.openxmlformats.org/drawingml/2006/main" xmlns:r="http://schemas.openxmlformats.org/officeDocument/2006/relationships" xmlns:p="http://schemas.openxmlformats.org/presentationml/2006/main">
   <p:cSld>
     <p:bg>
       <p:bgPr>
@@ -9134,7 +9661,14 @@
         <p:cNvGrpSpPr/>
         <p:nvPr/>
       </p:nvGrpSpPr>
-      <p:grpSpPr/>
+      <p:grpSpPr>
+        <a:xfrm>
+          <a:off x="0" y="0"/>
+          <a:ext cx="0" cy="0"/>
+          <a:chOff x="0" y="0"/>
+          <a:chExt cx="0" cy="0"/>
+        </a:xfrm>
+      </p:grpSpPr>
       <p:sp>
         <p:nvSpPr>
           <p:cNvPr id="2" name="Rounded Rectangle 1"/>
@@ -9175,6 +9709,7 @@
           <a:lstStyle/>
           <a:p>
             <a:pPr algn="ctr"/>
+            <a:endParaRPr/>
           </a:p>
         </p:txBody>
       </p:sp>
@@ -9214,7 +9749,7 @@
           </a:fontRef>
         </p:style>
         <p:txBody>
-          <a:bodyPr rtlCol="0" anchor="ctr" tIns="27432" lIns="109728"/>
+          <a:bodyPr lIns="109728" tIns="27432" rtlCol="0" anchor="ctr"/>
           <a:lstStyle/>
           <a:p>
             <a:pPr algn="ctr"/>
@@ -9364,7 +9899,7 @@
           </a:fontRef>
         </p:style>
         <p:txBody>
-          <a:bodyPr rtlCol="0" anchor="ctr" lIns="137160" rIns="137160" tIns="109728" wrap="square"/>
+          <a:bodyPr wrap="square" lIns="137160" tIns="109728" rIns="137160" rtlCol="0" anchor="ctr"/>
           <a:lstStyle/>
           <a:p>
             <a:pPr algn="ctr"/>
@@ -9425,7 +9960,7 @@
           </a:fontRef>
         </p:style>
         <p:txBody>
-          <a:bodyPr rtlCol="0" anchor="ctr" lIns="137160" rIns="137160" tIns="109728" wrap="square"/>
+          <a:bodyPr wrap="square" lIns="137160" tIns="109728" rIns="137160" rtlCol="0" anchor="ctr"/>
           <a:lstStyle/>
           <a:p>
             <a:pPr algn="ctr"/>
@@ -9486,7 +10021,7 @@
           </a:fontRef>
         </p:style>
         <p:txBody>
-          <a:bodyPr rtlCol="0" anchor="ctr" lIns="137160" rIns="137160" tIns="109728" wrap="square"/>
+          <a:bodyPr wrap="square" lIns="137160" tIns="109728" rIns="137160" rtlCol="0" anchor="ctr"/>
           <a:lstStyle/>
           <a:p>
             <a:pPr algn="ctr"/>
@@ -9850,44 +10385,44 @@
         <a:sysClr val="window" lastClr="FFFFFF"/>
       </a:lt1>
       <a:dk2>
-        <a:srgbClr val="1F497D"/>
+        <a:srgbClr val="0E2841"/>
       </a:dk2>
       <a:lt2>
-        <a:srgbClr val="EEECE1"/>
+        <a:srgbClr val="E8E8E8"/>
       </a:lt2>
       <a:accent1>
-        <a:srgbClr val="4F81BD"/>
+        <a:srgbClr val="156082"/>
       </a:accent1>
       <a:accent2>
-        <a:srgbClr val="C0504D"/>
+        <a:srgbClr val="E97132"/>
       </a:accent2>
       <a:accent3>
-        <a:srgbClr val="9BBB59"/>
+        <a:srgbClr val="196B24"/>
       </a:accent3>
       <a:accent4>
-        <a:srgbClr val="8064A2"/>
+        <a:srgbClr val="0F9ED5"/>
       </a:accent4>
       <a:accent5>
-        <a:srgbClr val="4BACC6"/>
+        <a:srgbClr val="A02B93"/>
       </a:accent5>
       <a:accent6>
-        <a:srgbClr val="F79646"/>
+        <a:srgbClr val="4EA72E"/>
       </a:accent6>
       <a:hlink>
-        <a:srgbClr val="0000FF"/>
+        <a:srgbClr val="467886"/>
       </a:hlink>
       <a:folHlink>
-        <a:srgbClr val="800080"/>
+        <a:srgbClr val="96607D"/>
       </a:folHlink>
     </a:clrScheme>
     <a:fontScheme name="Office">
       <a:majorFont>
-        <a:latin typeface="Calibri"/>
+        <a:latin typeface="Aptos Display" panose="02110004020202020204"/>
         <a:ea typeface=""/>
         <a:cs typeface=""/>
-        <a:font script="Jpan" typeface="ＭＳ Ｐゴシック"/>
+        <a:font script="Jpan" typeface="游ゴシック Light"/>
         <a:font script="Hang" typeface="맑은 고딕"/>
-        <a:font script="Hans" typeface="宋体"/>
+        <a:font script="Hans" typeface="等线 Light"/>
         <a:font script="Hant" typeface="新細明體"/>
         <a:font script="Arab" typeface="Times New Roman"/>
         <a:font script="Hebr" typeface="Times New Roman"/>
@@ -9915,14 +10450,31 @@
         <a:font script="Viet" typeface="Times New Roman"/>
         <a:font script="Uigh" typeface="Microsoft Uighur"/>
         <a:font script="Geor" typeface="Sylfaen"/>
+        <a:font script="Armn" typeface="Arial"/>
+        <a:font script="Bugi" typeface="Leelawadee UI"/>
+        <a:font script="Bopo" typeface="Microsoft JhengHei"/>
+        <a:font script="Java" typeface="Javanese Text"/>
+        <a:font script="Lisu" typeface="Segoe UI"/>
+        <a:font script="Mymr" typeface="Myanmar Text"/>
+        <a:font script="Nkoo" typeface="Ebrima"/>
+        <a:font script="Olck" typeface="Nirmala UI"/>
+        <a:font script="Osma" typeface="Ebrima"/>
+        <a:font script="Phag" typeface="Phagspa"/>
+        <a:font script="Syrn" typeface="Estrangelo Edessa"/>
+        <a:font script="Syrj" typeface="Estrangelo Edessa"/>
+        <a:font script="Syre" typeface="Estrangelo Edessa"/>
+        <a:font script="Sora" typeface="Nirmala UI"/>
+        <a:font script="Tale" typeface="Microsoft Tai Le"/>
+        <a:font script="Talu" typeface="Microsoft New Tai Lue"/>
+        <a:font script="Tfng" typeface="Ebrima"/>
       </a:majorFont>
       <a:minorFont>
-        <a:latin typeface="Calibri"/>
+        <a:latin typeface="Aptos" panose="02110004020202020204"/>
         <a:ea typeface=""/>
         <a:cs typeface=""/>
-        <a:font script="Jpan" typeface="ＭＳ Ｐゴシック"/>
+        <a:font script="Jpan" typeface="游ゴシック"/>
         <a:font script="Hang" typeface="맑은 고딕"/>
-        <a:font script="Hans" typeface="宋体"/>
+        <a:font script="Hans" typeface="等线"/>
         <a:font script="Hant" typeface="新細明體"/>
         <a:font script="Arab" typeface="Arial"/>
         <a:font script="Hebr" typeface="Arial"/>
@@ -9950,6 +10502,23 @@
         <a:font script="Viet" typeface="Arial"/>
         <a:font script="Uigh" typeface="Microsoft Uighur"/>
         <a:font script="Geor" typeface="Sylfaen"/>
+        <a:font script="Armn" typeface="Arial"/>
+        <a:font script="Bugi" typeface="Leelawadee UI"/>
+        <a:font script="Bopo" typeface="Microsoft JhengHei"/>
+        <a:font script="Java" typeface="Javanese Text"/>
+        <a:font script="Lisu" typeface="Segoe UI"/>
+        <a:font script="Mymr" typeface="Myanmar Text"/>
+        <a:font script="Nkoo" typeface="Ebrima"/>
+        <a:font script="Olck" typeface="Nirmala UI"/>
+        <a:font script="Osma" typeface="Ebrima"/>
+        <a:font script="Phag" typeface="Phagspa"/>
+        <a:font script="Syrn" typeface="Estrangelo Edessa"/>
+        <a:font script="Syrj" typeface="Estrangelo Edessa"/>
+        <a:font script="Syre" typeface="Estrangelo Edessa"/>
+        <a:font script="Sora" typeface="Nirmala UI"/>
+        <a:font script="Tale" typeface="Microsoft Tai Le"/>
+        <a:font script="Talu" typeface="Microsoft New Tai Lue"/>
+        <a:font script="Tfng" typeface="Ebrima"/>
       </a:minorFont>
     </a:fontScheme>
     <a:fmtScheme name="Office">
@@ -9961,180 +10530,136 @@
           <a:gsLst>
             <a:gs pos="0">
               <a:schemeClr val="phClr">
-                <a:tint val="50000"/>
-                <a:satMod val="300000"/>
+                <a:lumMod val="110000"/>
+                <a:satMod val="105000"/>
+                <a:tint val="67000"/>
               </a:schemeClr>
             </a:gs>
-            <a:gs pos="35000">
+            <a:gs pos="50000">
               <a:schemeClr val="phClr">
-                <a:tint val="37000"/>
-                <a:satMod val="300000"/>
+                <a:lumMod val="105000"/>
+                <a:satMod val="103000"/>
+                <a:tint val="73000"/>
               </a:schemeClr>
             </a:gs>
             <a:gs pos="100000">
               <a:schemeClr val="phClr">
-                <a:tint val="15000"/>
-                <a:satMod val="350000"/>
+                <a:lumMod val="105000"/>
+                <a:satMod val="109000"/>
+                <a:tint val="81000"/>
               </a:schemeClr>
             </a:gs>
           </a:gsLst>
-          <a:lin ang="16200000" scaled="1"/>
+          <a:lin ang="5400000" scaled="0"/>
         </a:gradFill>
         <a:gradFill rotWithShape="1">
           <a:gsLst>
             <a:gs pos="0">
               <a:schemeClr val="phClr">
-                <a:tint val="100000"/>
+                <a:satMod val="103000"/>
+                <a:lumMod val="102000"/>
+                <a:tint val="94000"/>
+              </a:schemeClr>
+            </a:gs>
+            <a:gs pos="50000">
+              <a:schemeClr val="phClr">
+                <a:satMod val="110000"/>
+                <a:lumMod val="100000"/>
                 <a:shade val="100000"/>
-                <a:satMod val="130000"/>
               </a:schemeClr>
             </a:gs>
             <a:gs pos="100000">
               <a:schemeClr val="phClr">
-                <a:tint val="50000"/>
-                <a:shade val="100000"/>
-                <a:satMod val="350000"/>
+                <a:lumMod val="99000"/>
+                <a:satMod val="120000"/>
+                <a:shade val="78000"/>
               </a:schemeClr>
             </a:gs>
           </a:gsLst>
-          <a:lin ang="16200000" scaled="0"/>
+          <a:lin ang="5400000" scaled="0"/>
         </a:gradFill>
       </a:fillStyleLst>
       <a:lnStyleLst>
-        <a:ln w="9525" cap="flat" cmpd="sng" algn="ctr">
+        <a:ln w="12700" cap="flat" cmpd="sng" algn="ctr">
           <a:solidFill>
-            <a:schemeClr val="phClr">
-              <a:shade val="95000"/>
-              <a:satMod val="105000"/>
-            </a:schemeClr>
+            <a:schemeClr val="phClr"/>
           </a:solidFill>
           <a:prstDash val="solid"/>
+          <a:miter lim="800000"/>
+        </a:ln>
+        <a:ln w="19050" cap="flat" cmpd="sng" algn="ctr">
+          <a:solidFill>
+            <a:schemeClr val="phClr"/>
+          </a:solidFill>
+          <a:prstDash val="solid"/>
+          <a:miter lim="800000"/>
         </a:ln>
         <a:ln w="25400" cap="flat" cmpd="sng" algn="ctr">
           <a:solidFill>
             <a:schemeClr val="phClr"/>
           </a:solidFill>
           <a:prstDash val="solid"/>
-        </a:ln>
-        <a:ln w="38100" cap="flat" cmpd="sng" algn="ctr">
-          <a:solidFill>
-            <a:schemeClr val="phClr"/>
-          </a:solidFill>
-          <a:prstDash val="solid"/>
+          <a:miter lim="800000"/>
         </a:ln>
       </a:lnStyleLst>
       <a:effectStyleLst>
         <a:effectStyle>
+          <a:effectLst/>
+        </a:effectStyle>
+        <a:effectStyle>
+          <a:effectLst/>
+        </a:effectStyle>
+        <a:effectStyle>
           <a:effectLst>
-            <a:outerShdw blurRad="40000" dist="20000" dir="5400000" rotWithShape="0">
+            <a:outerShdw blurRad="57150" dist="19050" dir="5400000" algn="ctr" rotWithShape="0">
               <a:srgbClr val="000000">
-                <a:alpha val="38000"/>
+                <a:alpha val="63000"/>
               </a:srgbClr>
             </a:outerShdw>
           </a:effectLst>
-        </a:effectStyle>
-        <a:effectStyle>
-          <a:effectLst>
-            <a:outerShdw blurRad="40000" dist="23000" dir="5400000" rotWithShape="0">
-              <a:srgbClr val="000000">
-                <a:alpha val="35000"/>
-              </a:srgbClr>
-            </a:outerShdw>
-          </a:effectLst>
-        </a:effectStyle>
-        <a:effectStyle>
-          <a:effectLst>
-            <a:outerShdw blurRad="40000" dist="23000" dir="5400000" rotWithShape="0">
-              <a:srgbClr val="000000">
-                <a:alpha val="35000"/>
-              </a:srgbClr>
-            </a:outerShdw>
-          </a:effectLst>
-          <a:scene3d>
-            <a:camera prst="orthographicFront">
-              <a:rot lat="0" lon="0" rev="0"/>
-            </a:camera>
-            <a:lightRig rig="threePt" dir="t">
-              <a:rot lat="0" lon="0" rev="1200000"/>
-            </a:lightRig>
-          </a:scene3d>
-          <a:sp3d>
-            <a:bevelT w="63500" h="25400"/>
-          </a:sp3d>
         </a:effectStyle>
       </a:effectStyleLst>
       <a:bgFillStyleLst>
         <a:solidFill>
           <a:schemeClr val="phClr"/>
         </a:solidFill>
+        <a:solidFill>
+          <a:schemeClr val="phClr">
+            <a:tint val="95000"/>
+            <a:satMod val="170000"/>
+          </a:schemeClr>
+        </a:solidFill>
         <a:gradFill rotWithShape="1">
           <a:gsLst>
             <a:gs pos="0">
               <a:schemeClr val="phClr">
-                <a:tint val="40000"/>
-                <a:satMod val="350000"/>
+                <a:tint val="93000"/>
+                <a:satMod val="150000"/>
+                <a:shade val="98000"/>
+                <a:lumMod val="102000"/>
               </a:schemeClr>
             </a:gs>
-            <a:gs pos="40000">
+            <a:gs pos="50000">
               <a:schemeClr val="phClr">
-                <a:tint val="45000"/>
-                <a:shade val="99000"/>
-                <a:satMod val="350000"/>
+                <a:tint val="98000"/>
+                <a:satMod val="130000"/>
+                <a:shade val="90000"/>
+                <a:lumMod val="103000"/>
               </a:schemeClr>
             </a:gs>
             <a:gs pos="100000">
               <a:schemeClr val="phClr">
-                <a:shade val="20000"/>
-                <a:satMod val="255000"/>
+                <a:shade val="63000"/>
+                <a:satMod val="120000"/>
               </a:schemeClr>
             </a:gs>
           </a:gsLst>
-          <a:path path="circle">
-            <a:fillToRect l="50000" t="-80000" r="50000" b="180000"/>
-          </a:path>
-        </a:gradFill>
-        <a:gradFill rotWithShape="1">
-          <a:gsLst>
-            <a:gs pos="0">
-              <a:schemeClr val="phClr">
-                <a:tint val="80000"/>
-                <a:satMod val="300000"/>
-              </a:schemeClr>
-            </a:gs>
-            <a:gs pos="100000">
-              <a:schemeClr val="phClr">
-                <a:shade val="30000"/>
-                <a:satMod val="200000"/>
-              </a:schemeClr>
-            </a:gs>
-          </a:gsLst>
-          <a:path path="circle">
-            <a:fillToRect l="50000" t="50000" r="50000" b="50000"/>
-          </a:path>
+          <a:lin ang="5400000" scaled="0"/>
         </a:gradFill>
       </a:bgFillStyleLst>
     </a:fmtScheme>
   </a:themeElements>
   <a:objectDefaults>
-    <a:spDef>
-      <a:spPr/>
-      <a:bodyPr/>
-      <a:lstStyle/>
-      <a:style>
-        <a:lnRef idx="1">
-          <a:schemeClr val="accent1"/>
-        </a:lnRef>
-        <a:fillRef idx="3">
-          <a:schemeClr val="accent1"/>
-        </a:fillRef>
-        <a:effectRef idx="2">
-          <a:schemeClr val="accent1"/>
-        </a:effectRef>
-        <a:fontRef idx="minor">
-          <a:schemeClr val="lt1"/>
-        </a:fontRef>
-      </a:style>
-    </a:spDef>
     <a:lnDef>
       <a:spPr/>
       <a:bodyPr/>
@@ -10156,5 +10681,10 @@
     </a:lnDef>
   </a:objectDefaults>
   <a:extraClrSchemeLst/>
+  <a:extLst>
+    <a:ext uri="{05A4C25C-085E-4340-85A3-A5531E510DB2}">
+      <thm15:themeFamily xmlns:thm15="http://schemas.microsoft.com/office/thememl/2012/main" name="Office Theme" id="{2E142A2C-CD16-42D6-873A-C26D2A0506FA}" vid="{1BDDFF52-6CD6-40A5-AB3C-68EB2F1E4D0A}"/>
+    </a:ext>
+  </a:extLst>
 </a:theme>
 </file>
--- a/docs-michael/usability/slides/personas-deck.pptx
+++ b/docs-michael/usability/slides/personas-deck.pptx
@@ -1437,7 +1437,7 @@
           <a:p>
             <a:fld id="{5BCAD085-E8A6-8845-BD4E-CB4CCA059FC4}" type="datetimeFigureOut">
               <a:rPr lang="en-US" smtClean="0"/>
-              <a:t>9/9/26</a:t>
+              <a:t>09-Sep-26</a:t>
             </a:fld>
             <a:endParaRPr lang="en-US"/>
           </a:p>
@@ -1605,7 +1605,7 @@
           <a:p>
             <a:fld id="{5BCAD085-E8A6-8845-BD4E-CB4CCA059FC4}" type="datetimeFigureOut">
               <a:rPr lang="en-US" smtClean="0"/>
-              <a:t>9/9/26</a:t>
+              <a:t>09-Sep-26</a:t>
             </a:fld>
             <a:endParaRPr lang="en-US"/>
           </a:p>
@@ -1783,7 +1783,7 @@
           <a:p>
             <a:fld id="{5BCAD085-E8A6-8845-BD4E-CB4CCA059FC4}" type="datetimeFigureOut">
               <a:rPr lang="en-US" smtClean="0"/>
-              <a:t>9/9/26</a:t>
+              <a:t>09-Sep-26</a:t>
             </a:fld>
             <a:endParaRPr lang="en-US"/>
           </a:p>
@@ -1951,7 +1951,7 @@
           <a:p>
             <a:fld id="{5BCAD085-E8A6-8845-BD4E-CB4CCA059FC4}" type="datetimeFigureOut">
               <a:rPr lang="en-US" smtClean="0"/>
-              <a:t>9/9/26</a:t>
+              <a:t>09-Sep-26</a:t>
             </a:fld>
             <a:endParaRPr lang="en-US"/>
           </a:p>
@@ -2196,7 +2196,7 @@
           <a:p>
             <a:fld id="{5BCAD085-E8A6-8845-BD4E-CB4CCA059FC4}" type="datetimeFigureOut">
               <a:rPr lang="en-US" smtClean="0"/>
-              <a:t>9/9/26</a:t>
+              <a:t>09-Sep-26</a:t>
             </a:fld>
             <a:endParaRPr lang="en-US"/>
           </a:p>
@@ -2481,7 +2481,7 @@
           <a:p>
             <a:fld id="{5BCAD085-E8A6-8845-BD4E-CB4CCA059FC4}" type="datetimeFigureOut">
               <a:rPr lang="en-US" smtClean="0"/>
-              <a:t>9/9/26</a:t>
+              <a:t>09-Sep-26</a:t>
             </a:fld>
             <a:endParaRPr lang="en-US"/>
           </a:p>
@@ -2900,7 +2900,7 @@
           <a:p>
             <a:fld id="{5BCAD085-E8A6-8845-BD4E-CB4CCA059FC4}" type="datetimeFigureOut">
               <a:rPr lang="en-US" smtClean="0"/>
-              <a:t>9/9/26</a:t>
+              <a:t>09-Sep-26</a:t>
             </a:fld>
             <a:endParaRPr lang="en-US"/>
           </a:p>
@@ -3017,7 +3017,7 @@
           <a:p>
             <a:fld id="{5BCAD085-E8A6-8845-BD4E-CB4CCA059FC4}" type="datetimeFigureOut">
               <a:rPr lang="en-US" smtClean="0"/>
-              <a:t>9/9/26</a:t>
+              <a:t>09-Sep-26</a:t>
             </a:fld>
             <a:endParaRPr lang="en-US"/>
           </a:p>
@@ -3112,7 +3112,7 @@
           <a:p>
             <a:fld id="{5BCAD085-E8A6-8845-BD4E-CB4CCA059FC4}" type="datetimeFigureOut">
               <a:rPr lang="en-US" smtClean="0"/>
-              <a:t>9/9/26</a:t>
+              <a:t>09-Sep-26</a:t>
             </a:fld>
             <a:endParaRPr lang="en-US"/>
           </a:p>
@@ -3387,7 +3387,7 @@
           <a:p>
             <a:fld id="{5BCAD085-E8A6-8845-BD4E-CB4CCA059FC4}" type="datetimeFigureOut">
               <a:rPr lang="en-US" smtClean="0"/>
-              <a:t>9/9/26</a:t>
+              <a:t>09-Sep-26</a:t>
             </a:fld>
             <a:endParaRPr lang="en-US"/>
           </a:p>
@@ -3639,7 +3639,7 @@
           <a:p>
             <a:fld id="{5BCAD085-E8A6-8845-BD4E-CB4CCA059FC4}" type="datetimeFigureOut">
               <a:rPr lang="en-US" smtClean="0"/>
-              <a:t>9/9/26</a:t>
+              <a:t>09-Sep-26</a:t>
             </a:fld>
             <a:endParaRPr lang="en-US"/>
           </a:p>
@@ -3850,7 +3850,7 @@
           <a:p>
             <a:fld id="{5BCAD085-E8A6-8845-BD4E-CB4CCA059FC4}" type="datetimeFigureOut">
               <a:rPr lang="en-US" smtClean="0"/>
-              <a:t>9/9/26</a:t>
+              <a:t>09-Sep-26</a:t>
             </a:fld>
             <a:endParaRPr lang="en-US"/>
           </a:p>
@@ -4561,6 +4561,13 @@
               </a:rPr>
               <a:t>hoster</a:t>
             </a:r>
+            <a:endParaRPr lang="en-US" sz="1600" dirty="0">
+              <a:solidFill>
+                <a:srgbClr val="9AA6B8"/>
+              </a:solidFill>
+            </a:endParaRPr>
+          </a:p>
+          <a:p>
             <a:endParaRPr sz="1600" dirty="0">
               <a:solidFill>
                 <a:srgbClr val="9AA6B8"/>
@@ -4663,6 +4670,66 @@
             </a:endParaRPr>
           </a:p>
           <a:p>
+            <a:r>
+              <a:rPr lang="en-US" sz="1200" i="1" dirty="0">
+                <a:solidFill>
+                  <a:srgbClr val="F46D9B"/>
+                </a:solidFill>
+              </a:rPr>
+              <a:t>Web</a:t>
+            </a:r>
+            <a:r>
+              <a:rPr lang="en-US" sz="1600" i="1" dirty="0">
+                <a:solidFill>
+                  <a:srgbClr val="F46D9B"/>
+                </a:solidFill>
+              </a:rPr>
+              <a:t> </a:t>
+            </a:r>
+          </a:p>
+          <a:p>
+            <a:r>
+              <a:rPr lang="en-US" sz="1600" i="1" dirty="0">
+                <a:solidFill>
+                  <a:srgbClr val="F46D9B"/>
+                </a:solidFill>
+              </a:rPr>
+              <a:t>	</a:t>
+            </a:r>
+            <a:r>
+              <a:rPr lang="en-US" sz="1600" dirty="0">
+                <a:solidFill>
+                  <a:srgbClr val="9AA6B8"/>
+                </a:solidFill>
+              </a:rPr>
+              <a:t>C</a:t>
+            </a:r>
+            <a:r>
+              <a:rPr sz="1600" dirty="0">
+                <a:solidFill>
+                  <a:srgbClr val="9AA6B8"/>
+                </a:solidFill>
+              </a:rPr>
+              <a:t>hatter</a:t>
+            </a:r>
+          </a:p>
+          <a:p>
+            <a:r>
+              <a:rPr lang="en-US" sz="1600" dirty="0">
+                <a:solidFill>
+                  <a:srgbClr val="9AA6B8"/>
+                </a:solidFill>
+              </a:rPr>
+              <a:t>	C</a:t>
+            </a:r>
+            <a:r>
+              <a:rPr sz="1600" dirty="0">
+                <a:solidFill>
+                  <a:srgbClr val="9AA6B8"/>
+                </a:solidFill>
+              </a:rPr>
+              <a:t>oder</a:t>
+            </a:r>
             <a:endParaRPr lang="en-US" sz="1600" dirty="0">
               <a:solidFill>
                 <a:srgbClr val="9AA6B8"/>
@@ -4671,73 +4738,152 @@
           </a:p>
           <a:p>
             <a:r>
-              <a:rPr sz="1600" dirty="0">
+              <a:rPr lang="en-US" sz="1200" i="1" dirty="0">
+                <a:solidFill>
+                  <a:srgbClr val="F46D9B"/>
+                </a:solidFill>
+              </a:rPr>
+              <a:t>Text</a:t>
+            </a:r>
+          </a:p>
+          <a:p>
+            <a:r>
+              <a:rPr lang="en-US" sz="1600" dirty="0">
                 <a:solidFill>
                   <a:srgbClr val="9AA6B8"/>
                 </a:solidFill>
               </a:rPr>
-              <a:t>Web chatter</a:t>
-            </a:r>
-          </a:p>
-          <a:p>
-            <a:r>
-              <a:rPr sz="1600" dirty="0">
+              <a:t>	</a:t>
+            </a:r>
+            <a:r>
+              <a:rPr lang="en-US" sz="1600" dirty="0" err="1">
                 <a:solidFill>
                   <a:srgbClr val="9AA6B8"/>
                 </a:solidFill>
               </a:rPr>
-              <a:t>Web coder</a:t>
-            </a:r>
-          </a:p>
-          <a:p>
-            <a:r>
-              <a:rPr sz="1600" dirty="0">
+              <a:t>Terminalist</a:t>
+            </a:r>
+            <a:r>
+              <a:rPr lang="en-US" sz="1600" dirty="0">
                 <a:solidFill>
                   <a:srgbClr val="9AA6B8"/>
                 </a:solidFill>
               </a:rPr>
-              <a:t>Text CLI</a:t>
-            </a:r>
-          </a:p>
-          <a:p>
-            <a:r>
-              <a:rPr sz="1600" dirty="0">
+              <a:t> </a:t>
+            </a:r>
+            <a:r>
+              <a:rPr lang="en-US" sz="1000" dirty="0">
                 <a:solidFill>
                   <a:srgbClr val="9AA6B8"/>
                 </a:solidFill>
               </a:rPr>
-              <a:t>Text TUI</a:t>
-            </a:r>
-          </a:p>
-          <a:p>
-            <a:r>
-              <a:rPr sz="1600" dirty="0">
+              <a:t>(CLI)</a:t>
+            </a:r>
+            <a:endParaRPr sz="1000" dirty="0">
+              <a:solidFill>
+                <a:srgbClr val="9AA6B8"/>
+              </a:solidFill>
+            </a:endParaRPr>
+          </a:p>
+          <a:p>
+            <a:r>
+              <a:rPr lang="en-US" sz="1600" dirty="0">
                 <a:solidFill>
                   <a:srgbClr val="9AA6B8"/>
                 </a:solidFill>
               </a:rPr>
-              <a:t>Text IM</a:t>
-            </a:r>
-          </a:p>
-          <a:p>
-            <a:r>
-              <a:rPr sz="1600" dirty="0">
+              <a:t>	Console User </a:t>
+            </a:r>
+            <a:r>
+              <a:rPr lang="en-US" sz="1000" dirty="0">
                 <a:solidFill>
                   <a:srgbClr val="9AA6B8"/>
                 </a:solidFill>
               </a:rPr>
-              <a:t>Channel Browser</a:t>
-            </a:r>
-          </a:p>
-          <a:p>
-            <a:r>
-              <a:rPr sz="1600" dirty="0">
+              <a:t>(TUI)</a:t>
+            </a:r>
+            <a:endParaRPr sz="1000" dirty="0">
+              <a:solidFill>
+                <a:srgbClr val="9AA6B8"/>
+              </a:solidFill>
+            </a:endParaRPr>
+          </a:p>
+          <a:p>
+            <a:r>
+              <a:rPr lang="en-US" sz="1600" dirty="0">
                 <a:solidFill>
                   <a:srgbClr val="9AA6B8"/>
                 </a:solidFill>
               </a:rPr>
-              <a:t>Channel IDE</a:t>
-            </a:r>
+              <a:t>	Texter </a:t>
+            </a:r>
+            <a:r>
+              <a:rPr lang="en-US" sz="1000" dirty="0">
+                <a:solidFill>
+                  <a:srgbClr val="9AA6B8"/>
+                </a:solidFill>
+              </a:rPr>
+              <a:t>(IM)</a:t>
+            </a:r>
+          </a:p>
+          <a:p>
+            <a:r>
+              <a:rPr lang="en-US" sz="1200" i="1" dirty="0">
+                <a:solidFill>
+                  <a:srgbClr val="F46D9B"/>
+                </a:solidFill>
+              </a:rPr>
+              <a:t>Channel</a:t>
+            </a:r>
+          </a:p>
+          <a:p>
+            <a:r>
+              <a:rPr lang="en-US" sz="2000" dirty="0">
+                <a:solidFill>
+                  <a:srgbClr val="9AA6B8"/>
+                </a:solidFill>
+              </a:rPr>
+              <a:t>	</a:t>
+            </a:r>
+            <a:r>
+              <a:rPr lang="en-US" sz="1600" dirty="0">
+                <a:solidFill>
+                  <a:srgbClr val="9AA6B8"/>
+                </a:solidFill>
+              </a:rPr>
+              <a:t>Web Surfer </a:t>
+            </a:r>
+            <a:r>
+              <a:rPr lang="en-US" sz="1000" dirty="0">
+                <a:solidFill>
+                  <a:srgbClr val="9AA6B8"/>
+                </a:solidFill>
+              </a:rPr>
+              <a:t>(Brower)</a:t>
+            </a:r>
+          </a:p>
+          <a:p>
+            <a:r>
+              <a:rPr lang="en-US" sz="1600" dirty="0">
+                <a:solidFill>
+                  <a:srgbClr val="9AA6B8"/>
+                </a:solidFill>
+              </a:rPr>
+              <a:t>	Developer </a:t>
+            </a:r>
+            <a:r>
+              <a:rPr lang="en-US" sz="1000" dirty="0">
+                <a:solidFill>
+                  <a:srgbClr val="9AA6B8"/>
+                </a:solidFill>
+              </a:rPr>
+              <a:t>(IDE)</a:t>
+            </a:r>
+            <a:endParaRPr sz="1000" dirty="0">
+              <a:solidFill>
+                <a:srgbClr val="9AA6B8"/>
+              </a:solidFill>
+            </a:endParaRPr>
           </a:p>
         </p:txBody>
       </p:sp>
@@ -4804,14 +4950,6 @@
           <a:p>
             <a:pPr algn="ctr"/>
             <a:endParaRPr lang="en-US" sz="1600" i="1" dirty="0">
-              <a:solidFill>
-                <a:srgbClr val="F46D9B"/>
-              </a:solidFill>
-            </a:endParaRPr>
-          </a:p>
-          <a:p>
-            <a:pPr algn="ctr"/>
-            <a:endParaRPr lang="ru-RU" sz="1600" i="1" dirty="0">
               <a:solidFill>
                 <a:srgbClr val="F46D9B"/>
               </a:solidFill>

--- a/docs-michael/usability/slides/personas-deck.pptx
+++ b/docs-michael/usability/slides/personas-deck.pptx
@@ -4457,7 +4457,7 @@
             </a:endParaRPr>
           </a:p>
           <a:p>
-            <a:endParaRPr lang="ru-RU" sz="1600" dirty="0">
+            <a:endParaRPr lang="en-US" sz="1600" dirty="0">
               <a:solidFill>
                 <a:srgbClr val="9AA6B8"/>
               </a:solidFill>
@@ -4465,12 +4465,67 @@
           </a:p>
           <a:p>
             <a:r>
-              <a:rPr sz="1600" dirty="0">
+              <a:rPr lang="en-US" sz="1200" i="1" dirty="0" err="1">
+                <a:solidFill>
+                  <a:srgbClr val="F46D9B"/>
+                </a:solidFill>
+              </a:rPr>
+              <a:t>Openjiuwen</a:t>
+            </a:r>
+            <a:r>
+              <a:rPr lang="en-US" sz="1200" i="1" dirty="0">
+                <a:solidFill>
+                  <a:srgbClr val="F46D9B"/>
+                </a:solidFill>
+              </a:rPr>
+              <a:t> / </a:t>
+            </a:r>
+            <a:r>
+              <a:rPr lang="en-US" sz="1200" i="1" dirty="0" err="1">
+                <a:solidFill>
+                  <a:srgbClr val="F46D9B"/>
+                </a:solidFill>
+              </a:rPr>
+              <a:t>JiuwenSwarm</a:t>
+            </a:r>
+            <a:endParaRPr lang="ru-RU" sz="1200" dirty="0">
+              <a:solidFill>
+                <a:srgbClr val="9AA6B8"/>
+              </a:solidFill>
+            </a:endParaRPr>
+          </a:p>
+          <a:p>
+            <a:r>
+              <a:rPr lang="en-US" sz="1600" dirty="0">
                 <a:solidFill>
                   <a:srgbClr val="9AA6B8"/>
                 </a:solidFill>
               </a:rPr>
-              <a:t>Engine Contributor</a:t>
+              <a:t>	</a:t>
+            </a:r>
+            <a:r>
+              <a:rPr sz="1500" dirty="0">
+                <a:solidFill>
+                  <a:srgbClr val="9AA6B8"/>
+                </a:solidFill>
+              </a:rPr>
+              <a:t>Engine</a:t>
+            </a:r>
+            <a:r>
+              <a:rPr lang="en-US" sz="1500" dirty="0">
+                <a:solidFill>
+                  <a:srgbClr val="9AA6B8"/>
+                </a:solidFill>
+              </a:rPr>
+              <a:t> </a:t>
+            </a:r>
+            <a:r>
+              <a:rPr sz="1500" dirty="0">
+                <a:solidFill>
+                  <a:srgbClr val="9AA6B8"/>
+                </a:solidFill>
+              </a:rPr>
+              <a:t>Contributor</a:t>
             </a:r>
           </a:p>
         </p:txBody>
@@ -4530,8 +4585,7 @@
             </a:endParaRPr>
           </a:p>
           <a:p>
-            <a:pPr algn="ctr"/>
-            <a:endParaRPr sz="2400" b="1" dirty="0">
+            <a:endParaRPr lang="en-US" sz="2400" b="1" dirty="0">
               <a:solidFill>
                 <a:srgbClr val="66BB6A"/>
               </a:solidFill>
@@ -4568,6 +4622,45 @@
             </a:endParaRPr>
           </a:p>
           <a:p>
+            <a:endParaRPr lang="en-US" sz="1600" dirty="0">
+              <a:solidFill>
+                <a:srgbClr val="9AA6B8"/>
+              </a:solidFill>
+            </a:endParaRPr>
+          </a:p>
+          <a:p>
+            <a:r>
+              <a:rPr lang="en-US" sz="1600" dirty="0">
+                <a:solidFill>
+                  <a:schemeClr val="bg1">
+                    <a:lumMod val="50000"/>
+                  </a:schemeClr>
+                </a:solidFill>
+              </a:rPr>
+              <a:t>(Team-</a:t>
+            </a:r>
+            <a:r>
+              <a:rPr lang="en-US" sz="1600" dirty="0" err="1">
+                <a:solidFill>
+                  <a:schemeClr val="bg1">
+                    <a:lumMod val="50000"/>
+                  </a:schemeClr>
+                </a:solidFill>
+              </a:rPr>
+              <a:t>hoster</a:t>
+            </a:r>
+            <a:r>
+              <a:rPr lang="en-US" sz="1600" dirty="0">
+                <a:solidFill>
+                  <a:schemeClr val="bg1">
+                    <a:lumMod val="50000"/>
+                  </a:schemeClr>
+                </a:solidFill>
+              </a:rPr>
+              <a:t>) ?</a:t>
+            </a:r>
+          </a:p>
+          <a:p>
             <a:endParaRPr sz="1600" dirty="0">
               <a:solidFill>
                 <a:srgbClr val="9AA6B8"/>
@@ -4584,14 +4677,33 @@
               <a:t>Bot-</a:t>
             </a:r>
             <a:r>
-              <a:rPr sz="1600" dirty="0" err="1">
+              <a:rPr lang="en-US" sz="1600" dirty="0">
                 <a:solidFill>
                   <a:srgbClr val="9AA6B8"/>
                 </a:solidFill>
               </a:rPr>
-              <a:t>hoster</a:t>
-            </a:r>
-            <a:endParaRPr sz="1600" dirty="0">
+              <a:t>configurator</a:t>
+            </a:r>
+          </a:p>
+          <a:p>
+            <a:endParaRPr lang="en-US" sz="1600" dirty="0">
+              <a:solidFill>
+                <a:srgbClr val="9AA6B8"/>
+              </a:solidFill>
+            </a:endParaRPr>
+          </a:p>
+          <a:p>
+            <a:r>
+              <a:rPr lang="en-US" sz="1600" dirty="0">
+                <a:solidFill>
+                  <a:srgbClr val="9AA6B8"/>
+                </a:solidFill>
+              </a:rPr>
+              <a:t>IDE-developer</a:t>
+            </a:r>
+          </a:p>
+          <a:p>
+            <a:endParaRPr lang="en-US" sz="1600" dirty="0">
               <a:solidFill>
                 <a:srgbClr val="9AA6B8"/>
               </a:solidFill>
@@ -4663,7 +4775,7 @@
           </a:p>
           <a:p>
             <a:pPr algn="ctr"/>
-            <a:endParaRPr sz="1600" i="1" dirty="0">
+            <a:endParaRPr sz="1200" i="1" dirty="0">
               <a:solidFill>
                 <a:srgbClr val="FFB74D"/>
               </a:solidFill>
@@ -4737,6 +4849,13 @@
             </a:endParaRPr>
           </a:p>
           <a:p>
+            <a:endParaRPr lang="en-US" sz="1200" i="1" dirty="0">
+              <a:solidFill>
+                <a:srgbClr val="F46D9B"/>
+              </a:solidFill>
+            </a:endParaRPr>
+          </a:p>
+          <a:p>
             <a:r>
               <a:rPr lang="en-US" sz="1200" i="1" dirty="0">
                 <a:solidFill>
@@ -4825,6 +4944,13 @@
               </a:rPr>
               <a:t>(IM)</a:t>
             </a:r>
+          </a:p>
+          <a:p>
+            <a:endParaRPr lang="en-US" sz="1000" dirty="0">
+              <a:solidFill>
+                <a:srgbClr val="9AA6B8"/>
+              </a:solidFill>
+            </a:endParaRPr>
           </a:p>
           <a:p>
             <a:r>
